--- a/workshops/week02/git_slides.pptx
+++ b/workshops/week02/git_slides.pptx
@@ -9497,10 +9497,10 @@
           <a:ln/>
         </p:spPr>
         <p:txBody>
-          <a:bodyPr wrap="square" lIns="0" tIns="0" rIns="0" bIns="0" rtlCol="0" anchor="t"/>
-          <a:lstStyle/>
-          <a:p>
-            <a:pPr marL="0" indent="0" algn="ctr">
+          <a:bodyPr wrap="square" lIns="0" tIns="0" rIns="0" bIns="0" rtlCol="0" anchor="ctr"/>
+          <a:lstStyle/>
+          <a:p>
+            <a:pPr marL="0" indent="0" algn="r">
               <a:buNone/>
             </a:pPr>
             <a:r>
@@ -10141,7 +10141,7 @@
               <a:buNone/>
             </a:pPr>
             <a:r>
-              <a:rPr lang="en-US" sz="1350" b="1" dirty="0">
+              <a:rPr lang="en-US" sz="1350" b="1" i="1" dirty="0">
                 <a:solidFill>
                   <a:srgbClr val="1E2761"/>
                 </a:solidFill>
@@ -10152,7 +10152,7 @@
               <a:t>Use the email you'll use for GitHub</a:t>
             </a:r>
             <a:r>
-              <a:rPr lang="en-US" sz="1350" dirty="0">
+              <a:rPr lang="en-US" sz="1350" i="1" dirty="0">
                 <a:solidFill>
                   <a:srgbClr val="1E2761"/>
                 </a:solidFill>
@@ -12767,149 +12767,6 @@
                 <a:extLst>
                   <a:ext uri="{0D108BD9-81ED-4DB2-BD59-A6C34878D82A}">
                     <a16:rowId xmlns:a16="http://schemas.microsoft.com/office/drawing/2014/main" val="10000"/>
-                  </a:ext>
-                </a:extLst>
-              </a:tr>
-              <a:tr h="0">
-                <a:tc>
-                  <a:txBody>
-                    <a:bodyPr/>
-                    <a:lstStyle/>
-                    <a:p>
-                      <a:pPr marL="0" indent="0">
-                        <a:buNone/>
-                      </a:pPr>
-                      <a:r>
-                        <a:rPr lang="en-US" sz="1350" dirty="0">
-                          <a:solidFill>
-                            <a:srgbClr val="1E2761"/>
-                          </a:solidFill>
-                          <a:latin typeface="Calibri" pitchFamily="34" charset="0"/>
-                          <a:ea typeface="Calibri" pitchFamily="34" charset="-122"/>
-                          <a:cs typeface="Calibri" pitchFamily="34" charset="-120"/>
-                        </a:rPr>
-                        <a:t>*.ipynb</a:t>
-                      </a:r>
-                      <a:endParaRPr lang="en-US" sz="1350" dirty="0">
-                        <a:latin typeface="Calibri" charset="0"/>
-                        <a:ea typeface="Calibri" charset="0"/>
-                        <a:cs typeface="Calibri" charset="0"/>
-                      </a:endParaRPr>
-                    </a:p>
-                  </a:txBody>
-                  <a:tcPr marL="127000" marR="127000" marT="76200" marB="76200" anchor="ctr">
-                    <a:lnL w="9525" cap="flat" cmpd="sng" algn="ctr">
-                      <a:solidFill>
-                        <a:srgbClr val="D9DEE9"/>
-                      </a:solidFill>
-                      <a:prstDash val="solid"/>
-                      <a:round/>
-                      <a:headEnd type="none" w="med" len="med"/>
-                      <a:tailEnd type="none" w="med" len="med"/>
-                    </a:lnL>
-                    <a:lnR w="9525" cap="flat" cmpd="sng" algn="ctr">
-                      <a:solidFill>
-                        <a:srgbClr val="D9DEE9"/>
-                      </a:solidFill>
-                      <a:prstDash val="solid"/>
-                      <a:round/>
-                      <a:headEnd type="none" w="med" len="med"/>
-                      <a:tailEnd type="none" w="med" len="med"/>
-                    </a:lnR>
-                    <a:lnT w="9525" cap="flat" cmpd="sng" algn="ctr">
-                      <a:solidFill>
-                        <a:srgbClr val="D9DEE9"/>
-                      </a:solidFill>
-                      <a:prstDash val="solid"/>
-                      <a:round/>
-                      <a:headEnd type="none" w="med" len="med"/>
-                      <a:tailEnd type="none" w="med" len="med"/>
-                    </a:lnT>
-                    <a:lnB w="9525" cap="flat" cmpd="sng" algn="ctr">
-                      <a:solidFill>
-                        <a:srgbClr val="D9DEE9"/>
-                      </a:solidFill>
-                      <a:prstDash val="solid"/>
-                      <a:round/>
-                      <a:headEnd type="none" w="med" len="med"/>
-                      <a:tailEnd type="none" w="med" len="med"/>
-                    </a:lnB>
-                    <a:solidFill>
-                      <a:srgbClr val="FFFFFF"/>
-                    </a:solidFill>
-                  </a:tcPr>
-                </a:tc>
-                <a:tc>
-                  <a:txBody>
-                    <a:bodyPr/>
-                    <a:lstStyle/>
-                    <a:p>
-                      <a:pPr marL="0" indent="0">
-                        <a:buNone/>
-                      </a:pPr>
-                      <a:r>
-                        <a:rPr lang="en-US" sz="1350" dirty="0">
-                          <a:solidFill>
-                            <a:srgbClr val="1E2761"/>
-                          </a:solidFill>
-                          <a:latin typeface="Calibri" pitchFamily="34" charset="0"/>
-                          <a:ea typeface="Calibri" pitchFamily="34" charset="-122"/>
-                          <a:cs typeface="Calibri" pitchFamily="34" charset="-120"/>
-                        </a:rPr>
-                        <a:t>Notebooks are given material, not this week's exercise scripts</a:t>
-                      </a:r>
-                      <a:endParaRPr lang="en-US" sz="1350" dirty="0">
-                        <a:latin typeface="Calibri" charset="0"/>
-                        <a:ea typeface="Calibri" charset="0"/>
-                        <a:cs typeface="Calibri" charset="0"/>
-                      </a:endParaRPr>
-                    </a:p>
-                  </a:txBody>
-                  <a:tcPr marL="127000" marR="127000" marT="76200" marB="76200" anchor="ctr">
-                    <a:lnL w="9525" cap="flat" cmpd="sng" algn="ctr">
-                      <a:solidFill>
-                        <a:srgbClr val="D9DEE9"/>
-                      </a:solidFill>
-                      <a:prstDash val="solid"/>
-                      <a:round/>
-                      <a:headEnd type="none" w="med" len="med"/>
-                      <a:tailEnd type="none" w="med" len="med"/>
-                    </a:lnL>
-                    <a:lnR w="9525" cap="flat" cmpd="sng" algn="ctr">
-                      <a:solidFill>
-                        <a:srgbClr val="D9DEE9"/>
-                      </a:solidFill>
-                      <a:prstDash val="solid"/>
-                      <a:round/>
-                      <a:headEnd type="none" w="med" len="med"/>
-                      <a:tailEnd type="none" w="med" len="med"/>
-                    </a:lnR>
-                    <a:lnT w="9525" cap="flat" cmpd="sng" algn="ctr">
-                      <a:solidFill>
-                        <a:srgbClr val="D9DEE9"/>
-                      </a:solidFill>
-                      <a:prstDash val="solid"/>
-                      <a:round/>
-                      <a:headEnd type="none" w="med" len="med"/>
-                      <a:tailEnd type="none" w="med" len="med"/>
-                    </a:lnT>
-                    <a:lnB w="9525" cap="flat" cmpd="sng" algn="ctr">
-                      <a:solidFill>
-                        <a:srgbClr val="D9DEE9"/>
-                      </a:solidFill>
-                      <a:prstDash val="solid"/>
-                      <a:round/>
-                      <a:headEnd type="none" w="med" len="med"/>
-                      <a:tailEnd type="none" w="med" len="med"/>
-                    </a:lnB>
-                    <a:solidFill>
-                      <a:srgbClr val="FFFFFF"/>
-                    </a:solidFill>
-                  </a:tcPr>
-                </a:tc>
-                <a:extLst>
-                  <a:ext uri="{0D108BD9-81ED-4DB2-BD59-A6C34878D82A}">
-                    <a16:rowId xmlns:a16="http://schemas.microsoft.com/office/drawing/2014/main" val="10001"/>
                   </a:ext>
                 </a:extLst>
               </a:tr>

--- a/workshops/week02/git_slides.pptx
+++ b/workshops/week02/git_slides.pptx
@@ -5,7 +5,7 @@
     <p:sldMasterId id="2147483648" r:id="rId1"/>
   </p:sldMasterIdLst>
   <p:notesMasterIdLst>
-    <p:notesMasterId r:id="rId20"/>
+    <p:notesMasterId r:id="rId21"/>
   </p:notesMasterIdLst>
   <p:sldIdLst>
     <p:sldId id="280" r:id="rId2"/>
@@ -14,19 +14,19 @@
     <p:sldId id="259" r:id="rId5"/>
     <p:sldId id="260" r:id="rId6"/>
     <p:sldId id="261" r:id="rId7"/>
-    <p:sldId id="262" r:id="rId8"/>
-    <p:sldId id="281" r:id="rId27"/>
+    <p:sldId id="281" r:id="rId8"/>
     <p:sldId id="263" r:id="rId9"/>
-    <p:sldId id="264" r:id="rId10"/>
-    <p:sldId id="265" r:id="rId11"/>
-    <p:sldId id="266" r:id="rId12"/>
-    <p:sldId id="267" r:id="rId13"/>
-    <p:sldId id="268" r:id="rId14"/>
-    <p:sldId id="269" r:id="rId15"/>
-    <p:sldId id="270" r:id="rId16"/>
-    <p:sldId id="271" r:id="rId17"/>
-    <p:sldId id="272" r:id="rId18"/>
-    <p:sldId id="279" r:id="rId19"/>
+    <p:sldId id="262" r:id="rId10"/>
+    <p:sldId id="264" r:id="rId11"/>
+    <p:sldId id="265" r:id="rId12"/>
+    <p:sldId id="266" r:id="rId13"/>
+    <p:sldId id="267" r:id="rId14"/>
+    <p:sldId id="268" r:id="rId15"/>
+    <p:sldId id="269" r:id="rId16"/>
+    <p:sldId id="270" r:id="rId17"/>
+    <p:sldId id="271" r:id="rId18"/>
+    <p:sldId id="272" r:id="rId19"/>
+    <p:sldId id="279" r:id="rId20"/>
   </p:sldIdLst>
   <p:sldSz cx="12192000" cy="6858000"/>
   <p:notesSz cx="6858000" cy="12192000"/>
@@ -1314,7 +1314,7 @@
           <a:p>
             <a:fld id="{F7021451-1387-4CA6-816F-3879F97B5CBC}" type="slidenum">
               <a:rPr lang="en-US"/>
-              <a:t>10</a:t>
+              <a:t>11</a:t>
             </a:fld>
             <a:endParaRPr lang="en-US"/>
           </a:p>
@@ -1398,7 +1398,7 @@
           <a:p>
             <a:fld id="{F7021451-1387-4CA6-816F-3879F97B5CBC}" type="slidenum">
               <a:rPr lang="en-US"/>
-              <a:t>11</a:t>
+              <a:t>12</a:t>
             </a:fld>
             <a:endParaRPr lang="en-US"/>
           </a:p>
@@ -1482,7 +1482,7 @@
           <a:p>
             <a:fld id="{F7021451-1387-4CA6-816F-3879F97B5CBC}" type="slidenum">
               <a:rPr lang="en-US"/>
-              <a:t>12</a:t>
+              <a:t>13</a:t>
             </a:fld>
             <a:endParaRPr lang="en-US"/>
           </a:p>
@@ -1566,7 +1566,7 @@
           <a:p>
             <a:fld id="{F7021451-1387-4CA6-816F-3879F97B5CBC}" type="slidenum">
               <a:rPr lang="en-US"/>
-              <a:t>13</a:t>
+              <a:t>14</a:t>
             </a:fld>
             <a:endParaRPr lang="en-US"/>
           </a:p>
@@ -1650,7 +1650,7 @@
           <a:p>
             <a:fld id="{F7021451-1387-4CA6-816F-3879F97B5CBC}" type="slidenum">
               <a:rPr lang="en-US"/>
-              <a:t>14</a:t>
+              <a:t>15</a:t>
             </a:fld>
             <a:endParaRPr lang="en-US"/>
           </a:p>
@@ -1734,7 +1734,7 @@
           <a:p>
             <a:fld id="{F7021451-1387-4CA6-816F-3879F97B5CBC}" type="slidenum">
               <a:rPr lang="en-US"/>
-              <a:t>15</a:t>
+              <a:t>16</a:t>
             </a:fld>
             <a:endParaRPr lang="en-US"/>
           </a:p>
@@ -1818,7 +1818,7 @@
           <a:p>
             <a:fld id="{F7021451-1387-4CA6-816F-3879F97B5CBC}" type="slidenum">
               <a:rPr lang="en-US"/>
-              <a:t>16</a:t>
+              <a:t>17</a:t>
             </a:fld>
             <a:endParaRPr lang="en-US"/>
           </a:p>
@@ -1902,7 +1902,7 @@
           <a:p>
             <a:fld id="{F7021451-1387-4CA6-816F-3879F97B5CBC}" type="slidenum">
               <a:rPr lang="en-US"/>
-              <a:t>17</a:t>
+              <a:t>18</a:t>
             </a:fld>
             <a:endParaRPr lang="en-US"/>
           </a:p>
@@ -1986,7 +1986,7 @@
           <a:p>
             <a:fld id="{F7021451-1387-4CA6-816F-3879F97B5CBC}" type="slidenum">
               <a:rPr lang="en-US"/>
-              <a:t>18</a:t>
+              <a:t>19</a:t>
             </a:fld>
             <a:endParaRPr lang="en-US"/>
           </a:p>
@@ -2490,7 +2490,7 @@
           <a:p>
             <a:fld id="{F7021451-1387-4CA6-816F-3879F97B5CBC}" type="slidenum">
               <a:rPr lang="en-US"/>
-              <a:t>7</a:t>
+              <a:t>8</a:t>
             </a:fld>
             <a:endParaRPr lang="en-US"/>
           </a:p>
@@ -2574,7 +2574,7 @@
           <a:p>
             <a:fld id="{F7021451-1387-4CA6-816F-3879F97B5CBC}" type="slidenum">
               <a:rPr lang="en-US"/>
-              <a:t>8</a:t>
+              <a:t>9</a:t>
             </a:fld>
             <a:endParaRPr lang="en-US"/>
           </a:p>
@@ -2658,7 +2658,7 @@
           <a:p>
             <a:fld id="{F7021451-1387-4CA6-816F-3879F97B5CBC}" type="slidenum">
               <a:rPr lang="en-US"/>
-              <a:t>9</a:t>
+              <a:t>10</a:t>
             </a:fld>
             <a:endParaRPr lang="en-US"/>
           </a:p>
@@ -3327,6 +3327,1207 @@
 
 <file path=ppt/slides/slide10.xml><?xml version="1.0" encoding="utf-8"?>
 <p:sld xmlns:a="http://schemas.openxmlformats.org/drawingml/2006/main" xmlns:r="http://schemas.openxmlformats.org/officeDocument/2006/relationships" xmlns:p="http://schemas.openxmlformats.org/presentationml/2006/main">
+  <p:cSld name="Slide 9">
+    <p:bg>
+      <p:bgPr>
+        <a:solidFill>
+          <a:srgbClr val="FFFFFF"/>
+        </a:solidFill>
+        <a:effectLst/>
+      </p:bgPr>
+    </p:bg>
+    <p:spTree>
+      <p:nvGrpSpPr>
+        <p:cNvPr id="1" name=""/>
+        <p:cNvGrpSpPr/>
+        <p:nvPr/>
+      </p:nvGrpSpPr>
+      <p:grpSpPr>
+        <a:xfrm>
+          <a:off x="0" y="0"/>
+          <a:ext cx="0" cy="0"/>
+          <a:chOff x="0" y="0"/>
+          <a:chExt cx="0" cy="0"/>
+        </a:xfrm>
+      </p:grpSpPr>
+      <p:sp>
+        <p:nvSpPr>
+          <p:cNvPr id="2" name="Text 0"/>
+          <p:cNvSpPr/>
+          <p:nvPr/>
+        </p:nvSpPr>
+        <p:spPr>
+          <a:xfrm>
+            <a:off x="11274552" y="6492240"/>
+            <a:ext cx="457200" cy="274320"/>
+          </a:xfrm>
+          <a:prstGeom prst="rect">
+            <a:avLst/>
+          </a:prstGeom>
+          <a:noFill/>
+          <a:ln/>
+        </p:spPr>
+        <p:txBody>
+          <a:bodyPr wrap="square" lIns="0" tIns="0" rIns="0" bIns="0" rtlCol="0" anchor="ctr"/>
+          <a:lstStyle/>
+          <a:p>
+            <a:pPr marL="0" indent="0" algn="r">
+              <a:buNone/>
+            </a:pPr>
+            <a:r>
+              <a:rPr lang="en-US" sz="1100" dirty="0">
+                <a:solidFill>
+                  <a:srgbClr val="5B6472"/>
+                </a:solidFill>
+                <a:latin typeface="Calibri" pitchFamily="34" charset="0"/>
+                <a:ea typeface="Calibri" pitchFamily="34" charset="-122"/>
+                <a:cs typeface="Calibri" pitchFamily="34" charset="-120"/>
+              </a:rPr>
+              <a:t>10</a:t>
+            </a:r>
+            <a:endParaRPr lang="en-US" sz="1100" dirty="0"/>
+          </a:p>
+        </p:txBody>
+      </p:sp>
+      <p:sp>
+        <p:nvSpPr>
+          <p:cNvPr id="3" name="Shape 1"/>
+          <p:cNvSpPr/>
+          <p:nvPr/>
+        </p:nvSpPr>
+        <p:spPr>
+          <a:xfrm>
+            <a:off x="457200" y="411480"/>
+            <a:ext cx="2011680" cy="329184"/>
+          </a:xfrm>
+          <a:prstGeom prst="roundRect">
+            <a:avLst>
+              <a:gd name="adj" fmla="val 50000"/>
+            </a:avLst>
+          </a:prstGeom>
+          <a:solidFill>
+            <a:srgbClr val="1E2761"/>
+          </a:solidFill>
+          <a:ln/>
+        </p:spPr>
+        <p:txBody>
+          <a:bodyPr/>
+          <a:lstStyle/>
+          <a:p>
+            <a:endParaRPr lang="nb-NO"/>
+          </a:p>
+        </p:txBody>
+      </p:sp>
+      <p:sp>
+        <p:nvSpPr>
+          <p:cNvPr id="4" name="Text 2"/>
+          <p:cNvSpPr/>
+          <p:nvPr/>
+        </p:nvSpPr>
+        <p:spPr>
+          <a:xfrm>
+            <a:off x="457200" y="411480"/>
+            <a:ext cx="2011680" cy="329184"/>
+          </a:xfrm>
+          <a:prstGeom prst="rect">
+            <a:avLst/>
+          </a:prstGeom>
+          <a:noFill/>
+          <a:ln/>
+        </p:spPr>
+        <p:txBody>
+          <a:bodyPr wrap="square" lIns="0" tIns="0" rIns="0" bIns="0" rtlCol="0" anchor="ctr"/>
+          <a:lstStyle/>
+          <a:p>
+            <a:pPr marL="0" indent="0" algn="ctr">
+              <a:buNone/>
+            </a:pPr>
+            <a:r>
+              <a:rPr lang="en-US" sz="1100" b="1" kern="0" spc="100" dirty="0">
+                <a:solidFill>
+                  <a:srgbClr val="FFFFFF"/>
+                </a:solidFill>
+                <a:latin typeface="Calibri" pitchFamily="34" charset="0"/>
+                <a:ea typeface="Calibri" pitchFamily="34" charset="-122"/>
+                <a:cs typeface="Calibri" pitchFamily="34" charset="-120"/>
+              </a:rPr>
+              <a:t>EXERCISE</a:t>
+            </a:r>
+            <a:endParaRPr lang="en-US" sz="1100" dirty="0"/>
+          </a:p>
+        </p:txBody>
+      </p:sp>
+      <p:sp>
+        <p:nvSpPr>
+          <p:cNvPr id="7" name="Shape 5"/>
+          <p:cNvSpPr/>
+          <p:nvPr/>
+        </p:nvSpPr>
+        <p:spPr>
+          <a:xfrm>
+            <a:off x="10771632" y="384048"/>
+            <a:ext cx="822960" cy="822960"/>
+          </a:xfrm>
+          <a:prstGeom prst="ellipse">
+            <a:avLst/>
+          </a:prstGeom>
+          <a:solidFill>
+            <a:srgbClr val="2A3B8F"/>
+          </a:solidFill>
+          <a:ln/>
+        </p:spPr>
+        <p:txBody>
+          <a:bodyPr/>
+          <a:lstStyle/>
+          <a:p>
+            <a:endParaRPr lang="nb-NO"/>
+          </a:p>
+        </p:txBody>
+      </p:sp>
+      <p:pic>
+        <p:nvPicPr>
+          <p:cNvPr id="8" name="Image 0" descr="icons/play.png"/>
+          <p:cNvPicPr>
+            <a:picLocks noChangeAspect="1"/>
+          </p:cNvPicPr>
+          <p:nvPr/>
+        </p:nvPicPr>
+        <p:blipFill>
+          <a:blip r:embed="rId3"/>
+          <a:stretch>
+            <a:fillRect/>
+          </a:stretch>
+        </p:blipFill>
+        <p:spPr>
+          <a:xfrm>
+            <a:off x="10963656" y="576072"/>
+            <a:ext cx="438912" cy="438912"/>
+          </a:xfrm>
+          <a:prstGeom prst="rect">
+            <a:avLst/>
+          </a:prstGeom>
+        </p:spPr>
+      </p:pic>
+      <p:sp>
+        <p:nvSpPr>
+          <p:cNvPr id="9" name="Text 6"/>
+          <p:cNvSpPr/>
+          <p:nvPr/>
+        </p:nvSpPr>
+        <p:spPr>
+          <a:xfrm>
+            <a:off x="457200" y="896112"/>
+            <a:ext cx="11274552" cy="822960"/>
+          </a:xfrm>
+          <a:prstGeom prst="rect">
+            <a:avLst/>
+          </a:prstGeom>
+          <a:noFill/>
+          <a:ln/>
+        </p:spPr>
+        <p:txBody>
+          <a:bodyPr wrap="square" lIns="0" tIns="0" rIns="0" bIns="0" rtlCol="0" anchor="t"/>
+          <a:lstStyle/>
+          <a:p>
+            <a:pPr marL="0" indent="0" algn="l">
+              <a:buNone/>
+            </a:pPr>
+            <a:r>
+              <a:rPr lang="en-US" sz="3200" b="1" dirty="0">
+                <a:solidFill>
+                  <a:srgbClr val="1E2761"/>
+                </a:solidFill>
+                <a:latin typeface="Cambria" pitchFamily="34" charset="0"/>
+                <a:ea typeface="Cambria" pitchFamily="34" charset="-122"/>
+                <a:cs typeface="Cambria" pitchFamily="34" charset="-120"/>
+              </a:rPr>
+              <a:t>Exercise 1 — Divide Two Integers</a:t>
+            </a:r>
+            <a:endParaRPr lang="en-US" sz="3200" dirty="0"/>
+          </a:p>
+        </p:txBody>
+      </p:sp>
+      <p:sp>
+        <p:nvSpPr>
+          <p:cNvPr id="10" name="Shape 7"/>
+          <p:cNvSpPr/>
+          <p:nvPr/>
+        </p:nvSpPr>
+        <p:spPr>
+          <a:xfrm>
+            <a:off x="822960" y="1828800"/>
+            <a:ext cx="384048" cy="384048"/>
+          </a:xfrm>
+          <a:prstGeom prst="ellipse">
+            <a:avLst/>
+          </a:prstGeom>
+          <a:solidFill>
+            <a:srgbClr val="F96167"/>
+          </a:solidFill>
+          <a:ln/>
+        </p:spPr>
+        <p:txBody>
+          <a:bodyPr/>
+          <a:lstStyle/>
+          <a:p>
+            <a:endParaRPr lang="nb-NO"/>
+          </a:p>
+        </p:txBody>
+      </p:sp>
+      <p:sp>
+        <p:nvSpPr>
+          <p:cNvPr id="11" name="Text 8"/>
+          <p:cNvSpPr/>
+          <p:nvPr/>
+        </p:nvSpPr>
+        <p:spPr>
+          <a:xfrm>
+            <a:off x="822960" y="1828800"/>
+            <a:ext cx="384048" cy="384048"/>
+          </a:xfrm>
+          <a:prstGeom prst="rect">
+            <a:avLst/>
+          </a:prstGeom>
+          <a:noFill/>
+          <a:ln/>
+        </p:spPr>
+        <p:txBody>
+          <a:bodyPr wrap="square" lIns="0" tIns="0" rIns="0" bIns="0" rtlCol="0" anchor="ctr"/>
+          <a:lstStyle/>
+          <a:p>
+            <a:pPr marL="0" indent="0" algn="ctr">
+              <a:buNone/>
+            </a:pPr>
+            <a:r>
+              <a:rPr lang="en-US" sz="1400" b="1" dirty="0">
+                <a:solidFill>
+                  <a:srgbClr val="FFFFFF"/>
+                </a:solidFill>
+                <a:latin typeface="Calibri" pitchFamily="34" charset="0"/>
+                <a:ea typeface="Calibri" pitchFamily="34" charset="-122"/>
+                <a:cs typeface="Calibri" pitchFamily="34" charset="-120"/>
+              </a:rPr>
+              <a:t>1</a:t>
+            </a:r>
+            <a:endParaRPr lang="en-US" sz="1400" dirty="0"/>
+          </a:p>
+        </p:txBody>
+      </p:sp>
+      <p:sp>
+        <p:nvSpPr>
+          <p:cNvPr id="12" name="Text 9"/>
+          <p:cNvSpPr/>
+          <p:nvPr/>
+        </p:nvSpPr>
+        <p:spPr>
+          <a:xfrm>
+            <a:off x="1371600" y="1801368"/>
+            <a:ext cx="9966960" cy="566928"/>
+          </a:xfrm>
+          <a:prstGeom prst="rect">
+            <a:avLst/>
+          </a:prstGeom>
+          <a:noFill/>
+          <a:ln/>
+        </p:spPr>
+        <p:txBody>
+          <a:bodyPr wrap="square" lIns="0" tIns="0" rIns="0" bIns="0" rtlCol="0" anchor="ctr"/>
+          <a:lstStyle/>
+          <a:p>
+            <a:pPr marL="0" indent="0" algn="l">
+              <a:buNone/>
+            </a:pPr>
+            <a:r>
+              <a:rPr lang="en-US" sz="1600" dirty="0">
+                <a:solidFill>
+                  <a:srgbClr val="1E2761"/>
+                </a:solidFill>
+                <a:latin typeface="Calibri" pitchFamily="34" charset="0"/>
+                <a:ea typeface="Calibri" pitchFamily="34" charset="-122"/>
+                <a:cs typeface="Calibri" pitchFamily="34" charset="-120"/>
+              </a:rPr>
+              <a:t>In week02, create a new file: ex1.py</a:t>
+            </a:r>
+            <a:endParaRPr lang="en-US" sz="1600" dirty="0"/>
+          </a:p>
+        </p:txBody>
+      </p:sp>
+      <p:sp>
+        <p:nvSpPr>
+          <p:cNvPr id="13" name="Shape 10"/>
+          <p:cNvSpPr/>
+          <p:nvPr/>
+        </p:nvSpPr>
+        <p:spPr>
+          <a:xfrm>
+            <a:off x="822960" y="2395728"/>
+            <a:ext cx="384048" cy="384048"/>
+          </a:xfrm>
+          <a:prstGeom prst="ellipse">
+            <a:avLst/>
+          </a:prstGeom>
+          <a:solidFill>
+            <a:srgbClr val="F96167"/>
+          </a:solidFill>
+          <a:ln/>
+        </p:spPr>
+        <p:txBody>
+          <a:bodyPr/>
+          <a:lstStyle/>
+          <a:p>
+            <a:endParaRPr lang="nb-NO"/>
+          </a:p>
+        </p:txBody>
+      </p:sp>
+      <p:sp>
+        <p:nvSpPr>
+          <p:cNvPr id="14" name="Text 11"/>
+          <p:cNvSpPr/>
+          <p:nvPr/>
+        </p:nvSpPr>
+        <p:spPr>
+          <a:xfrm>
+            <a:off x="822960" y="2395728"/>
+            <a:ext cx="384048" cy="384048"/>
+          </a:xfrm>
+          <a:prstGeom prst="rect">
+            <a:avLst/>
+          </a:prstGeom>
+          <a:noFill/>
+          <a:ln/>
+        </p:spPr>
+        <p:txBody>
+          <a:bodyPr wrap="square" lIns="0" tIns="0" rIns="0" bIns="0" rtlCol="0" anchor="ctr"/>
+          <a:lstStyle/>
+          <a:p>
+            <a:pPr marL="0" indent="0" algn="ctr">
+              <a:buNone/>
+            </a:pPr>
+            <a:r>
+              <a:rPr lang="en-US" sz="1400" b="1" dirty="0">
+                <a:solidFill>
+                  <a:srgbClr val="FFFFFF"/>
+                </a:solidFill>
+                <a:latin typeface="Calibri" pitchFamily="34" charset="0"/>
+                <a:ea typeface="Calibri" pitchFamily="34" charset="-122"/>
+                <a:cs typeface="Calibri" pitchFamily="34" charset="-120"/>
+              </a:rPr>
+              <a:t>2</a:t>
+            </a:r>
+            <a:endParaRPr lang="en-US" sz="1400" dirty="0"/>
+          </a:p>
+        </p:txBody>
+      </p:sp>
+      <p:sp>
+        <p:nvSpPr>
+          <p:cNvPr id="15" name="Text 12"/>
+          <p:cNvSpPr/>
+          <p:nvPr/>
+        </p:nvSpPr>
+        <p:spPr>
+          <a:xfrm>
+            <a:off x="1371600" y="2368296"/>
+            <a:ext cx="9966960" cy="566928"/>
+          </a:xfrm>
+          <a:prstGeom prst="rect">
+            <a:avLst/>
+          </a:prstGeom>
+          <a:noFill/>
+          <a:ln/>
+        </p:spPr>
+        <p:txBody>
+          <a:bodyPr wrap="square" lIns="0" tIns="0" rIns="0" bIns="0" rtlCol="0" anchor="ctr"/>
+          <a:lstStyle/>
+          <a:p>
+            <a:pPr marL="0" indent="0" algn="l">
+              <a:buNone/>
+            </a:pPr>
+            <a:r>
+              <a:rPr lang="en-US" sz="1600" dirty="0">
+                <a:solidFill>
+                  <a:srgbClr val="1E2761"/>
+                </a:solidFill>
+                <a:latin typeface="Calibri" pitchFamily="34" charset="0"/>
+                <a:ea typeface="Calibri" pitchFamily="34" charset="-122"/>
+                <a:cs typeface="Calibri" pitchFamily="34" charset="-120"/>
+              </a:rPr>
+              <a:t>Write a program that prompts for two integers (input), divides the first by the second, and displays the result with one decimal</a:t>
+            </a:r>
+            <a:endParaRPr lang="en-US" sz="1600" dirty="0"/>
+          </a:p>
+        </p:txBody>
+      </p:sp>
+      <p:sp>
+        <p:nvSpPr>
+          <p:cNvPr id="16" name="Shape 13"/>
+          <p:cNvSpPr/>
+          <p:nvPr/>
+        </p:nvSpPr>
+        <p:spPr>
+          <a:xfrm>
+            <a:off x="822960" y="2962656"/>
+            <a:ext cx="384048" cy="384048"/>
+          </a:xfrm>
+          <a:prstGeom prst="ellipse">
+            <a:avLst/>
+          </a:prstGeom>
+          <a:solidFill>
+            <a:srgbClr val="F96167"/>
+          </a:solidFill>
+          <a:ln/>
+        </p:spPr>
+        <p:txBody>
+          <a:bodyPr/>
+          <a:lstStyle/>
+          <a:p>
+            <a:endParaRPr lang="nb-NO"/>
+          </a:p>
+        </p:txBody>
+      </p:sp>
+      <p:sp>
+        <p:nvSpPr>
+          <p:cNvPr id="17" name="Text 14"/>
+          <p:cNvSpPr/>
+          <p:nvPr/>
+        </p:nvSpPr>
+        <p:spPr>
+          <a:xfrm>
+            <a:off x="822960" y="2962656"/>
+            <a:ext cx="384048" cy="384048"/>
+          </a:xfrm>
+          <a:prstGeom prst="rect">
+            <a:avLst/>
+          </a:prstGeom>
+          <a:noFill/>
+          <a:ln/>
+        </p:spPr>
+        <p:txBody>
+          <a:bodyPr wrap="square" lIns="0" tIns="0" rIns="0" bIns="0" rtlCol="0" anchor="ctr"/>
+          <a:lstStyle/>
+          <a:p>
+            <a:pPr marL="0" indent="0" algn="ctr">
+              <a:buNone/>
+            </a:pPr>
+            <a:r>
+              <a:rPr lang="en-US" sz="1400" b="1" dirty="0">
+                <a:solidFill>
+                  <a:srgbClr val="FFFFFF"/>
+                </a:solidFill>
+                <a:latin typeface="Calibri" pitchFamily="34" charset="0"/>
+                <a:ea typeface="Calibri" pitchFamily="34" charset="-122"/>
+                <a:cs typeface="Calibri" pitchFamily="34" charset="-120"/>
+              </a:rPr>
+              <a:t>3</a:t>
+            </a:r>
+            <a:endParaRPr lang="en-US" sz="1400" dirty="0"/>
+          </a:p>
+        </p:txBody>
+      </p:sp>
+      <p:sp>
+        <p:nvSpPr>
+          <p:cNvPr id="18" name="Text 15"/>
+          <p:cNvSpPr/>
+          <p:nvPr/>
+        </p:nvSpPr>
+        <p:spPr>
+          <a:xfrm>
+            <a:off x="1371600" y="2935224"/>
+            <a:ext cx="9966960" cy="566928"/>
+          </a:xfrm>
+          <a:prstGeom prst="rect">
+            <a:avLst/>
+          </a:prstGeom>
+          <a:noFill/>
+          <a:ln/>
+        </p:spPr>
+        <p:txBody>
+          <a:bodyPr wrap="square" lIns="0" tIns="0" rIns="0" bIns="0" rtlCol="0" anchor="ctr"/>
+          <a:lstStyle/>
+          <a:p>
+            <a:pPr marL="0" indent="0" algn="l">
+              <a:buNone/>
+            </a:pPr>
+            <a:r>
+              <a:rPr lang="en-US" sz="1600" dirty="0">
+                <a:solidFill>
+                  <a:srgbClr val="1E2761"/>
+                </a:solidFill>
+                <a:latin typeface="Calibri" pitchFamily="34" charset="0"/>
+                <a:ea typeface="Calibri" pitchFamily="34" charset="-122"/>
+                <a:cs typeface="Calibri" pitchFamily="34" charset="-120"/>
+              </a:rPr>
+              <a:t>Run it (▶ Play button) and check the output</a:t>
+            </a:r>
+            <a:endParaRPr lang="en-US" sz="1600" dirty="0"/>
+          </a:p>
+        </p:txBody>
+      </p:sp>
+      <p:sp>
+        <p:nvSpPr>
+          <p:cNvPr id="19" name="Shape 16"/>
+          <p:cNvSpPr/>
+          <p:nvPr/>
+        </p:nvSpPr>
+        <p:spPr>
+          <a:xfrm>
+            <a:off x="822960" y="3529584"/>
+            <a:ext cx="384048" cy="384048"/>
+          </a:xfrm>
+          <a:prstGeom prst="ellipse">
+            <a:avLst/>
+          </a:prstGeom>
+          <a:solidFill>
+            <a:srgbClr val="F96167"/>
+          </a:solidFill>
+          <a:ln/>
+        </p:spPr>
+        <p:txBody>
+          <a:bodyPr/>
+          <a:lstStyle/>
+          <a:p>
+            <a:endParaRPr lang="nb-NO"/>
+          </a:p>
+        </p:txBody>
+      </p:sp>
+      <p:sp>
+        <p:nvSpPr>
+          <p:cNvPr id="20" name="Text 17"/>
+          <p:cNvSpPr/>
+          <p:nvPr/>
+        </p:nvSpPr>
+        <p:spPr>
+          <a:xfrm>
+            <a:off x="822960" y="3529584"/>
+            <a:ext cx="384048" cy="384048"/>
+          </a:xfrm>
+          <a:prstGeom prst="rect">
+            <a:avLst/>
+          </a:prstGeom>
+          <a:noFill/>
+          <a:ln/>
+        </p:spPr>
+        <p:txBody>
+          <a:bodyPr wrap="square" lIns="0" tIns="0" rIns="0" bIns="0" rtlCol="0" anchor="ctr"/>
+          <a:lstStyle/>
+          <a:p>
+            <a:pPr marL="0" indent="0" algn="ctr">
+              <a:buNone/>
+            </a:pPr>
+            <a:r>
+              <a:rPr lang="en-US" sz="1400" b="1" dirty="0">
+                <a:solidFill>
+                  <a:srgbClr val="FFFFFF"/>
+                </a:solidFill>
+                <a:latin typeface="Calibri" pitchFamily="34" charset="0"/>
+                <a:ea typeface="Calibri" pitchFamily="34" charset="-122"/>
+                <a:cs typeface="Calibri" pitchFamily="34" charset="-120"/>
+              </a:rPr>
+              <a:t>4</a:t>
+            </a:r>
+            <a:endParaRPr lang="en-US" sz="1400" dirty="0"/>
+          </a:p>
+        </p:txBody>
+      </p:sp>
+      <p:sp>
+        <p:nvSpPr>
+          <p:cNvPr id="21" name="Text 18"/>
+          <p:cNvSpPr/>
+          <p:nvPr/>
+        </p:nvSpPr>
+        <p:spPr>
+          <a:xfrm>
+            <a:off x="1371600" y="3502152"/>
+            <a:ext cx="9966960" cy="566928"/>
+          </a:xfrm>
+          <a:prstGeom prst="rect">
+            <a:avLst/>
+          </a:prstGeom>
+          <a:noFill/>
+          <a:ln/>
+        </p:spPr>
+        <p:txBody>
+          <a:bodyPr wrap="square" lIns="0" tIns="0" rIns="0" bIns="0" rtlCol="0" anchor="ctr"/>
+          <a:lstStyle/>
+          <a:p>
+            <a:r>
+              <a:rPr lang="en-US" sz="1600" dirty="0">
+                <a:solidFill>
+                  <a:srgbClr val="1E2761"/>
+                </a:solidFill>
+                <a:latin typeface="Calibri" pitchFamily="34" charset="0"/>
+                <a:ea typeface="Calibri" pitchFamily="34" charset="-122"/>
+                <a:cs typeface="Calibri" pitchFamily="34" charset="-120"/>
+              </a:rPr>
+              <a:t>Open Source Control — see ex1.py listed under Changes. </a:t>
+            </a:r>
+            <a:r>
+              <a:rPr lang="nb-NO" sz="1600" dirty="0" err="1">
+                <a:solidFill>
+                  <a:srgbClr val="1E2761"/>
+                </a:solidFill>
+              </a:rPr>
+              <a:t>You'll</a:t>
+            </a:r>
+            <a:r>
+              <a:rPr lang="nb-NO" sz="1600" dirty="0">
+                <a:solidFill>
+                  <a:srgbClr val="1E2761"/>
+                </a:solidFill>
+              </a:rPr>
+              <a:t> </a:t>
+            </a:r>
+            <a:r>
+              <a:rPr lang="nb-NO" sz="1600" dirty="0" err="1">
+                <a:solidFill>
+                  <a:srgbClr val="1E2761"/>
+                </a:solidFill>
+              </a:rPr>
+              <a:t>also</a:t>
+            </a:r>
+            <a:r>
+              <a:rPr lang="nb-NO" sz="1600" dirty="0">
+                <a:solidFill>
+                  <a:srgbClr val="1E2761"/>
+                </a:solidFill>
+              </a:rPr>
+              <a:t> </a:t>
+            </a:r>
+            <a:r>
+              <a:rPr lang="nb-NO" sz="1600" dirty="0" err="1">
+                <a:solidFill>
+                  <a:srgbClr val="1E2761"/>
+                </a:solidFill>
+              </a:rPr>
+              <a:t>see</a:t>
+            </a:r>
+            <a:r>
+              <a:rPr lang="nb-NO" sz="1600" dirty="0">
+                <a:solidFill>
+                  <a:srgbClr val="1E2761"/>
+                </a:solidFill>
+              </a:rPr>
+              <a:t> 01-python-basics.ipynb </a:t>
+            </a:r>
+            <a:r>
+              <a:rPr lang="nb-NO" sz="1600" dirty="0" err="1">
+                <a:solidFill>
+                  <a:srgbClr val="1E2761"/>
+                </a:solidFill>
+              </a:rPr>
+              <a:t>listed</a:t>
+            </a:r>
+            <a:r>
+              <a:rPr lang="nb-NO" sz="1600" dirty="0">
+                <a:solidFill>
+                  <a:srgbClr val="1E2761"/>
+                </a:solidFill>
+              </a:rPr>
+              <a:t> — </a:t>
+            </a:r>
+            <a:r>
+              <a:rPr lang="nb-NO" sz="1600" dirty="0" err="1">
+                <a:solidFill>
+                  <a:srgbClr val="1E2761"/>
+                </a:solidFill>
+              </a:rPr>
+              <a:t>that's</a:t>
+            </a:r>
+            <a:r>
+              <a:rPr lang="nb-NO" sz="1600" dirty="0">
+                <a:solidFill>
+                  <a:srgbClr val="1E2761"/>
+                </a:solidFill>
+              </a:rPr>
+              <a:t> </a:t>
+            </a:r>
+            <a:r>
+              <a:rPr lang="nb-NO" sz="1600" dirty="0" err="1">
+                <a:solidFill>
+                  <a:srgbClr val="1E2761"/>
+                </a:solidFill>
+              </a:rPr>
+              <a:t>unrelated</a:t>
+            </a:r>
+            <a:r>
+              <a:rPr lang="nb-NO" sz="1600" dirty="0">
+                <a:solidFill>
+                  <a:srgbClr val="1E2761"/>
+                </a:solidFill>
+              </a:rPr>
+              <a:t> </a:t>
+            </a:r>
+            <a:r>
+              <a:rPr lang="nb-NO" sz="1600" dirty="0" err="1">
+                <a:solidFill>
+                  <a:srgbClr val="1E2761"/>
+                </a:solidFill>
+              </a:rPr>
+              <a:t>work</a:t>
+            </a:r>
+            <a:r>
+              <a:rPr lang="nb-NO" sz="1600" dirty="0">
+                <a:solidFill>
+                  <a:srgbClr val="1E2761"/>
+                </a:solidFill>
+              </a:rPr>
+              <a:t>, so </a:t>
+            </a:r>
+            <a:r>
+              <a:rPr lang="nb-NO" sz="1600" dirty="0" err="1">
+                <a:solidFill>
+                  <a:srgbClr val="1E2761"/>
+                </a:solidFill>
+              </a:rPr>
+              <a:t>leave</a:t>
+            </a:r>
+            <a:r>
+              <a:rPr lang="nb-NO" sz="1600" dirty="0">
+                <a:solidFill>
+                  <a:srgbClr val="1E2761"/>
+                </a:solidFill>
+              </a:rPr>
+              <a:t> it </a:t>
+            </a:r>
+            <a:r>
+              <a:rPr lang="nb-NO" sz="1600" dirty="0" err="1">
+                <a:solidFill>
+                  <a:srgbClr val="1E2761"/>
+                </a:solidFill>
+              </a:rPr>
+              <a:t>unstaged</a:t>
+            </a:r>
+            <a:r>
+              <a:rPr lang="nb-NO" sz="1600" dirty="0">
+                <a:solidFill>
+                  <a:srgbClr val="1E2761"/>
+                </a:solidFill>
+              </a:rPr>
+              <a:t>. </a:t>
+            </a:r>
+            <a:r>
+              <a:rPr lang="nb-NO" sz="1600" dirty="0" err="1">
+                <a:solidFill>
+                  <a:srgbClr val="1E2761"/>
+                </a:solidFill>
+              </a:rPr>
+              <a:t>Only</a:t>
+            </a:r>
+            <a:r>
+              <a:rPr lang="nb-NO" sz="1600" dirty="0">
+                <a:solidFill>
+                  <a:srgbClr val="1E2761"/>
+                </a:solidFill>
+              </a:rPr>
+              <a:t> stage </a:t>
+            </a:r>
+            <a:r>
+              <a:rPr lang="nb-NO" sz="1600" dirty="0" err="1">
+                <a:solidFill>
+                  <a:srgbClr val="1E2761"/>
+                </a:solidFill>
+              </a:rPr>
+              <a:t>what</a:t>
+            </a:r>
+            <a:r>
+              <a:rPr lang="nb-NO" sz="1600" dirty="0">
+                <a:solidFill>
+                  <a:srgbClr val="1E2761"/>
+                </a:solidFill>
+              </a:rPr>
+              <a:t> </a:t>
+            </a:r>
+            <a:r>
+              <a:rPr lang="nb-NO" sz="1600" dirty="0" err="1">
+                <a:solidFill>
+                  <a:srgbClr val="1E2761"/>
+                </a:solidFill>
+              </a:rPr>
+              <a:t>belongs</a:t>
+            </a:r>
+            <a:r>
+              <a:rPr lang="nb-NO" sz="1600" dirty="0">
+                <a:solidFill>
+                  <a:srgbClr val="1E2761"/>
+                </a:solidFill>
+              </a:rPr>
+              <a:t> to </a:t>
+            </a:r>
+            <a:r>
+              <a:rPr lang="nb-NO" sz="1600" dirty="0" err="1">
+                <a:solidFill>
+                  <a:srgbClr val="1E2761"/>
+                </a:solidFill>
+              </a:rPr>
+              <a:t>this</a:t>
+            </a:r>
+            <a:r>
+              <a:rPr lang="nb-NO" sz="1600" dirty="0">
+                <a:solidFill>
+                  <a:srgbClr val="1E2761"/>
+                </a:solidFill>
+              </a:rPr>
+              <a:t> </a:t>
+            </a:r>
+            <a:r>
+              <a:rPr lang="nb-NO" sz="1600" dirty="0" err="1">
+                <a:solidFill>
+                  <a:srgbClr val="1E2761"/>
+                </a:solidFill>
+              </a:rPr>
+              <a:t>commit</a:t>
+            </a:r>
+            <a:r>
+              <a:rPr lang="nb-NO" sz="1600" dirty="0">
+                <a:solidFill>
+                  <a:srgbClr val="1E2761"/>
+                </a:solidFill>
+              </a:rPr>
+              <a:t>.</a:t>
+            </a:r>
+            <a:endParaRPr lang="en-US" sz="1600" dirty="0">
+              <a:solidFill>
+                <a:srgbClr val="1E2761"/>
+              </a:solidFill>
+            </a:endParaRPr>
+          </a:p>
+        </p:txBody>
+      </p:sp>
+      <p:sp>
+        <p:nvSpPr>
+          <p:cNvPr id="22" name="Shape 19"/>
+          <p:cNvSpPr/>
+          <p:nvPr/>
+        </p:nvSpPr>
+        <p:spPr>
+          <a:xfrm>
+            <a:off x="822960" y="4096512"/>
+            <a:ext cx="384048" cy="384048"/>
+          </a:xfrm>
+          <a:prstGeom prst="ellipse">
+            <a:avLst/>
+          </a:prstGeom>
+          <a:solidFill>
+            <a:srgbClr val="F96167"/>
+          </a:solidFill>
+          <a:ln/>
+        </p:spPr>
+        <p:txBody>
+          <a:bodyPr/>
+          <a:lstStyle/>
+          <a:p>
+            <a:endParaRPr lang="nb-NO"/>
+          </a:p>
+        </p:txBody>
+      </p:sp>
+      <p:sp>
+        <p:nvSpPr>
+          <p:cNvPr id="23" name="Text 20"/>
+          <p:cNvSpPr/>
+          <p:nvPr/>
+        </p:nvSpPr>
+        <p:spPr>
+          <a:xfrm>
+            <a:off x="822960" y="4096512"/>
+            <a:ext cx="384048" cy="384048"/>
+          </a:xfrm>
+          <a:prstGeom prst="rect">
+            <a:avLst/>
+          </a:prstGeom>
+          <a:noFill/>
+          <a:ln/>
+        </p:spPr>
+        <p:txBody>
+          <a:bodyPr wrap="square" lIns="0" tIns="0" rIns="0" bIns="0" rtlCol="0" anchor="ctr"/>
+          <a:lstStyle/>
+          <a:p>
+            <a:pPr marL="0" indent="0" algn="ctr">
+              <a:buNone/>
+            </a:pPr>
+            <a:r>
+              <a:rPr lang="en-US" sz="1400" b="1" dirty="0">
+                <a:solidFill>
+                  <a:srgbClr val="FFFFFF"/>
+                </a:solidFill>
+                <a:latin typeface="Calibri" pitchFamily="34" charset="0"/>
+                <a:ea typeface="Calibri" pitchFamily="34" charset="-122"/>
+                <a:cs typeface="Calibri" pitchFamily="34" charset="-120"/>
+              </a:rPr>
+              <a:t>5</a:t>
+            </a:r>
+            <a:endParaRPr lang="en-US" sz="1400" dirty="0"/>
+          </a:p>
+        </p:txBody>
+      </p:sp>
+      <p:sp>
+        <p:nvSpPr>
+          <p:cNvPr id="24" name="Text 21"/>
+          <p:cNvSpPr/>
+          <p:nvPr/>
+        </p:nvSpPr>
+        <p:spPr>
+          <a:xfrm>
+            <a:off x="1371600" y="4069080"/>
+            <a:ext cx="9966960" cy="566928"/>
+          </a:xfrm>
+          <a:prstGeom prst="rect">
+            <a:avLst/>
+          </a:prstGeom>
+          <a:noFill/>
+          <a:ln/>
+        </p:spPr>
+        <p:txBody>
+          <a:bodyPr wrap="square" lIns="0" tIns="0" rIns="0" bIns="0" rtlCol="0" anchor="ctr"/>
+          <a:lstStyle/>
+          <a:p>
+            <a:pPr marL="0" indent="0" algn="l">
+              <a:buNone/>
+            </a:pPr>
+            <a:r>
+              <a:rPr lang="en-US" sz="1600" dirty="0">
+                <a:solidFill>
+                  <a:srgbClr val="1E2761"/>
+                </a:solidFill>
+                <a:latin typeface="Calibri" pitchFamily="34" charset="0"/>
+                <a:ea typeface="Calibri" pitchFamily="34" charset="-122"/>
+                <a:cs typeface="Calibri" pitchFamily="34" charset="-120"/>
+              </a:rPr>
+              <a:t>Click the + next to ex1.py to stage it</a:t>
+            </a:r>
+            <a:endParaRPr lang="en-US" sz="1600" dirty="0"/>
+          </a:p>
+        </p:txBody>
+      </p:sp>
+      <p:sp>
+        <p:nvSpPr>
+          <p:cNvPr id="25" name="Shape 22"/>
+          <p:cNvSpPr/>
+          <p:nvPr/>
+        </p:nvSpPr>
+        <p:spPr>
+          <a:xfrm>
+            <a:off x="822960" y="4663440"/>
+            <a:ext cx="384048" cy="384048"/>
+          </a:xfrm>
+          <a:prstGeom prst="ellipse">
+            <a:avLst/>
+          </a:prstGeom>
+          <a:solidFill>
+            <a:srgbClr val="F96167"/>
+          </a:solidFill>
+          <a:ln/>
+        </p:spPr>
+        <p:txBody>
+          <a:bodyPr/>
+          <a:lstStyle/>
+          <a:p>
+            <a:endParaRPr lang="nb-NO"/>
+          </a:p>
+        </p:txBody>
+      </p:sp>
+      <p:sp>
+        <p:nvSpPr>
+          <p:cNvPr id="26" name="Text 23"/>
+          <p:cNvSpPr/>
+          <p:nvPr/>
+        </p:nvSpPr>
+        <p:spPr>
+          <a:xfrm>
+            <a:off x="822960" y="4663440"/>
+            <a:ext cx="384048" cy="384048"/>
+          </a:xfrm>
+          <a:prstGeom prst="rect">
+            <a:avLst/>
+          </a:prstGeom>
+          <a:noFill/>
+          <a:ln/>
+        </p:spPr>
+        <p:txBody>
+          <a:bodyPr wrap="square" lIns="0" tIns="0" rIns="0" bIns="0" rtlCol="0" anchor="ctr"/>
+          <a:lstStyle/>
+          <a:p>
+            <a:pPr marL="0" indent="0" algn="ctr">
+              <a:buNone/>
+            </a:pPr>
+            <a:r>
+              <a:rPr lang="en-US" sz="1400" b="1" dirty="0">
+                <a:solidFill>
+                  <a:srgbClr val="FFFFFF"/>
+                </a:solidFill>
+                <a:latin typeface="Calibri" pitchFamily="34" charset="0"/>
+                <a:ea typeface="Calibri" pitchFamily="34" charset="-122"/>
+                <a:cs typeface="Calibri" pitchFamily="34" charset="-120"/>
+              </a:rPr>
+              <a:t>6</a:t>
+            </a:r>
+            <a:endParaRPr lang="en-US" sz="1400" dirty="0"/>
+          </a:p>
+        </p:txBody>
+      </p:sp>
+      <p:sp>
+        <p:nvSpPr>
+          <p:cNvPr id="27" name="Text 24"/>
+          <p:cNvSpPr/>
+          <p:nvPr/>
+        </p:nvSpPr>
+        <p:spPr>
+          <a:xfrm>
+            <a:off x="1371600" y="4636008"/>
+            <a:ext cx="9966960" cy="566928"/>
+          </a:xfrm>
+          <a:prstGeom prst="rect">
+            <a:avLst/>
+          </a:prstGeom>
+          <a:noFill/>
+          <a:ln/>
+        </p:spPr>
+        <p:txBody>
+          <a:bodyPr wrap="square" lIns="0" tIns="0" rIns="0" bIns="0" rtlCol="0" anchor="ctr"/>
+          <a:lstStyle/>
+          <a:p>
+            <a:r>
+              <a:rPr lang="en-US" sz="1600" dirty="0">
+                <a:solidFill>
+                  <a:srgbClr val="1E2761"/>
+                </a:solidFill>
+                <a:latin typeface="Calibri" pitchFamily="34" charset="0"/>
+                <a:ea typeface="Calibri" pitchFamily="34" charset="-122"/>
+                <a:cs typeface="Calibri" pitchFamily="34" charset="-120"/>
+              </a:rPr>
+              <a:t>Type a commit message (e.g. </a:t>
+            </a:r>
+            <a:r>
+              <a:rPr lang="nb-NO" sz="1600" dirty="0">
+                <a:solidFill>
+                  <a:srgbClr val="1E2761"/>
+                </a:solidFill>
+              </a:rPr>
+              <a:t>"</a:t>
+            </a:r>
+            <a:r>
+              <a:rPr lang="en-US" sz="1600" dirty="0">
+                <a:solidFill>
+                  <a:srgbClr val="1E2761"/>
+                </a:solidFill>
+                <a:latin typeface="Calibri" pitchFamily="34" charset="0"/>
+                <a:ea typeface="Calibri" pitchFamily="34" charset="-122"/>
+                <a:cs typeface="Calibri" pitchFamily="34" charset="-120"/>
+              </a:rPr>
+              <a:t>Add ex1.py</a:t>
+            </a:r>
+            <a:r>
+              <a:rPr lang="nb-NO" sz="1600" dirty="0">
+                <a:solidFill>
+                  <a:srgbClr val="1E2761"/>
+                </a:solidFill>
+              </a:rPr>
+              <a:t>"</a:t>
+            </a:r>
+            <a:r>
+              <a:rPr lang="en-US" sz="1600" dirty="0">
+                <a:solidFill>
+                  <a:srgbClr val="1E2761"/>
+                </a:solidFill>
+                <a:latin typeface="Calibri" pitchFamily="34" charset="0"/>
+                <a:ea typeface="Calibri" pitchFamily="34" charset="-122"/>
+                <a:cs typeface="Calibri" pitchFamily="34" charset="-120"/>
+              </a:rPr>
+              <a:t>), then click ✓ Commit</a:t>
+            </a:r>
+            <a:endParaRPr lang="en-US" sz="1600" dirty="0"/>
+          </a:p>
+        </p:txBody>
+      </p:sp>
+      <p:sp>
+        <p:nvSpPr>
+          <p:cNvPr id="28" name="Shape 25"/>
+          <p:cNvSpPr/>
+          <p:nvPr/>
+        </p:nvSpPr>
+        <p:spPr>
+          <a:xfrm>
+            <a:off x="822960" y="5394960"/>
+            <a:ext cx="10543032" cy="640080"/>
+          </a:xfrm>
+          <a:prstGeom prst="roundRect">
+            <a:avLst>
+              <a:gd name="adj" fmla="val 11429"/>
+            </a:avLst>
+          </a:prstGeom>
+          <a:solidFill>
+            <a:srgbClr val="F1F4FB"/>
+          </a:solidFill>
+          <a:ln w="12700">
+            <a:solidFill>
+              <a:srgbClr val="F96167"/>
+            </a:solidFill>
+            <a:prstDash val="solid"/>
+          </a:ln>
+        </p:spPr>
+        <p:txBody>
+          <a:bodyPr/>
+          <a:lstStyle/>
+          <a:p>
+            <a:endParaRPr lang="nb-NO"/>
+          </a:p>
+        </p:txBody>
+      </p:sp>
+      <p:sp>
+        <p:nvSpPr>
+          <p:cNvPr id="29" name="Text 26"/>
+          <p:cNvSpPr/>
+          <p:nvPr/>
+        </p:nvSpPr>
+        <p:spPr>
+          <a:xfrm>
+            <a:off x="1051560" y="5394960"/>
+            <a:ext cx="10085832" cy="640080"/>
+          </a:xfrm>
+          <a:prstGeom prst="rect">
+            <a:avLst/>
+          </a:prstGeom>
+          <a:noFill/>
+          <a:ln/>
+        </p:spPr>
+        <p:txBody>
+          <a:bodyPr wrap="square" lIns="0" tIns="0" rIns="0" bIns="0" rtlCol="0" anchor="ctr"/>
+          <a:lstStyle/>
+          <a:p>
+            <a:r>
+              <a:rPr lang="en-US" sz="1600" b="1" i="1" dirty="0">
+                <a:solidFill>
+                  <a:srgbClr val="1E2761"/>
+                </a:solidFill>
+                <a:latin typeface="Calibri" pitchFamily="34" charset="0"/>
+                <a:ea typeface="Calibri" pitchFamily="34" charset="-122"/>
+                <a:cs typeface="Calibri" pitchFamily="34" charset="-120"/>
+              </a:rPr>
+              <a:t>Tip</a:t>
+            </a:r>
+            <a:r>
+              <a:rPr lang="en-US" sz="1600" i="1" dirty="0">
+                <a:solidFill>
+                  <a:srgbClr val="1E2761"/>
+                </a:solidFill>
+                <a:latin typeface="Calibri" pitchFamily="34" charset="0"/>
+                <a:ea typeface="Calibri" pitchFamily="34" charset="-122"/>
+                <a:cs typeface="Calibri" pitchFamily="34" charset="-120"/>
+              </a:rPr>
+              <a:t>: Before doing anything else in a project, glance at the Source Control panel — it always tells you exactly what's changed.</a:t>
+            </a:r>
+            <a:endParaRPr lang="en-US" sz="1600" dirty="0"/>
+          </a:p>
+        </p:txBody>
+      </p:sp>
+    </p:spTree>
+  </p:cSld>
+  <p:clrMapOvr>
+    <a:masterClrMapping/>
+  </p:clrMapOvr>
+</p:sld>
+</file>
+
+<file path=ppt/slides/slide11.xml><?xml version="1.0" encoding="utf-8"?>
+<p:sld xmlns:a="http://schemas.openxmlformats.org/drawingml/2006/main" xmlns:r="http://schemas.openxmlformats.org/officeDocument/2006/relationships" xmlns:p="http://schemas.openxmlformats.org/presentationml/2006/main">
   <p:cSld name="Slide 10">
     <p:bg>
       <p:bgPr>
@@ -3638,7 +4839,7 @@
               <a:buNone/>
             </a:pPr>
             <a:r>
-              <a:rPr lang="en-US" sz="1550" dirty="0">
+              <a:rPr lang="en-US" sz="1600" dirty="0">
                 <a:solidFill>
                   <a:srgbClr val="1E2761"/>
                 </a:solidFill>
@@ -3648,7 +4849,7 @@
               </a:rPr>
               <a:t>Create ex2.py</a:t>
             </a:r>
-            <a:endParaRPr lang="en-US" sz="1550" dirty="0"/>
+            <a:endParaRPr lang="en-US" sz="1600" dirty="0"/>
           </a:p>
         </p:txBody>
       </p:sp>
@@ -3743,7 +4944,7 @@
               <a:buNone/>
             </a:pPr>
             <a:r>
-              <a:rPr lang="en-US" sz="1550" dirty="0">
+              <a:rPr lang="en-US" sz="1600" dirty="0">
                 <a:solidFill>
                   <a:srgbClr val="1E2761"/>
                 </a:solidFill>
@@ -3753,7 +4954,7 @@
               </a:rPr>
               <a:t>Same task as Exercise 1, but with float values, displayed with two decimals</a:t>
             </a:r>
-            <a:endParaRPr lang="en-US" sz="1550" dirty="0"/>
+            <a:endParaRPr lang="en-US" sz="1600" dirty="0"/>
           </a:p>
         </p:txBody>
       </p:sp>
@@ -3848,7 +5049,7 @@
               <a:buNone/>
             </a:pPr>
             <a:r>
-              <a:rPr lang="en-US" sz="1550" dirty="0">
+              <a:rPr lang="en-US" sz="1600" dirty="0">
                 <a:solidFill>
                   <a:srgbClr val="1E2761"/>
                 </a:solidFill>
@@ -3858,7 +5059,7 @@
               </a:rPr>
               <a:t>Run it, confirm the output</a:t>
             </a:r>
-            <a:endParaRPr lang="en-US" sz="1550" dirty="0"/>
+            <a:endParaRPr lang="en-US" sz="1600" dirty="0"/>
           </a:p>
         </p:txBody>
       </p:sp>
@@ -3953,7 +5154,7 @@
               <a:buNone/>
             </a:pPr>
             <a:r>
-              <a:rPr lang="en-US" sz="1550" dirty="0">
+              <a:rPr lang="en-US" sz="1600" dirty="0">
                 <a:solidFill>
                   <a:srgbClr val="1E2761"/>
                 </a:solidFill>
@@ -3963,7 +5164,7 @@
               </a:rPr>
               <a:t>Stage it and commit it — same steps as before</a:t>
             </a:r>
-            <a:endParaRPr lang="en-US" sz="1550" dirty="0"/>
+            <a:endParaRPr lang="en-US" sz="1600" dirty="0"/>
           </a:p>
         </p:txBody>
       </p:sp>
@@ -3975,7 +5176,7 @@
 </p:sld>
 </file>
 
-<file path=ppt/slides/slide11.xml><?xml version="1.0" encoding="utf-8"?>
+<file path=ppt/slides/slide12.xml><?xml version="1.0" encoding="utf-8"?>
 <p:sld xmlns:a="http://schemas.openxmlformats.org/drawingml/2006/main" xmlns:r="http://schemas.openxmlformats.org/officeDocument/2006/relationships" xmlns:p="http://schemas.openxmlformats.org/presentationml/2006/main">
   <p:cSld name="Slide 11">
     <p:bg>
@@ -4331,7 +5532,7 @@
 </p:sld>
 </file>
 
-<file path=ppt/slides/slide12.xml><?xml version="1.0" encoding="utf-8"?>
+<file path=ppt/slides/slide13.xml><?xml version="1.0" encoding="utf-8"?>
 <p:sld xmlns:a="http://schemas.openxmlformats.org/drawingml/2006/main" xmlns:r="http://schemas.openxmlformats.org/officeDocument/2006/relationships" xmlns:p="http://schemas.openxmlformats.org/presentationml/2006/main">
   <p:cSld name="Slide 12">
     <p:bg>
@@ -4644,7 +5845,7 @@
               <a:buNone/>
             </a:pPr>
             <a:r>
-              <a:rPr lang="en-US" sz="1550" dirty="0">
+              <a:rPr lang="en-US" sz="1600" dirty="0">
                 <a:solidFill>
                   <a:srgbClr val="1E2761"/>
                 </a:solidFill>
@@ -4654,7 +5855,7 @@
               </a:rPr>
               <a:t>Create ex3.py</a:t>
             </a:r>
-            <a:endParaRPr lang="en-US" sz="1550" dirty="0"/>
+            <a:endParaRPr lang="en-US" sz="1600" dirty="0"/>
           </a:p>
         </p:txBody>
       </p:sp>
@@ -4749,7 +5950,7 @@
               <a:buNone/>
             </a:pPr>
             <a:r>
-              <a:rPr lang="en-US" sz="1550" dirty="0">
+              <a:rPr lang="en-US" sz="1600" dirty="0">
                 <a:solidFill>
                   <a:srgbClr val="1E2761"/>
                 </a:solidFill>
@@ -4759,7 +5960,7 @@
               </a:rPr>
               <a:t>Write a program that prompts for a lower and upper bound, uses randint from the random module to draw a random integer between them, and displays it</a:t>
             </a:r>
-            <a:endParaRPr lang="en-US" sz="1550" dirty="0"/>
+            <a:endParaRPr lang="en-US" sz="1600" dirty="0"/>
           </a:p>
         </p:txBody>
       </p:sp>
@@ -4854,7 +6055,7 @@
               <a:buNone/>
             </a:pPr>
             <a:r>
-              <a:rPr lang="en-US" sz="1550" dirty="0">
+              <a:rPr lang="en-US" sz="1600" dirty="0">
                 <a:solidFill>
                   <a:srgbClr val="1E2761"/>
                 </a:solidFill>
@@ -4864,7 +6065,7 @@
               </a:rPr>
               <a:t>Run it, confirm it works</a:t>
             </a:r>
-            <a:endParaRPr lang="en-US" sz="1550" dirty="0"/>
+            <a:endParaRPr lang="en-US" sz="1600" dirty="0"/>
           </a:p>
         </p:txBody>
       </p:sp>
@@ -4955,21 +6156,45 @@
           <a:bodyPr wrap="square" lIns="0" tIns="0" rIns="0" bIns="0" rtlCol="0" anchor="ctr"/>
           <a:lstStyle/>
           <a:p>
-            <a:pPr marL="0" indent="0" algn="l">
-              <a:buNone/>
-            </a:pPr>
-            <a:r>
-              <a:rPr lang="en-US" sz="1550" dirty="0">
-                <a:solidFill>
-                  <a:srgbClr val="1E2761"/>
-                </a:solidFill>
-                <a:latin typeface="Calibri" pitchFamily="34" charset="0"/>
-                <a:ea typeface="Calibri" pitchFamily="34" charset="-122"/>
-                <a:cs typeface="Calibri" pitchFamily="34" charset="-120"/>
-              </a:rPr>
-              <a:t>Stage and commit it — message: “ex3: working version”</a:t>
-            </a:r>
-            <a:endParaRPr lang="en-US" sz="1550" dirty="0"/>
+            <a:r>
+              <a:rPr lang="en-US" sz="1600" dirty="0">
+                <a:solidFill>
+                  <a:srgbClr val="1E2761"/>
+                </a:solidFill>
+                <a:latin typeface="Calibri" pitchFamily="34" charset="0"/>
+                <a:ea typeface="Calibri" pitchFamily="34" charset="-122"/>
+                <a:cs typeface="Calibri" pitchFamily="34" charset="-120"/>
+              </a:rPr>
+              <a:t>Stage and commit it — message: </a:t>
+            </a:r>
+            <a:r>
+              <a:rPr lang="nb-NO" sz="1600" dirty="0">
+                <a:solidFill>
+                  <a:srgbClr val="1E2761"/>
+                </a:solidFill>
+              </a:rPr>
+              <a:t>"</a:t>
+            </a:r>
+            <a:r>
+              <a:rPr lang="en-US" sz="1600" dirty="0">
+                <a:solidFill>
+                  <a:srgbClr val="1E2761"/>
+                </a:solidFill>
+                <a:latin typeface="Calibri" pitchFamily="34" charset="0"/>
+                <a:ea typeface="Calibri" pitchFamily="34" charset="-122"/>
+                <a:cs typeface="Calibri" pitchFamily="34" charset="-120"/>
+              </a:rPr>
+              <a:t>Working version</a:t>
+            </a:r>
+            <a:r>
+              <a:rPr lang="nb-NO" sz="1600" dirty="0">
+                <a:solidFill>
+                  <a:srgbClr val="1E2761"/>
+                </a:solidFill>
+              </a:rPr>
+              <a:t>"</a:t>
+            </a:r>
+            <a:endParaRPr lang="en-US" sz="1600" dirty="0"/>
           </a:p>
         </p:txBody>
       </p:sp>
@@ -5032,7 +6257,7 @@
               <a:buNone/>
             </a:pPr>
             <a:r>
-              <a:rPr lang="en-US" sz="1350" b="1" i="1" dirty="0">
+              <a:rPr lang="en-US" sz="1600" b="1" i="1" dirty="0">
                 <a:solidFill>
                   <a:srgbClr val="1E2761"/>
                 </a:solidFill>
@@ -5043,7 +6268,7 @@
               <a:t>Note</a:t>
             </a:r>
             <a:r>
-              <a:rPr lang="en-US" sz="1350" i="1" dirty="0">
+              <a:rPr lang="en-US" sz="1600" i="1" dirty="0">
                 <a:solidFill>
                   <a:srgbClr val="1E2761"/>
                 </a:solidFill>
@@ -5053,7 +6278,7 @@
               </a:rPr>
               <a:t>: Get this version safely committed — we're about to do something risky.</a:t>
             </a:r>
-            <a:endParaRPr lang="en-US" sz="1350" dirty="0"/>
+            <a:endParaRPr lang="en-US" sz="1600" dirty="0"/>
           </a:p>
         </p:txBody>
       </p:sp>
@@ -5065,7 +6290,7 @@
 </p:sld>
 </file>
 
-<file path=ppt/slides/slide13.xml><?xml version="1.0" encoding="utf-8"?>
+<file path=ppt/slides/slide14.xml><?xml version="1.0" encoding="utf-8"?>
 <p:sld xmlns:a="http://schemas.openxmlformats.org/drawingml/2006/main" xmlns:r="http://schemas.openxmlformats.org/officeDocument/2006/relationships" xmlns:p="http://schemas.openxmlformats.org/presentationml/2006/main">
   <p:cSld name="Slide 13">
     <p:bg>
@@ -5378,7 +6603,7 @@
               <a:buNone/>
             </a:pPr>
             <a:r>
-              <a:rPr lang="en-US" sz="1550" dirty="0">
+              <a:rPr lang="en-US" sz="1600" dirty="0">
                 <a:solidFill>
                   <a:srgbClr val="1E2761"/>
                 </a:solidFill>
@@ -5388,7 +6613,7 @@
               </a:rPr>
               <a:t>In ex3.py, delete the code that converts upper to an integer (the int(...) around the input)</a:t>
             </a:r>
-            <a:endParaRPr lang="en-US" sz="1550" dirty="0"/>
+            <a:endParaRPr lang="en-US" sz="1600" dirty="0"/>
           </a:p>
         </p:txBody>
       </p:sp>
@@ -5483,7 +6708,7 @@
               <a:buNone/>
             </a:pPr>
             <a:r>
-              <a:rPr lang="en-US" sz="1550" dirty="0">
+              <a:rPr lang="en-US" sz="1600" dirty="0">
                 <a:solidFill>
                   <a:srgbClr val="1E2761"/>
                 </a:solidFill>
@@ -5493,7 +6718,7 @@
               </a:rPr>
               <a:t>Run the program again — it crashes: randint received text, not a number</a:t>
             </a:r>
-            <a:endParaRPr lang="en-US" sz="1550" dirty="0"/>
+            <a:endParaRPr lang="en-US" sz="1600" dirty="0"/>
           </a:p>
         </p:txBody>
       </p:sp>
@@ -5584,11 +6809,113 @@
           <a:bodyPr wrap="square" lIns="0" tIns="0" rIns="0" bIns="0" rtlCol="0" anchor="ctr"/>
           <a:lstStyle/>
           <a:p>
+            <a:r>
+              <a:rPr lang="en-US" sz="1600" dirty="0">
+                <a:solidFill>
+                  <a:srgbClr val="1E2761"/>
+                </a:solidFill>
+                <a:latin typeface="Calibri" pitchFamily="34" charset="0"/>
+                <a:ea typeface="Calibri" pitchFamily="34" charset="-122"/>
+                <a:cs typeface="Calibri" pitchFamily="34" charset="-120"/>
+              </a:rPr>
+              <a:t>Stage and commit it anyways — message: </a:t>
+            </a:r>
+            <a:r>
+              <a:rPr lang="nb-NO" sz="1600" dirty="0">
+                <a:solidFill>
+                  <a:srgbClr val="1E2761"/>
+                </a:solidFill>
+              </a:rPr>
+              <a:t>"</a:t>
+            </a:r>
+            <a:r>
+              <a:rPr lang="en-US" sz="1600" dirty="0">
+                <a:solidFill>
+                  <a:srgbClr val="1E2761"/>
+                </a:solidFill>
+                <a:latin typeface="Calibri" pitchFamily="34" charset="0"/>
+                <a:ea typeface="Calibri" pitchFamily="34" charset="-122"/>
+                <a:cs typeface="Calibri" pitchFamily="34" charset="-120"/>
+              </a:rPr>
+              <a:t>Crashes – investigating</a:t>
+            </a:r>
+            <a:r>
+              <a:rPr lang="nb-NO" sz="1600" dirty="0">
+                <a:solidFill>
+                  <a:srgbClr val="1E2761"/>
+                </a:solidFill>
+              </a:rPr>
+              <a:t>"</a:t>
+            </a:r>
+            <a:endParaRPr lang="en-US" sz="1600" dirty="0"/>
+          </a:p>
+        </p:txBody>
+      </p:sp>
+      <p:sp>
+        <p:nvSpPr>
+          <p:cNvPr id="5" name="Shape 13">
+            <a:extLst>
+              <a:ext uri="{FF2B5EF4-FFF2-40B4-BE49-F238E27FC236}">
+                <a16:creationId xmlns:a16="http://schemas.microsoft.com/office/drawing/2014/main" id="{9B01CEF2-068A-325B-54BB-0313D94694CF}"/>
+              </a:ext>
+            </a:extLst>
+          </p:cNvPr>
+          <p:cNvSpPr/>
+          <p:nvPr/>
+        </p:nvSpPr>
+        <p:spPr>
+          <a:xfrm>
+            <a:off x="822960" y="4466926"/>
+            <a:ext cx="384048" cy="384048"/>
+          </a:xfrm>
+          <a:prstGeom prst="ellipse">
+            <a:avLst/>
+          </a:prstGeom>
+          <a:solidFill>
+            <a:srgbClr val="F96167"/>
+          </a:solidFill>
+          <a:ln/>
+        </p:spPr>
+        <p:txBody>
+          <a:bodyPr/>
+          <a:lstStyle/>
+          <a:p>
+            <a:endParaRPr lang="nb-NO"/>
+          </a:p>
+        </p:txBody>
+      </p:sp>
+      <p:sp>
+        <p:nvSpPr>
+          <p:cNvPr id="6" name="Text 15">
+            <a:extLst>
+              <a:ext uri="{FF2B5EF4-FFF2-40B4-BE49-F238E27FC236}">
+                <a16:creationId xmlns:a16="http://schemas.microsoft.com/office/drawing/2014/main" id="{D45B65B4-0699-7DA3-999A-CF1640F95FAF}"/>
+              </a:ext>
+            </a:extLst>
+          </p:cNvPr>
+          <p:cNvSpPr/>
+          <p:nvPr/>
+        </p:nvSpPr>
+        <p:spPr>
+          <a:xfrm>
+            <a:off x="1371600" y="4312169"/>
+            <a:ext cx="9966960" cy="731520"/>
+          </a:xfrm>
+          <a:prstGeom prst="rect">
+            <a:avLst/>
+          </a:prstGeom>
+          <a:noFill/>
+          <a:ln/>
+        </p:spPr>
+        <p:txBody>
+          <a:bodyPr wrap="square" lIns="0" tIns="0" rIns="0" bIns="0" rtlCol="0" anchor="ctr"/>
+          <a:lstStyle/>
+          <a:p>
             <a:pPr marL="0" indent="0" algn="l">
               <a:buNone/>
             </a:pPr>
             <a:r>
-              <a:rPr lang="en-US" sz="1550" dirty="0">
+              <a:rPr lang="en-US" sz="1600" dirty="0">
                 <a:solidFill>
                   <a:srgbClr val="1E2761"/>
                 </a:solidFill>
@@ -5598,7 +6925,52 @@
               </a:rPr>
               <a:t>Don't fix it from memory. Don't guess. Don't undo blindly. This is exactly the situation git was built for!</a:t>
             </a:r>
-            <a:endParaRPr lang="en-US" sz="1550" dirty="0"/>
+            <a:endParaRPr lang="en-US" sz="1600" dirty="0"/>
+          </a:p>
+        </p:txBody>
+      </p:sp>
+      <p:sp>
+        <p:nvSpPr>
+          <p:cNvPr id="19" name="Text 8">
+            <a:extLst>
+              <a:ext uri="{FF2B5EF4-FFF2-40B4-BE49-F238E27FC236}">
+                <a16:creationId xmlns:a16="http://schemas.microsoft.com/office/drawing/2014/main" id="{374FB27A-42F9-60A4-F566-27C69727EFF3}"/>
+              </a:ext>
+            </a:extLst>
+          </p:cNvPr>
+          <p:cNvSpPr/>
+          <p:nvPr/>
+        </p:nvSpPr>
+        <p:spPr>
+          <a:xfrm>
+            <a:off x="822960" y="4450884"/>
+            <a:ext cx="384048" cy="384048"/>
+          </a:xfrm>
+          <a:prstGeom prst="rect">
+            <a:avLst/>
+          </a:prstGeom>
+          <a:noFill/>
+          <a:ln/>
+        </p:spPr>
+        <p:txBody>
+          <a:bodyPr wrap="square" lIns="0" tIns="0" rIns="0" bIns="0" rtlCol="0" anchor="ctr"/>
+          <a:lstStyle/>
+          <a:p>
+            <a:pPr marL="0" indent="0" algn="ctr">
+              <a:buNone/>
+            </a:pPr>
+            <a:r>
+              <a:rPr lang="en-US" sz="1400" b="1" dirty="0">
+                <a:solidFill>
+                  <a:srgbClr val="FFFFFF"/>
+                </a:solidFill>
+                <a:latin typeface="Calibri" pitchFamily="34" charset="0"/>
+                <a:ea typeface="Calibri" pitchFamily="34" charset="-122"/>
+                <a:cs typeface="Calibri" pitchFamily="34" charset="-120"/>
+              </a:rPr>
+              <a:t>4</a:t>
+            </a:r>
+            <a:endParaRPr lang="en-US" sz="1400" dirty="0"/>
           </a:p>
         </p:txBody>
       </p:sp>
@@ -5610,7 +6982,7 @@
 </p:sld>
 </file>
 
-<file path=ppt/slides/slide14.xml><?xml version="1.0" encoding="utf-8"?>
+<file path=ppt/slides/slide15.xml><?xml version="1.0" encoding="utf-8"?>
 <p:sld xmlns:a="http://schemas.openxmlformats.org/drawingml/2006/main" xmlns:r="http://schemas.openxmlformats.org/officeDocument/2006/relationships" xmlns:p="http://schemas.openxmlformats.org/presentationml/2006/main">
   <p:cSld name="Slide 14">
     <p:bg>
@@ -5923,7 +7295,7 @@
               <a:buNone/>
             </a:pPr>
             <a:r>
-              <a:rPr lang="en-US" sz="1550" dirty="0">
+              <a:rPr lang="en-US" sz="1600" dirty="0">
                 <a:solidFill>
                   <a:srgbClr val="1E2761"/>
                 </a:solidFill>
@@ -5933,7 +7305,7 @@
               </a:rPr>
               <a:t>Open ex3.py's Timeline (right-click on file in Explorer -&gt; Open timeline)</a:t>
             </a:r>
-            <a:endParaRPr lang="en-US" sz="1550" dirty="0"/>
+            <a:endParaRPr lang="en-US" sz="1600" dirty="0"/>
           </a:p>
         </p:txBody>
       </p:sp>
@@ -6024,21 +7396,56 @@
           <a:bodyPr wrap="square" lIns="0" tIns="0" rIns="0" bIns="0" rtlCol="0" anchor="ctr"/>
           <a:lstStyle/>
           <a:p>
-            <a:pPr marL="0" indent="0" algn="l">
-              <a:buNone/>
-            </a:pPr>
-            <a:r>
-              <a:rPr lang="en-US" sz="1550" dirty="0">
-                <a:solidFill>
-                  <a:srgbClr val="1E2761"/>
-                </a:solidFill>
-                <a:latin typeface="Calibri" pitchFamily="34" charset="0"/>
-                <a:ea typeface="Calibri" pitchFamily="34" charset="-122"/>
-                <a:cs typeface="Calibri" pitchFamily="34" charset="-120"/>
-              </a:rPr>
-              <a:t>Find the commit “ex3: working version” — click it</a:t>
-            </a:r>
-            <a:endParaRPr lang="en-US" sz="1550" dirty="0"/>
+            <a:r>
+              <a:rPr lang="en-US" sz="1600" dirty="0">
+                <a:solidFill>
+                  <a:srgbClr val="1E2761"/>
+                </a:solidFill>
+                <a:latin typeface="Calibri" pitchFamily="34" charset="0"/>
+                <a:ea typeface="Calibri" pitchFamily="34" charset="-122"/>
+                <a:cs typeface="Calibri" pitchFamily="34" charset="-120"/>
+              </a:rPr>
+              <a:t>Click the most recent commit (</a:t>
+            </a:r>
+            <a:r>
+              <a:rPr lang="nb-NO" sz="1600" dirty="0">
+                <a:solidFill>
+                  <a:srgbClr val="1E2761"/>
+                </a:solidFill>
+              </a:rPr>
+              <a:t>"</a:t>
+            </a:r>
+            <a:r>
+              <a:rPr lang="en-US" sz="1600" dirty="0">
+                <a:solidFill>
+                  <a:srgbClr val="1E2761"/>
+                </a:solidFill>
+                <a:latin typeface="Calibri" pitchFamily="34" charset="0"/>
+                <a:ea typeface="Calibri" pitchFamily="34" charset="-122"/>
+                <a:cs typeface="Calibri" pitchFamily="34" charset="-120"/>
+              </a:rPr>
+              <a:t>Crashes – investigating</a:t>
+            </a:r>
+            <a:r>
+              <a:rPr lang="nb-NO" sz="1600" dirty="0">
+                <a:solidFill>
+                  <a:srgbClr val="1E2761"/>
+                </a:solidFill>
+              </a:rPr>
+              <a:t>"</a:t>
+            </a:r>
+            <a:r>
+              <a:rPr lang="en-US" sz="1600" dirty="0">
+                <a:solidFill>
+                  <a:srgbClr val="1E2761"/>
+                </a:solidFill>
+                <a:latin typeface="Calibri" pitchFamily="34" charset="0"/>
+                <a:ea typeface="Calibri" pitchFamily="34" charset="-122"/>
+                <a:cs typeface="Calibri" pitchFamily="34" charset="-120"/>
+              </a:rPr>
+              <a:t>) — review the diff: the red line shows exactly what changed</a:t>
+            </a:r>
+            <a:endParaRPr lang="en-US" sz="1600" dirty="0"/>
           </a:p>
         </p:txBody>
       </p:sp>
@@ -6129,21 +7536,18 @@
           <a:bodyPr wrap="square" lIns="0" tIns="0" rIns="0" bIns="0" rtlCol="0" anchor="ctr"/>
           <a:lstStyle/>
           <a:p>
-            <a:pPr marL="0" indent="0" algn="l">
-              <a:buNone/>
-            </a:pPr>
-            <a:r>
-              <a:rPr lang="en-US" sz="1550" dirty="0">
-                <a:solidFill>
-                  <a:srgbClr val="1E2761"/>
-                </a:solidFill>
-                <a:latin typeface="Calibri" pitchFamily="34" charset="0"/>
-                <a:ea typeface="Calibri" pitchFamily="34" charset="-122"/>
-                <a:cs typeface="Calibri" pitchFamily="34" charset="-120"/>
-              </a:rPr>
-              <a:t>Review the diff — confirm this is the version before the bug</a:t>
-            </a:r>
-            <a:endParaRPr lang="en-US" sz="1550" dirty="0"/>
+            <a:r>
+              <a:rPr lang="en-US" sz="1600" dirty="0">
+                <a:solidFill>
+                  <a:srgbClr val="1E2761"/>
+                </a:solidFill>
+                <a:latin typeface="Calibri" pitchFamily="34" charset="0"/>
+                <a:ea typeface="Calibri" pitchFamily="34" charset="-122"/>
+                <a:cs typeface="Calibri" pitchFamily="34" charset="-120"/>
+              </a:rPr>
+              <a:t>Fix the file, using what you just saw in the diff </a:t>
+            </a:r>
+            <a:endParaRPr lang="en-US" sz="1600" dirty="0"/>
           </a:p>
         </p:txBody>
       </p:sp>
@@ -6234,27 +7638,24 @@
           <a:bodyPr wrap="square" lIns="0" tIns="0" rIns="0" bIns="0" rtlCol="0" anchor="ctr"/>
           <a:lstStyle/>
           <a:p>
-            <a:pPr marL="0" indent="0" algn="l">
-              <a:buNone/>
-            </a:pPr>
-            <a:r>
-              <a:rPr lang="en-US" sz="1550" dirty="0">
-                <a:solidFill>
-                  <a:srgbClr val="1E2761"/>
-                </a:solidFill>
-                <a:latin typeface="Calibri" pitchFamily="34" charset="0"/>
-                <a:ea typeface="Calibri" pitchFamily="34" charset="-122"/>
-                <a:cs typeface="Calibri" pitchFamily="34" charset="-120"/>
-              </a:rPr>
-              <a:t>Fix the file </a:t>
-            </a:r>
-            <a:endParaRPr lang="en-US" sz="1550" dirty="0"/>
-          </a:p>
-        </p:txBody>
-      </p:sp>
-      <p:sp>
-        <p:nvSpPr>
-          <p:cNvPr id="22" name="Shape 19"/>
+            <a:r>
+              <a:rPr lang="en-US" sz="1600" dirty="0">
+                <a:solidFill>
+                  <a:srgbClr val="1E2761"/>
+                </a:solidFill>
+                <a:latin typeface="Calibri" pitchFamily="34" charset="0"/>
+                <a:ea typeface="Calibri" pitchFamily="34" charset="-122"/>
+                <a:cs typeface="Calibri" pitchFamily="34" charset="-120"/>
+              </a:rPr>
+              <a:t>Run ex3.py again — it works</a:t>
+            </a:r>
+            <a:endParaRPr lang="en-US" sz="1600" dirty="0"/>
+          </a:p>
+        </p:txBody>
+      </p:sp>
+      <p:sp>
+        <p:nvSpPr>
+          <p:cNvPr id="23" name="Text 20"/>
           <p:cNvSpPr/>
           <p:nvPr/>
         </p:nvSpPr>
@@ -6263,33 +7664,6 @@
             <a:off x="822960" y="4334256"/>
             <a:ext cx="384048" cy="384048"/>
           </a:xfrm>
-          <a:prstGeom prst="ellipse">
-            <a:avLst/>
-          </a:prstGeom>
-          <a:solidFill>
-            <a:srgbClr val="F96167"/>
-          </a:solidFill>
-          <a:ln/>
-        </p:spPr>
-        <p:txBody>
-          <a:bodyPr/>
-          <a:lstStyle/>
-          <a:p>
-            <a:endParaRPr lang="nb-NO"/>
-          </a:p>
-        </p:txBody>
-      </p:sp>
-      <p:sp>
-        <p:nvSpPr>
-          <p:cNvPr id="23" name="Text 20"/>
-          <p:cNvSpPr/>
-          <p:nvPr/>
-        </p:nvSpPr>
-        <p:spPr>
-          <a:xfrm>
-            <a:off x="822960" y="4334256"/>
-            <a:ext cx="384048" cy="384048"/>
-          </a:xfrm>
           <a:prstGeom prst="rect">
             <a:avLst/>
           </a:prstGeom>
@@ -6315,45 +7689,6 @@
               <a:t>5</a:t>
             </a:r>
             <a:endParaRPr lang="en-US" sz="1400" dirty="0"/>
-          </a:p>
-        </p:txBody>
-      </p:sp>
-      <p:sp>
-        <p:nvSpPr>
-          <p:cNvPr id="24" name="Text 21"/>
-          <p:cNvSpPr/>
-          <p:nvPr/>
-        </p:nvSpPr>
-        <p:spPr>
-          <a:xfrm>
-            <a:off x="1371600" y="4306824"/>
-            <a:ext cx="9966960" cy="603504"/>
-          </a:xfrm>
-          <a:prstGeom prst="rect">
-            <a:avLst/>
-          </a:prstGeom>
-          <a:noFill/>
-          <a:ln/>
-        </p:spPr>
-        <p:txBody>
-          <a:bodyPr wrap="square" lIns="0" tIns="0" rIns="0" bIns="0" rtlCol="0" anchor="ctr"/>
-          <a:lstStyle/>
-          <a:p>
-            <a:pPr marL="0" indent="0" algn="l">
-              <a:buNone/>
-            </a:pPr>
-            <a:r>
-              <a:rPr lang="en-US" sz="1550" dirty="0">
-                <a:solidFill>
-                  <a:srgbClr val="1E2761"/>
-                </a:solidFill>
-                <a:latin typeface="Calibri" pitchFamily="34" charset="0"/>
-                <a:ea typeface="Calibri" pitchFamily="34" charset="-122"/>
-                <a:cs typeface="Calibri" pitchFamily="34" charset="-120"/>
-              </a:rPr>
-              <a:t>Run ex3.py again — it works</a:t>
-            </a:r>
-            <a:endParaRPr lang="en-US" sz="1550" dirty="0"/>
           </a:p>
         </p:txBody>
       </p:sp>
@@ -6371,8 +7706,8 @@
         </p:nvSpPr>
         <p:spPr>
           <a:xfrm>
-            <a:off x="822960" y="4937760"/>
-            <a:ext cx="10543032" cy="1024128"/>
+            <a:off x="822960" y="5093208"/>
+            <a:ext cx="10543032" cy="676656"/>
           </a:xfrm>
           <a:prstGeom prst="roundRect">
             <a:avLst>
@@ -6425,7 +7760,7 @@
           <a:lstStyle/>
           <a:p>
             <a:r>
-              <a:rPr lang="en-US" sz="1350" b="1" i="1" dirty="0">
+              <a:rPr lang="en-US" sz="1600" b="1" i="1" dirty="0">
                 <a:solidFill>
                   <a:srgbClr val="1E2761"/>
                 </a:solidFill>
@@ -6435,38 +7770,15 @@
               <a:t>Tip</a:t>
             </a:r>
             <a:r>
-              <a:rPr lang="en-US" sz="1350" i="1" dirty="0">
-                <a:solidFill>
-                  <a:srgbClr val="1E2761"/>
-                </a:solidFill>
-                <a:ea typeface="Calibri" pitchFamily="34" charset="-122"/>
-                <a:cs typeface="Calibri" pitchFamily="34" charset="-120"/>
-              </a:rPr>
-              <a:t>: To avoid manually fixing files, you can use git in the terminal. Copy the commit hash (right-click the commit </a:t>
-            </a:r>
-            <a:r>
-              <a:rPr lang="en-US" sz="1400" i="1" dirty="0">
-                <a:solidFill>
-                  <a:srgbClr val="1E2761"/>
-                </a:solidFill>
-                <a:ea typeface="Calibri" pitchFamily="34" charset="-122"/>
-                <a:cs typeface="Calibri" pitchFamily="34" charset="-120"/>
-              </a:rPr>
-              <a:t>→</a:t>
-            </a:r>
-            <a:r>
-              <a:rPr lang="en-US" sz="1350" i="1" dirty="0">
-                <a:solidFill>
-                  <a:srgbClr val="1E2761"/>
-                </a:solidFill>
-                <a:ea typeface="Calibri" pitchFamily="34" charset="-122"/>
-                <a:cs typeface="Calibri" pitchFamily="34" charset="-120"/>
-              </a:rPr>
-              <a:t> Copy commit hash) and run the following command in the terminal:</a:t>
-            </a:r>
-          </a:p>
-          <a:p>
-            <a:pPr algn="ctr"/>
+              <a:rPr lang="en-US" sz="1600" i="1" dirty="0">
+                <a:solidFill>
+                  <a:srgbClr val="1E2761"/>
+                </a:solidFill>
+                <a:ea typeface="Calibri" pitchFamily="34" charset="-122"/>
+                <a:cs typeface="Calibri" pitchFamily="34" charset="-120"/>
+              </a:rPr>
+              <a:t>: To avoid manually fixing files, you can use git in the terminal. Copy the commit hash (right-click the commit → Copy commit hash) and run the following command in the terminal: </a:t>
+            </a:r>
             <a:r>
               <a:rPr lang="en-US" sz="1350" dirty="0">
                 <a:solidFill>
@@ -6478,43 +7790,83 @@
               <a:t> </a:t>
             </a:r>
             <a:r>
-              <a:rPr lang="nb-NO" sz="1400" dirty="0" err="1"/>
+              <a:rPr lang="nb-NO" sz="1600" dirty="0" err="1">
+                <a:solidFill>
+                  <a:srgbClr val="C00000"/>
+                </a:solidFill>
+              </a:rPr>
               <a:t>git</a:t>
             </a:r>
             <a:r>
-              <a:rPr lang="nb-NO" sz="1400" dirty="0"/>
+              <a:rPr lang="nb-NO" sz="1600" dirty="0">
+                <a:solidFill>
+                  <a:srgbClr val="C00000"/>
+                </a:solidFill>
+              </a:rPr>
               <a:t> </a:t>
             </a:r>
             <a:r>
-              <a:rPr lang="nb-NO" sz="1400" dirty="0" err="1"/>
+              <a:rPr lang="nb-NO" sz="1600" dirty="0" err="1">
+                <a:solidFill>
+                  <a:srgbClr val="C00000"/>
+                </a:solidFill>
+              </a:rPr>
               <a:t>restore</a:t>
             </a:r>
             <a:r>
-              <a:rPr lang="nb-NO" sz="1400" dirty="0"/>
+              <a:rPr lang="nb-NO" sz="1600" dirty="0">
+                <a:solidFill>
+                  <a:srgbClr val="C00000"/>
+                </a:solidFill>
+              </a:rPr>
               <a:t> --</a:t>
             </a:r>
             <a:r>
-              <a:rPr lang="nb-NO" sz="1400" dirty="0" err="1"/>
+              <a:rPr lang="nb-NO" sz="1600" dirty="0" err="1">
+                <a:solidFill>
+                  <a:srgbClr val="C00000"/>
+                </a:solidFill>
+              </a:rPr>
               <a:t>source</a:t>
             </a:r>
             <a:r>
-              <a:rPr lang="nb-NO" sz="1400" dirty="0"/>
+              <a:rPr lang="nb-NO" sz="1600" dirty="0">
+                <a:solidFill>
+                  <a:srgbClr val="C00000"/>
+                </a:solidFill>
+              </a:rPr>
               <a:t>=&lt;</a:t>
             </a:r>
             <a:r>
-              <a:rPr lang="nb-NO" sz="1400" dirty="0" err="1"/>
+              <a:rPr lang="nb-NO" sz="1600" dirty="0" err="1">
+                <a:solidFill>
+                  <a:srgbClr val="C00000"/>
+                </a:solidFill>
+              </a:rPr>
               <a:t>commit-hash</a:t>
             </a:r>
             <a:r>
-              <a:rPr lang="nb-NO" sz="1400" dirty="0"/>
+              <a:rPr lang="nb-NO" sz="1600" dirty="0">
+                <a:solidFill>
+                  <a:srgbClr val="C00000"/>
+                </a:solidFill>
+              </a:rPr>
               <a:t>&gt; -- </a:t>
             </a:r>
             <a:r>
-              <a:rPr lang="nb-NO" sz="1400" dirty="0" err="1"/>
+              <a:rPr lang="nb-NO" sz="1600" dirty="0" err="1">
+                <a:solidFill>
+                  <a:srgbClr val="C00000"/>
+                </a:solidFill>
+              </a:rPr>
               <a:t>filename</a:t>
             </a:r>
             <a:r>
-              <a:rPr lang="nb-NO" sz="1400" dirty="0"/>
+              <a:rPr lang="nb-NO" sz="1600" dirty="0">
+                <a:solidFill>
+                  <a:srgbClr val="C00000"/>
+                </a:solidFill>
+              </a:rPr>
               <a:t> </a:t>
             </a:r>
           </a:p>
@@ -6528,7 +7880,7 @@
 </p:sld>
 </file>
 
-<file path=ppt/slides/slide15.xml><?xml version="1.0" encoding="utf-8"?>
+<file path=ppt/slides/slide16.xml><?xml version="1.0" encoding="utf-8"?>
 <p:sld xmlns:a="http://schemas.openxmlformats.org/drawingml/2006/main" xmlns:r="http://schemas.openxmlformats.org/officeDocument/2006/relationships" xmlns:p="http://schemas.openxmlformats.org/presentationml/2006/main">
   <p:cSld name="Slide 15">
     <p:bg>
@@ -6852,7 +8204,620 @@
               </a:rPr>
               <a:t>Do this every workshop, every week, for the rest of the course</a:t>
             </a:r>
-            <a:endParaRPr lang="en-US" sz="1600" dirty="0"/>
+          </a:p>
+          <a:p>
+            <a:pPr marL="342900" indent="-342900">
+              <a:spcAft>
+                <a:spcPts val="1200"/>
+              </a:spcAft>
+              <a:buSzPct val="100000"/>
+              <a:buChar char="•"/>
+            </a:pPr>
+            <a:r>
+              <a:rPr lang="nb-NO" sz="1600" dirty="0" err="1">
+                <a:solidFill>
+                  <a:srgbClr val="1E2761"/>
+                </a:solidFill>
+              </a:rPr>
+              <a:t>Commit</a:t>
+            </a:r>
+            <a:r>
+              <a:rPr lang="nb-NO" sz="1600" dirty="0">
+                <a:solidFill>
+                  <a:srgbClr val="1E2761"/>
+                </a:solidFill>
+              </a:rPr>
+              <a:t> </a:t>
+            </a:r>
+            <a:r>
+              <a:rPr lang="nb-NO" sz="1600" dirty="0" err="1">
+                <a:solidFill>
+                  <a:srgbClr val="1E2761"/>
+                </a:solidFill>
+              </a:rPr>
+              <a:t>messages</a:t>
+            </a:r>
+            <a:r>
+              <a:rPr lang="nb-NO" sz="1600" dirty="0">
+                <a:solidFill>
+                  <a:srgbClr val="1E2761"/>
+                </a:solidFill>
+              </a:rPr>
+              <a:t>: </a:t>
+            </a:r>
+            <a:r>
+              <a:rPr lang="nb-NO" sz="1600" dirty="0" err="1">
+                <a:solidFill>
+                  <a:srgbClr val="1E2761"/>
+                </a:solidFill>
+              </a:rPr>
+              <a:t>one</a:t>
+            </a:r>
+            <a:r>
+              <a:rPr lang="nb-NO" sz="1600" dirty="0">
+                <a:solidFill>
+                  <a:srgbClr val="1E2761"/>
+                </a:solidFill>
+              </a:rPr>
+              <a:t> line, imperative verb, </a:t>
+            </a:r>
+            <a:r>
+              <a:rPr lang="nb-NO" sz="1600" dirty="0" err="1">
+                <a:solidFill>
+                  <a:srgbClr val="1E2761"/>
+                </a:solidFill>
+              </a:rPr>
+              <a:t>describe</a:t>
+            </a:r>
+            <a:r>
+              <a:rPr lang="nb-NO" sz="1600" dirty="0">
+                <a:solidFill>
+                  <a:srgbClr val="1E2761"/>
+                </a:solidFill>
+              </a:rPr>
+              <a:t> </a:t>
+            </a:r>
+            <a:r>
+              <a:rPr lang="nb-NO" sz="1600" dirty="0" err="1">
+                <a:solidFill>
+                  <a:srgbClr val="1E2761"/>
+                </a:solidFill>
+              </a:rPr>
+              <a:t>what</a:t>
+            </a:r>
+            <a:r>
+              <a:rPr lang="nb-NO" sz="1600" dirty="0">
+                <a:solidFill>
+                  <a:srgbClr val="1E2761"/>
+                </a:solidFill>
+              </a:rPr>
+              <a:t> </a:t>
+            </a:r>
+            <a:r>
+              <a:rPr lang="nb-NO" sz="1600" dirty="0" err="1">
+                <a:solidFill>
+                  <a:srgbClr val="1E2761"/>
+                </a:solidFill>
+              </a:rPr>
+              <a:t>you</a:t>
+            </a:r>
+            <a:r>
+              <a:rPr lang="nb-NO" sz="1600" dirty="0">
+                <a:solidFill>
+                  <a:srgbClr val="1E2761"/>
+                </a:solidFill>
+              </a:rPr>
+              <a:t> </a:t>
+            </a:r>
+            <a:r>
+              <a:rPr lang="nb-NO" sz="1600" dirty="0" err="1">
+                <a:solidFill>
+                  <a:srgbClr val="1E2761"/>
+                </a:solidFill>
+              </a:rPr>
+              <a:t>did</a:t>
+            </a:r>
+            <a:r>
+              <a:rPr lang="nb-NO" sz="1600" dirty="0">
+                <a:solidFill>
+                  <a:srgbClr val="1E2761"/>
+                </a:solidFill>
+              </a:rPr>
+              <a:t> — e.g. "</a:t>
+            </a:r>
+            <a:r>
+              <a:rPr lang="nb-NO" sz="1600" dirty="0" err="1">
+                <a:solidFill>
+                  <a:srgbClr val="1E2761"/>
+                </a:solidFill>
+              </a:rPr>
+              <a:t>Add</a:t>
+            </a:r>
+            <a:r>
+              <a:rPr lang="nb-NO" sz="1600" dirty="0">
+                <a:solidFill>
+                  <a:srgbClr val="1E2761"/>
+                </a:solidFill>
+              </a:rPr>
+              <a:t> ex4.py", "</a:t>
+            </a:r>
+            <a:r>
+              <a:rPr lang="nb-NO" sz="1600" dirty="0" err="1">
+                <a:solidFill>
+                  <a:srgbClr val="1E2761"/>
+                </a:solidFill>
+              </a:rPr>
+              <a:t>Fix</a:t>
+            </a:r>
+            <a:r>
+              <a:rPr lang="nb-NO" sz="1600" dirty="0">
+                <a:solidFill>
+                  <a:srgbClr val="1E2761"/>
+                </a:solidFill>
+              </a:rPr>
+              <a:t>  </a:t>
+            </a:r>
+            <a:r>
+              <a:rPr lang="nb-NO" sz="1600" dirty="0" err="1">
+                <a:solidFill>
+                  <a:srgbClr val="1E2761"/>
+                </a:solidFill>
+              </a:rPr>
+              <a:t>crash</a:t>
+            </a:r>
+            <a:r>
+              <a:rPr lang="nb-NO" sz="1600" dirty="0">
+                <a:solidFill>
+                  <a:srgbClr val="1E2761"/>
+                </a:solidFill>
+              </a:rPr>
+              <a:t> </a:t>
+            </a:r>
+            <a:r>
+              <a:rPr lang="nb-NO" sz="1600" dirty="0" err="1">
+                <a:solidFill>
+                  <a:srgbClr val="1E2761"/>
+                </a:solidFill>
+              </a:rPr>
+              <a:t>on</a:t>
+            </a:r>
+            <a:r>
+              <a:rPr lang="nb-NO" sz="1600" dirty="0">
+                <a:solidFill>
+                  <a:srgbClr val="1E2761"/>
+                </a:solidFill>
+              </a:rPr>
+              <a:t> non-</a:t>
+            </a:r>
+            <a:r>
+              <a:rPr lang="nb-NO" sz="1600" dirty="0" err="1">
+                <a:solidFill>
+                  <a:srgbClr val="1E2761"/>
+                </a:solidFill>
+              </a:rPr>
+              <a:t>integer</a:t>
+            </a:r>
+            <a:r>
+              <a:rPr lang="nb-NO" sz="1600" dirty="0">
+                <a:solidFill>
+                  <a:srgbClr val="1E2761"/>
+                </a:solidFill>
+              </a:rPr>
+              <a:t> input", "Prompt for float </a:t>
+            </a:r>
+            <a:r>
+              <a:rPr lang="nb-NO" sz="1600" dirty="0" err="1">
+                <a:solidFill>
+                  <a:srgbClr val="1E2761"/>
+                </a:solidFill>
+              </a:rPr>
+              <a:t>instead</a:t>
+            </a:r>
+            <a:r>
+              <a:rPr lang="nb-NO" sz="1600" dirty="0">
+                <a:solidFill>
+                  <a:srgbClr val="1E2761"/>
+                </a:solidFill>
+              </a:rPr>
+              <a:t> </a:t>
+            </a:r>
+            <a:r>
+              <a:rPr lang="nb-NO" sz="1600" dirty="0" err="1">
+                <a:solidFill>
+                  <a:srgbClr val="1E2761"/>
+                </a:solidFill>
+              </a:rPr>
+              <a:t>of</a:t>
+            </a:r>
+            <a:r>
+              <a:rPr lang="nb-NO" sz="1600" dirty="0">
+                <a:solidFill>
+                  <a:srgbClr val="1E2761"/>
+                </a:solidFill>
+              </a:rPr>
+              <a:t> </a:t>
+            </a:r>
+            <a:r>
+              <a:rPr lang="nb-NO" sz="1600" dirty="0" err="1">
+                <a:solidFill>
+                  <a:srgbClr val="1E2761"/>
+                </a:solidFill>
+              </a:rPr>
+              <a:t>int</a:t>
+            </a:r>
+            <a:r>
+              <a:rPr lang="nb-NO" sz="1600" dirty="0">
+                <a:solidFill>
+                  <a:srgbClr val="1E2761"/>
+                </a:solidFill>
+              </a:rPr>
+              <a:t>"</a:t>
+            </a:r>
+            <a:endParaRPr lang="en-US" sz="1600" dirty="0">
+              <a:solidFill>
+                <a:srgbClr val="1E2761"/>
+              </a:solidFill>
+              <a:latin typeface="Calibri" pitchFamily="34" charset="0"/>
+              <a:ea typeface="Calibri" pitchFamily="34" charset="-122"/>
+              <a:cs typeface="Calibri" pitchFamily="34" charset="-120"/>
+            </a:endParaRPr>
+          </a:p>
+        </p:txBody>
+      </p:sp>
+      <p:sp>
+        <p:nvSpPr>
+          <p:cNvPr id="10" name="Shape 19">
+            <a:extLst>
+              <a:ext uri="{FF2B5EF4-FFF2-40B4-BE49-F238E27FC236}">
+                <a16:creationId xmlns:a16="http://schemas.microsoft.com/office/drawing/2014/main" id="{088E2C2E-24EF-F839-02EF-F80BAB1A60E5}"/>
+              </a:ext>
+            </a:extLst>
+          </p:cNvPr>
+          <p:cNvSpPr/>
+          <p:nvPr/>
+        </p:nvSpPr>
+        <p:spPr>
+          <a:xfrm>
+            <a:off x="822960" y="5394960"/>
+            <a:ext cx="10543032" cy="640080"/>
+          </a:xfrm>
+          <a:prstGeom prst="roundRect">
+            <a:avLst>
+              <a:gd name="adj" fmla="val 11429"/>
+            </a:avLst>
+          </a:prstGeom>
+          <a:solidFill>
+            <a:srgbClr val="F1F4FB"/>
+          </a:solidFill>
+          <a:ln w="12700">
+            <a:solidFill>
+              <a:srgbClr val="F96167"/>
+            </a:solidFill>
+            <a:prstDash val="solid"/>
+          </a:ln>
+        </p:spPr>
+        <p:txBody>
+          <a:bodyPr/>
+          <a:lstStyle/>
+          <a:p>
+            <a:endParaRPr lang="nb-NO"/>
+          </a:p>
+        </p:txBody>
+      </p:sp>
+      <p:sp>
+        <p:nvSpPr>
+          <p:cNvPr id="12" name="Text 20">
+            <a:extLst>
+              <a:ext uri="{FF2B5EF4-FFF2-40B4-BE49-F238E27FC236}">
+                <a16:creationId xmlns:a16="http://schemas.microsoft.com/office/drawing/2014/main" id="{4DE3F7BC-2B60-39F5-3222-056AB15AB8D1}"/>
+              </a:ext>
+            </a:extLst>
+          </p:cNvPr>
+          <p:cNvSpPr/>
+          <p:nvPr/>
+        </p:nvSpPr>
+        <p:spPr>
+          <a:xfrm>
+            <a:off x="1051560" y="5394960"/>
+            <a:ext cx="10085832" cy="640080"/>
+          </a:xfrm>
+          <a:prstGeom prst="rect">
+            <a:avLst/>
+          </a:prstGeom>
+          <a:noFill/>
+          <a:ln/>
+        </p:spPr>
+        <p:txBody>
+          <a:bodyPr wrap="square" lIns="0" tIns="0" rIns="0" bIns="0" rtlCol="0" anchor="ctr"/>
+          <a:lstStyle/>
+          <a:p>
+            <a:r>
+              <a:rPr lang="en-US" sz="1600" b="1" i="1" dirty="0">
+                <a:solidFill>
+                  <a:srgbClr val="1E2761"/>
+                </a:solidFill>
+                <a:latin typeface="Calibri" pitchFamily="34" charset="0"/>
+                <a:ea typeface="Calibri" pitchFamily="34" charset="-122"/>
+                <a:cs typeface="Calibri" pitchFamily="34" charset="-120"/>
+              </a:rPr>
+              <a:t>Note</a:t>
+            </a:r>
+            <a:r>
+              <a:rPr lang="en-US" sz="1600" i="1" dirty="0">
+                <a:solidFill>
+                  <a:srgbClr val="1E2761"/>
+                </a:solidFill>
+                <a:latin typeface="Calibri" pitchFamily="34" charset="0"/>
+                <a:ea typeface="Calibri" pitchFamily="34" charset="-122"/>
+                <a:cs typeface="Calibri" pitchFamily="34" charset="-120"/>
+              </a:rPr>
+              <a:t>: </a:t>
+            </a:r>
+            <a:r>
+              <a:rPr lang="nb-NO" sz="1600" i="1" dirty="0">
+                <a:solidFill>
+                  <a:srgbClr val="1E2761"/>
+                </a:solidFill>
+              </a:rPr>
+              <a:t>01-python-basics.ipynb </a:t>
+            </a:r>
+            <a:r>
+              <a:rPr lang="nb-NO" sz="1600" i="1" dirty="0" err="1">
+                <a:solidFill>
+                  <a:srgbClr val="1E2761"/>
+                </a:solidFill>
+              </a:rPr>
+              <a:t>was</a:t>
+            </a:r>
+            <a:r>
+              <a:rPr lang="nb-NO" sz="1600" i="1" dirty="0">
+                <a:solidFill>
+                  <a:srgbClr val="1E2761"/>
+                </a:solidFill>
+              </a:rPr>
+              <a:t> never </a:t>
+            </a:r>
+            <a:r>
+              <a:rPr lang="nb-NO" sz="1600" i="1" dirty="0" err="1">
+                <a:solidFill>
+                  <a:srgbClr val="1E2761"/>
+                </a:solidFill>
+              </a:rPr>
+              <a:t>committed</a:t>
+            </a:r>
+            <a:r>
+              <a:rPr lang="nb-NO" sz="1600" i="1" dirty="0">
+                <a:solidFill>
+                  <a:srgbClr val="1E2761"/>
+                </a:solidFill>
+              </a:rPr>
+              <a:t> — </a:t>
+            </a:r>
+            <a:r>
+              <a:rPr lang="nb-NO" sz="1600" i="1" dirty="0" err="1">
+                <a:solidFill>
+                  <a:srgbClr val="1E2761"/>
+                </a:solidFill>
+              </a:rPr>
+              <a:t>that</a:t>
+            </a:r>
+            <a:r>
+              <a:rPr lang="nb-NO" sz="1600" i="1" dirty="0">
+                <a:solidFill>
+                  <a:srgbClr val="1E2761"/>
+                </a:solidFill>
+              </a:rPr>
+              <a:t> </a:t>
+            </a:r>
+            <a:r>
+              <a:rPr lang="nb-NO" sz="1600" i="1" dirty="0" err="1">
+                <a:solidFill>
+                  <a:srgbClr val="1E2761"/>
+                </a:solidFill>
+              </a:rPr>
+              <a:t>was</a:t>
+            </a:r>
+            <a:r>
+              <a:rPr lang="nb-NO" sz="1600" i="1" dirty="0">
+                <a:solidFill>
+                  <a:srgbClr val="1E2761"/>
+                </a:solidFill>
+              </a:rPr>
+              <a:t> a </a:t>
+            </a:r>
+            <a:r>
+              <a:rPr lang="nb-NO" sz="1600" i="1" dirty="0" err="1">
+                <a:solidFill>
+                  <a:srgbClr val="1E2761"/>
+                </a:solidFill>
+              </a:rPr>
+              <a:t>deliberate</a:t>
+            </a:r>
+            <a:r>
+              <a:rPr lang="nb-NO" sz="1600" i="1" dirty="0">
+                <a:solidFill>
+                  <a:srgbClr val="1E2761"/>
+                </a:solidFill>
+              </a:rPr>
+              <a:t> </a:t>
+            </a:r>
+            <a:r>
+              <a:rPr lang="nb-NO" sz="1600" i="1" dirty="0" err="1">
+                <a:solidFill>
+                  <a:srgbClr val="1E2761"/>
+                </a:solidFill>
+              </a:rPr>
+              <a:t>choice</a:t>
+            </a:r>
+            <a:r>
+              <a:rPr lang="nb-NO" sz="1600" i="1" dirty="0">
+                <a:solidFill>
+                  <a:srgbClr val="1E2761"/>
+                </a:solidFill>
+              </a:rPr>
+              <a:t>, not an </a:t>
+            </a:r>
+            <a:r>
+              <a:rPr lang="nb-NO" sz="1600" i="1" dirty="0" err="1">
+                <a:solidFill>
+                  <a:srgbClr val="1E2761"/>
+                </a:solidFill>
+              </a:rPr>
+              <a:t>oversight</a:t>
+            </a:r>
+            <a:r>
+              <a:rPr lang="nb-NO" sz="1600" i="1" dirty="0">
+                <a:solidFill>
+                  <a:srgbClr val="1E2761"/>
+                </a:solidFill>
+              </a:rPr>
+              <a:t>. </a:t>
+            </a:r>
+            <a:r>
+              <a:rPr lang="nb-NO" sz="1600" i="1" dirty="0" err="1">
+                <a:solidFill>
+                  <a:srgbClr val="1E2761"/>
+                </a:solidFill>
+              </a:rPr>
+              <a:t>Want</a:t>
+            </a:r>
+            <a:r>
+              <a:rPr lang="nb-NO" sz="1600" i="1" dirty="0">
+                <a:solidFill>
+                  <a:srgbClr val="1E2761"/>
+                </a:solidFill>
+              </a:rPr>
+              <a:t> a </a:t>
+            </a:r>
+            <a:r>
+              <a:rPr lang="nb-NO" sz="1600" i="1" dirty="0" err="1">
+                <a:solidFill>
+                  <a:srgbClr val="1E2761"/>
+                </a:solidFill>
+              </a:rPr>
+              <a:t>fully</a:t>
+            </a:r>
+            <a:r>
+              <a:rPr lang="nb-NO" sz="1600" i="1" dirty="0">
+                <a:solidFill>
+                  <a:srgbClr val="1E2761"/>
+                </a:solidFill>
+              </a:rPr>
+              <a:t> </a:t>
+            </a:r>
+            <a:r>
+              <a:rPr lang="nb-NO" sz="1600" i="1" dirty="0" err="1">
+                <a:solidFill>
+                  <a:srgbClr val="1E2761"/>
+                </a:solidFill>
+              </a:rPr>
+              <a:t>clean</a:t>
+            </a:r>
+            <a:r>
+              <a:rPr lang="nb-NO" sz="1600" i="1" dirty="0">
+                <a:solidFill>
+                  <a:srgbClr val="1E2761"/>
+                </a:solidFill>
+              </a:rPr>
+              <a:t> </a:t>
+            </a:r>
+            <a:r>
+              <a:rPr lang="nb-NO" sz="1600" i="1" dirty="0" err="1">
+                <a:solidFill>
+                  <a:srgbClr val="1E2761"/>
+                </a:solidFill>
+              </a:rPr>
+              <a:t>repo</a:t>
+            </a:r>
+            <a:r>
+              <a:rPr lang="nb-NO" sz="1600" i="1" dirty="0">
+                <a:solidFill>
+                  <a:srgbClr val="1E2761"/>
+                </a:solidFill>
+              </a:rPr>
+              <a:t>? Stage and </a:t>
+            </a:r>
+            <a:r>
+              <a:rPr lang="nb-NO" sz="1600" i="1" dirty="0" err="1">
+                <a:solidFill>
+                  <a:srgbClr val="1E2761"/>
+                </a:solidFill>
+              </a:rPr>
+              <a:t>commit</a:t>
+            </a:r>
+            <a:r>
+              <a:rPr lang="nb-NO" sz="1600" i="1" dirty="0">
+                <a:solidFill>
+                  <a:srgbClr val="1E2761"/>
+                </a:solidFill>
+              </a:rPr>
+              <a:t> it </a:t>
+            </a:r>
+            <a:r>
+              <a:rPr lang="nb-NO" sz="1600" i="1" dirty="0" err="1">
+                <a:solidFill>
+                  <a:srgbClr val="1E2761"/>
+                </a:solidFill>
+              </a:rPr>
+              <a:t>now</a:t>
+            </a:r>
+            <a:r>
+              <a:rPr lang="nb-NO" sz="1600" i="1" dirty="0">
+                <a:solidFill>
+                  <a:srgbClr val="1E2761"/>
+                </a:solidFill>
+              </a:rPr>
+              <a:t>, </a:t>
+            </a:r>
+            <a:r>
+              <a:rPr lang="nb-NO" sz="1600" i="1" dirty="0" err="1">
+                <a:solidFill>
+                  <a:srgbClr val="1E2761"/>
+                </a:solidFill>
+              </a:rPr>
+              <a:t>on</a:t>
+            </a:r>
+            <a:r>
+              <a:rPr lang="nb-NO" sz="1600" i="1" dirty="0">
+                <a:solidFill>
+                  <a:srgbClr val="1E2761"/>
+                </a:solidFill>
+              </a:rPr>
+              <a:t> </a:t>
+            </a:r>
+            <a:r>
+              <a:rPr lang="nb-NO" sz="1600" i="1" dirty="0" err="1">
+                <a:solidFill>
+                  <a:srgbClr val="1E2761"/>
+                </a:solidFill>
+              </a:rPr>
+              <a:t>its</a:t>
+            </a:r>
+            <a:r>
+              <a:rPr lang="nb-NO" sz="1600" i="1" dirty="0">
+                <a:solidFill>
+                  <a:srgbClr val="1E2761"/>
+                </a:solidFill>
+              </a:rPr>
+              <a:t> </a:t>
+            </a:r>
+            <a:r>
+              <a:rPr lang="nb-NO" sz="1600" i="1" dirty="0" err="1">
+                <a:solidFill>
+                  <a:srgbClr val="1E2761"/>
+                </a:solidFill>
+              </a:rPr>
+              <a:t>own</a:t>
+            </a:r>
+            <a:r>
+              <a:rPr lang="nb-NO" sz="1600" i="1" dirty="0">
+                <a:solidFill>
+                  <a:srgbClr val="1E2761"/>
+                </a:solidFill>
+              </a:rPr>
+              <a:t>.</a:t>
+            </a:r>
+            <a:endParaRPr lang="en-US" sz="1600" i="1" dirty="0"/>
           </a:p>
         </p:txBody>
       </p:sp>
@@ -6864,7 +8829,7 @@
 </p:sld>
 </file>
 
-<file path=ppt/slides/slide16.xml><?xml version="1.0" encoding="utf-8"?>
+<file path=ppt/slides/slide17.xml><?xml version="1.0" encoding="utf-8"?>
 <p:sld xmlns:a="http://schemas.openxmlformats.org/drawingml/2006/main" xmlns:r="http://schemas.openxmlformats.org/officeDocument/2006/relationships" xmlns:p="http://schemas.openxmlformats.org/presentationml/2006/main">
   <p:cSld name="Slide 16">
     <p:bg>
@@ -7177,7 +9142,7 @@
               <a:buNone/>
             </a:pPr>
             <a:r>
-              <a:rPr lang="en-US" sz="1550" dirty="0">
+              <a:rPr lang="en-US" sz="1600" dirty="0">
                 <a:solidFill>
                   <a:srgbClr val="1E2761"/>
                 </a:solidFill>
@@ -7187,7 +9152,7 @@
               </a:rPr>
               <a:t>Create ex4.py</a:t>
             </a:r>
-            <a:endParaRPr lang="en-US" sz="1550" dirty="0"/>
+            <a:endParaRPr lang="en-US" sz="1600" dirty="0"/>
           </a:p>
         </p:txBody>
       </p:sp>
@@ -7282,7 +9247,7 @@
               <a:buNone/>
             </a:pPr>
             <a:r>
-              <a:rPr lang="en-US" sz="1550" dirty="0">
+              <a:rPr lang="en-US" sz="1600" dirty="0">
                 <a:solidFill>
                   <a:srgbClr val="1E2761"/>
                 </a:solidFill>
@@ -7292,7 +9257,7 @@
               </a:rPr>
               <a:t>Write a program that prompts for a Fahrenheit temperature, converts it using Celc = (5/9)×(Fahr−32), and displays the result rounded to the nearest integer</a:t>
             </a:r>
-            <a:endParaRPr lang="en-US" sz="1550" dirty="0"/>
+            <a:endParaRPr lang="en-US" sz="1600" dirty="0"/>
           </a:p>
         </p:txBody>
       </p:sp>
@@ -7387,7 +9352,7 @@
               <a:buNone/>
             </a:pPr>
             <a:r>
-              <a:rPr lang="en-US" sz="1550" dirty="0">
+              <a:rPr lang="en-US" sz="1600" dirty="0">
                 <a:solidFill>
                   <a:srgbClr val="1E2761"/>
                 </a:solidFill>
@@ -7397,7 +9362,7 @@
               </a:rPr>
               <a:t>Run it, confirm the output</a:t>
             </a:r>
-            <a:endParaRPr lang="en-US" sz="1550" dirty="0"/>
+            <a:endParaRPr lang="en-US" sz="1600" dirty="0"/>
           </a:p>
         </p:txBody>
       </p:sp>
@@ -7492,7 +9457,7 @@
               <a:buNone/>
             </a:pPr>
             <a:r>
-              <a:rPr lang="en-US" sz="1550" dirty="0">
+              <a:rPr lang="en-US" sz="1600" dirty="0">
                 <a:solidFill>
                   <a:srgbClr val="1E2761"/>
                 </a:solidFill>
@@ -7502,7 +9467,7 @@
               </a:rPr>
               <a:t>Stage and commit it </a:t>
             </a:r>
-            <a:endParaRPr lang="en-US" sz="1550" dirty="0"/>
+            <a:endParaRPr lang="en-US" sz="1600" dirty="0"/>
           </a:p>
         </p:txBody>
       </p:sp>
@@ -7565,7 +9530,7 @@
               <a:buNone/>
             </a:pPr>
             <a:r>
-              <a:rPr lang="en-US" sz="1350" b="1" i="1" dirty="0">
+              <a:rPr lang="en-US" sz="1600" b="1" i="1" dirty="0">
                 <a:solidFill>
                   <a:srgbClr val="1E2761"/>
                 </a:solidFill>
@@ -7576,7 +9541,7 @@
               <a:t>Tip</a:t>
             </a:r>
             <a:r>
-              <a:rPr lang="en-US" sz="1350" i="1" dirty="0">
+              <a:rPr lang="en-US" sz="1600" i="1" dirty="0">
                 <a:solidFill>
                   <a:srgbClr val="1E2761"/>
                 </a:solidFill>
@@ -7586,7 +9551,7 @@
               </a:rPr>
               <a:t>: Instead of downloading a solution proposal, type it up yourself from scratch. Tedious, yes — but it's how the code actually sticks.</a:t>
             </a:r>
-            <a:endParaRPr lang="en-US" sz="1350" dirty="0"/>
+            <a:endParaRPr lang="en-US" sz="1600" dirty="0"/>
           </a:p>
         </p:txBody>
       </p:sp>
@@ -7598,7 +9563,7 @@
 </p:sld>
 </file>
 
-<file path=ppt/slides/slide17.xml><?xml version="1.0" encoding="utf-8"?>
+<file path=ppt/slides/slide18.xml><?xml version="1.0" encoding="utf-8"?>
 <p:sld xmlns:a="http://schemas.openxmlformats.org/drawingml/2006/main" xmlns:r="http://schemas.openxmlformats.org/officeDocument/2006/relationships" xmlns:p="http://schemas.openxmlformats.org/presentationml/2006/main">
   <p:cSld name="Slide 17">
     <p:bg>
@@ -8633,7 +10598,7 @@
           <a:lstStyle/>
           <a:p>
             <a:r>
-              <a:rPr lang="en-US" sz="1350" b="1" i="1" dirty="0">
+              <a:rPr lang="en-US" sz="1600" b="1" i="1" dirty="0">
                 <a:solidFill>
                   <a:srgbClr val="1E2761"/>
                 </a:solidFill>
@@ -8643,7 +10608,7 @@
               <a:t>Tip</a:t>
             </a:r>
             <a:r>
-              <a:rPr lang="en-US" sz="1350" i="1" dirty="0">
+              <a:rPr lang="en-US" sz="1600" i="1" dirty="0">
                 <a:solidFill>
                   <a:srgbClr val="1E2761"/>
                 </a:solidFill>
@@ -8653,7 +10618,7 @@
               <a:t>: </a:t>
             </a:r>
             <a:r>
-              <a:rPr lang="nb-NO" sz="1400" i="1" dirty="0">
+              <a:rPr lang="nb-NO" sz="1600" i="1" dirty="0">
                 <a:solidFill>
                   <a:srgbClr val="1E2761"/>
                 </a:solidFill>
@@ -8661,7 +10626,7 @@
               <a:t>If </a:t>
             </a:r>
             <a:r>
-              <a:rPr lang="nb-NO" sz="1400" i="1" dirty="0" err="1">
+              <a:rPr lang="nb-NO" sz="1600" i="1" dirty="0" err="1">
                 <a:solidFill>
                   <a:srgbClr val="1E2761"/>
                 </a:solidFill>
@@ -8669,7 +10634,7 @@
               <a:t>you</a:t>
             </a:r>
             <a:r>
-              <a:rPr lang="nb-NO" sz="1400" i="1" dirty="0">
+              <a:rPr lang="nb-NO" sz="1600" i="1" dirty="0">
                 <a:solidFill>
                   <a:srgbClr val="1E2761"/>
                 </a:solidFill>
@@ -8677,7 +10642,7 @@
               <a:t> ever </a:t>
             </a:r>
             <a:r>
-              <a:rPr lang="nb-NO" sz="1400" i="1" dirty="0" err="1">
+              <a:rPr lang="nb-NO" sz="1600" i="1" dirty="0" err="1">
                 <a:solidFill>
                   <a:srgbClr val="1E2761"/>
                 </a:solidFill>
@@ -8685,7 +10650,7 @@
               <a:t>want</a:t>
             </a:r>
             <a:r>
-              <a:rPr lang="nb-NO" sz="1400" i="1" dirty="0">
+              <a:rPr lang="nb-NO" sz="1600" i="1" dirty="0">
                 <a:solidFill>
                   <a:srgbClr val="1E2761"/>
                 </a:solidFill>
@@ -8693,7 +10658,7 @@
               <a:t> to start a </a:t>
             </a:r>
             <a:r>
-              <a:rPr lang="nb-NO" sz="1400" i="1" dirty="0" err="1">
+              <a:rPr lang="nb-NO" sz="1600" i="1" dirty="0" err="1">
                 <a:solidFill>
                   <a:srgbClr val="1E2761"/>
                 </a:solidFill>
@@ -8701,7 +10666,7 @@
               <a:t>repo</a:t>
             </a:r>
             <a:r>
-              <a:rPr lang="nb-NO" sz="1400" i="1" dirty="0">
+              <a:rPr lang="nb-NO" sz="1600" i="1" dirty="0">
                 <a:solidFill>
                   <a:srgbClr val="1E2761"/>
                 </a:solidFill>
@@ -8709,7 +10674,7 @@
               <a:t> over from </a:t>
             </a:r>
             <a:r>
-              <a:rPr lang="nb-NO" sz="1400" i="1" dirty="0" err="1">
+              <a:rPr lang="nb-NO" sz="1600" i="1" dirty="0" err="1">
                 <a:solidFill>
                   <a:srgbClr val="1E2761"/>
                 </a:solidFill>
@@ -8717,7 +10682,7 @@
               <a:t>scratch</a:t>
             </a:r>
             <a:r>
-              <a:rPr lang="nb-NO" sz="1400" i="1" dirty="0">
+              <a:rPr lang="nb-NO" sz="1600" i="1" dirty="0">
                 <a:solidFill>
                   <a:srgbClr val="1E2761"/>
                 </a:solidFill>
@@ -8725,7 +10690,7 @@
               <a:t>, </a:t>
             </a:r>
             <a:r>
-              <a:rPr lang="nb-NO" sz="1400" i="1" dirty="0" err="1">
+              <a:rPr lang="nb-NO" sz="1600" i="1" dirty="0" err="1">
                 <a:solidFill>
                   <a:srgbClr val="1E2761"/>
                 </a:solidFill>
@@ -8733,7 +10698,7 @@
               <a:t>delete</a:t>
             </a:r>
             <a:r>
-              <a:rPr lang="nb-NO" sz="1400" i="1" dirty="0">
+              <a:rPr lang="nb-NO" sz="1600" i="1" dirty="0">
                 <a:solidFill>
                   <a:srgbClr val="1E2761"/>
                 </a:solidFill>
@@ -8741,7 +10706,7 @@
               <a:t> </a:t>
             </a:r>
             <a:r>
-              <a:rPr lang="nb-NO" sz="1400" i="1" dirty="0" err="1">
+              <a:rPr lang="nb-NO" sz="1600" i="1" dirty="0" err="1">
                 <a:solidFill>
                   <a:srgbClr val="1E2761"/>
                 </a:solidFill>
@@ -8749,7 +10714,7 @@
               <a:t>the</a:t>
             </a:r>
             <a:r>
-              <a:rPr lang="nb-NO" sz="1400" i="1" dirty="0">
+              <a:rPr lang="nb-NO" sz="1600" i="1" dirty="0">
                 <a:solidFill>
                   <a:srgbClr val="1E2761"/>
                 </a:solidFill>
@@ -8757,7 +10722,7 @@
               <a:t> </a:t>
             </a:r>
             <a:r>
-              <a:rPr lang="nb-NO" sz="1400" i="1" dirty="0" err="1">
+              <a:rPr lang="nb-NO" sz="1600" i="1" dirty="0" err="1">
                 <a:solidFill>
                   <a:srgbClr val="1E2761"/>
                 </a:solidFill>
@@ -8765,7 +10730,7 @@
               <a:t>hidden</a:t>
             </a:r>
             <a:r>
-              <a:rPr lang="nb-NO" sz="1400" i="1" dirty="0">
+              <a:rPr lang="nb-NO" sz="1600" i="1" dirty="0">
                 <a:solidFill>
                   <a:srgbClr val="1E2761"/>
                 </a:solidFill>
@@ -8773,7 +10738,7 @@
               <a:t> .</a:t>
             </a:r>
             <a:r>
-              <a:rPr lang="nb-NO" sz="1400" i="1" dirty="0" err="1">
+              <a:rPr lang="nb-NO" sz="1600" i="1" dirty="0" err="1">
                 <a:solidFill>
                   <a:srgbClr val="1E2761"/>
                 </a:solidFill>
@@ -8781,7 +10746,7 @@
               <a:t>git</a:t>
             </a:r>
             <a:r>
-              <a:rPr lang="nb-NO" sz="1400" i="1" dirty="0">
+              <a:rPr lang="nb-NO" sz="1600" i="1" dirty="0">
                 <a:solidFill>
                   <a:srgbClr val="1E2761"/>
                 </a:solidFill>
@@ -8789,7 +10754,7 @@
               <a:t> folder </a:t>
             </a:r>
             <a:r>
-              <a:rPr lang="nb-NO" sz="1400" i="1" dirty="0" err="1">
+              <a:rPr lang="nb-NO" sz="1600" i="1" dirty="0" err="1">
                 <a:solidFill>
                   <a:srgbClr val="1E2761"/>
                 </a:solidFill>
@@ -8797,7 +10762,7 @@
               <a:t>inside</a:t>
             </a:r>
             <a:r>
-              <a:rPr lang="nb-NO" sz="1400" i="1" dirty="0">
+              <a:rPr lang="nb-NO" sz="1600" i="1" dirty="0">
                 <a:solidFill>
                   <a:srgbClr val="1E2761"/>
                 </a:solidFill>
@@ -8805,7 +10770,7 @@
               <a:t> </a:t>
             </a:r>
             <a:r>
-              <a:rPr lang="nb-NO" sz="1400" i="1" dirty="0" err="1">
+              <a:rPr lang="nb-NO" sz="1600" i="1" dirty="0" err="1">
                 <a:solidFill>
                   <a:srgbClr val="1E2761"/>
                 </a:solidFill>
@@ -8813,7 +10778,7 @@
               <a:t>your</a:t>
             </a:r>
             <a:r>
-              <a:rPr lang="nb-NO" sz="1400" i="1" dirty="0">
+              <a:rPr lang="nb-NO" sz="1600" i="1" dirty="0">
                 <a:solidFill>
                   <a:srgbClr val="1E2761"/>
                 </a:solidFill>
@@ -8821,7 +10786,7 @@
               <a:t> </a:t>
             </a:r>
             <a:r>
-              <a:rPr lang="nb-NO" sz="1400" i="1" dirty="0" err="1">
+              <a:rPr lang="nb-NO" sz="1600" i="1" dirty="0" err="1">
                 <a:solidFill>
                   <a:srgbClr val="1E2761"/>
                 </a:solidFill>
@@ -8829,7 +10794,7 @@
               <a:t>week's</a:t>
             </a:r>
             <a:r>
-              <a:rPr lang="nb-NO" sz="1400" i="1" dirty="0">
+              <a:rPr lang="nb-NO" sz="1600" i="1" dirty="0">
                 <a:solidFill>
                   <a:srgbClr val="1E2761"/>
                 </a:solidFill>
@@ -8837,7 +10802,7 @@
               <a:t> folder — </a:t>
             </a:r>
             <a:r>
-              <a:rPr lang="nb-NO" sz="1400" i="1" dirty="0" err="1">
+              <a:rPr lang="nb-NO" sz="1600" i="1" dirty="0" err="1">
                 <a:solidFill>
                   <a:srgbClr val="1E2761"/>
                 </a:solidFill>
@@ -8845,7 +10810,7 @@
               <a:t>this</a:t>
             </a:r>
             <a:r>
-              <a:rPr lang="nb-NO" sz="1400" i="1" dirty="0">
+              <a:rPr lang="nb-NO" sz="1600" i="1" dirty="0">
                 <a:solidFill>
                   <a:srgbClr val="1E2761"/>
                 </a:solidFill>
@@ -8853,7 +10818,7 @@
               <a:t> </a:t>
             </a:r>
             <a:r>
-              <a:rPr lang="nb-NO" sz="1400" i="1" dirty="0" err="1">
+              <a:rPr lang="nb-NO" sz="1600" i="1" dirty="0" err="1">
                 <a:solidFill>
                   <a:srgbClr val="1E2761"/>
                 </a:solidFill>
@@ -8861,7 +10826,7 @@
               <a:t>removes</a:t>
             </a:r>
             <a:r>
-              <a:rPr lang="nb-NO" sz="1400" i="1" dirty="0">
+              <a:rPr lang="nb-NO" sz="1600" i="1" dirty="0">
                 <a:solidFill>
                   <a:srgbClr val="1E2761"/>
                 </a:solidFill>
@@ -8869,7 +10834,7 @@
               <a:t> all </a:t>
             </a:r>
             <a:r>
-              <a:rPr lang="nb-NO" sz="1400" i="1" dirty="0" err="1">
+              <a:rPr lang="nb-NO" sz="1600" i="1" dirty="0" err="1">
                 <a:solidFill>
                   <a:srgbClr val="1E2761"/>
                 </a:solidFill>
@@ -8877,7 +10842,7 @@
               <a:t>commit</a:t>
             </a:r>
             <a:r>
-              <a:rPr lang="nb-NO" sz="1400" i="1" dirty="0">
+              <a:rPr lang="nb-NO" sz="1600" i="1" dirty="0">
                 <a:solidFill>
                   <a:srgbClr val="1E2761"/>
                 </a:solidFill>
@@ -8885,7 +10850,7 @@
               <a:t> </a:t>
             </a:r>
             <a:r>
-              <a:rPr lang="nb-NO" sz="1400" i="1" dirty="0" err="1">
+              <a:rPr lang="nb-NO" sz="1600" i="1" dirty="0" err="1">
                 <a:solidFill>
                   <a:srgbClr val="1E2761"/>
                 </a:solidFill>
@@ -8893,7 +10858,7 @@
               <a:t>history</a:t>
             </a:r>
             <a:r>
-              <a:rPr lang="nb-NO" sz="1400" i="1" dirty="0">
+              <a:rPr lang="nb-NO" sz="1600" i="1" dirty="0">
                 <a:solidFill>
                   <a:srgbClr val="1E2761"/>
                 </a:solidFill>
@@ -8901,7 +10866,7 @@
               <a:t> </a:t>
             </a:r>
             <a:r>
-              <a:rPr lang="nb-NO" sz="1400" i="1" dirty="0" err="1">
+              <a:rPr lang="nb-NO" sz="1600" i="1" dirty="0" err="1">
                 <a:solidFill>
                   <a:srgbClr val="1E2761"/>
                 </a:solidFill>
@@ -8909,7 +10874,7 @@
               <a:t>but</a:t>
             </a:r>
             <a:r>
-              <a:rPr lang="nb-NO" sz="1400" i="1" dirty="0">
+              <a:rPr lang="nb-NO" sz="1600" i="1" dirty="0">
                 <a:solidFill>
                   <a:srgbClr val="1E2761"/>
                 </a:solidFill>
@@ -8917,7 +10882,7 @@
               <a:t> </a:t>
             </a:r>
             <a:r>
-              <a:rPr lang="nb-NO" sz="1400" i="1" dirty="0" err="1">
+              <a:rPr lang="nb-NO" sz="1600" i="1" dirty="0" err="1">
                 <a:solidFill>
                   <a:srgbClr val="1E2761"/>
                 </a:solidFill>
@@ -8925,7 +10890,7 @@
               <a:t>leaves</a:t>
             </a:r>
             <a:r>
-              <a:rPr lang="nb-NO" sz="1400" i="1" dirty="0">
+              <a:rPr lang="nb-NO" sz="1600" i="1" dirty="0">
                 <a:solidFill>
                   <a:srgbClr val="1E2761"/>
                 </a:solidFill>
@@ -8933,7 +10898,7 @@
               <a:t> </a:t>
             </a:r>
             <a:r>
-              <a:rPr lang="nb-NO" sz="1400" i="1" dirty="0" err="1">
+              <a:rPr lang="nb-NO" sz="1600" i="1" dirty="0" err="1">
                 <a:solidFill>
                   <a:srgbClr val="1E2761"/>
                 </a:solidFill>
@@ -8941,7 +10906,7 @@
               <a:t>your</a:t>
             </a:r>
             <a:r>
-              <a:rPr lang="nb-NO" sz="1400" i="1" dirty="0">
+              <a:rPr lang="nb-NO" sz="1600" i="1" dirty="0">
                 <a:solidFill>
                   <a:srgbClr val="1E2761"/>
                 </a:solidFill>
@@ -8949,7 +10914,7 @@
               <a:t> </a:t>
             </a:r>
             <a:r>
-              <a:rPr lang="nb-NO" sz="1400" i="1" dirty="0" err="1">
+              <a:rPr lang="nb-NO" sz="1600" i="1" dirty="0" err="1">
                 <a:solidFill>
                   <a:srgbClr val="1E2761"/>
                 </a:solidFill>
@@ -8957,7 +10922,7 @@
               <a:t>actual</a:t>
             </a:r>
             <a:r>
-              <a:rPr lang="nb-NO" sz="1400" i="1" dirty="0">
+              <a:rPr lang="nb-NO" sz="1600" i="1" dirty="0">
                 <a:solidFill>
                   <a:srgbClr val="1E2761"/>
                 </a:solidFill>
@@ -8965,7 +10930,7 @@
               <a:t> files </a:t>
             </a:r>
             <a:r>
-              <a:rPr lang="nb-NO" sz="1400" i="1" dirty="0" err="1">
+              <a:rPr lang="nb-NO" sz="1600" i="1" dirty="0" err="1">
                 <a:solidFill>
                   <a:srgbClr val="1E2761"/>
                 </a:solidFill>
@@ -8973,7 +10938,7 @@
               <a:t>untouched</a:t>
             </a:r>
             <a:r>
-              <a:rPr lang="nb-NO" sz="1400" i="1" dirty="0">
+              <a:rPr lang="nb-NO" sz="1600" i="1" dirty="0">
                 <a:solidFill>
                   <a:srgbClr val="1E2761"/>
                 </a:solidFill>
@@ -8981,7 +10946,7 @@
               <a:t>. To start </a:t>
             </a:r>
             <a:r>
-              <a:rPr lang="nb-NO" sz="1400" i="1" dirty="0" err="1">
+              <a:rPr lang="nb-NO" sz="1600" i="1" dirty="0" err="1">
                 <a:solidFill>
                   <a:srgbClr val="1E2761"/>
                 </a:solidFill>
@@ -8989,7 +10954,7 @@
               <a:t>tracking</a:t>
             </a:r>
             <a:r>
-              <a:rPr lang="nb-NO" sz="1400" i="1" dirty="0">
+              <a:rPr lang="nb-NO" sz="1600" i="1" dirty="0">
                 <a:solidFill>
                   <a:srgbClr val="1E2761"/>
                 </a:solidFill>
@@ -8997,7 +10962,7 @@
               <a:t> </a:t>
             </a:r>
             <a:r>
-              <a:rPr lang="nb-NO" sz="1400" i="1" dirty="0" err="1">
+              <a:rPr lang="nb-NO" sz="1600" i="1" dirty="0" err="1">
                 <a:solidFill>
                   <a:srgbClr val="1E2761"/>
                 </a:solidFill>
@@ -9005,7 +10970,7 @@
               <a:t>again</a:t>
             </a:r>
             <a:r>
-              <a:rPr lang="nb-NO" sz="1400" i="1" dirty="0">
+              <a:rPr lang="nb-NO" sz="1600" i="1" dirty="0">
                 <a:solidFill>
                   <a:srgbClr val="1E2761"/>
                 </a:solidFill>
@@ -9013,7 +10978,7 @@
               <a:t>, just </a:t>
             </a:r>
             <a:r>
-              <a:rPr lang="nb-NO" sz="1400" i="1" dirty="0" err="1">
+              <a:rPr lang="nb-NO" sz="1600" i="1" dirty="0" err="1">
                 <a:solidFill>
                   <a:srgbClr val="1E2761"/>
                 </a:solidFill>
@@ -9021,7 +10986,7 @@
               <a:t>click</a:t>
             </a:r>
             <a:r>
-              <a:rPr lang="nb-NO" sz="1400" i="1" dirty="0">
+              <a:rPr lang="nb-NO" sz="1600" i="1" dirty="0">
                 <a:solidFill>
                   <a:srgbClr val="1E2761"/>
                 </a:solidFill>
@@ -9029,7 +10994,7 @@
               <a:t> </a:t>
             </a:r>
             <a:r>
-              <a:rPr lang="nb-NO" sz="1400" i="1" dirty="0" err="1">
+              <a:rPr lang="nb-NO" sz="1600" i="1" dirty="0" err="1">
                 <a:solidFill>
                   <a:srgbClr val="1E2761"/>
                 </a:solidFill>
@@ -9037,7 +11002,7 @@
               <a:t>Initialize</a:t>
             </a:r>
             <a:r>
-              <a:rPr lang="nb-NO" sz="1400" i="1" dirty="0">
+              <a:rPr lang="nb-NO" sz="1600" i="1" dirty="0">
                 <a:solidFill>
                   <a:srgbClr val="1E2761"/>
                 </a:solidFill>
@@ -9045,7 +11010,7 @@
               <a:t> </a:t>
             </a:r>
             <a:r>
-              <a:rPr lang="nb-NO" sz="1400" i="1" dirty="0" err="1">
+              <a:rPr lang="nb-NO" sz="1600" i="1" dirty="0" err="1">
                 <a:solidFill>
                   <a:srgbClr val="1E2761"/>
                 </a:solidFill>
@@ -9053,7 +11018,7 @@
               <a:t>Repository</a:t>
             </a:r>
             <a:r>
-              <a:rPr lang="nb-NO" sz="1400" i="1" dirty="0">
+              <a:rPr lang="nb-NO" sz="1600" i="1" dirty="0">
                 <a:solidFill>
                   <a:srgbClr val="1E2761"/>
                 </a:solidFill>
@@ -9061,14 +11026,14 @@
               <a:t> as </a:t>
             </a:r>
             <a:r>
-              <a:rPr lang="nb-NO" sz="1400" i="1" dirty="0" err="1">
+              <a:rPr lang="nb-NO" sz="1600" i="1" dirty="0" err="1">
                 <a:solidFill>
                   <a:srgbClr val="1E2761"/>
                 </a:solidFill>
               </a:rPr>
               <a:t>before</a:t>
             </a:r>
-            <a:endParaRPr lang="nb-NO" sz="1400" i="1" dirty="0">
+            <a:endParaRPr lang="nb-NO" sz="1600" i="1" dirty="0">
               <a:solidFill>
                 <a:srgbClr val="1E2761"/>
               </a:solidFill>
@@ -9084,7 +11049,7 @@
 </p:sld>
 </file>
 
-<file path=ppt/slides/slide18.xml><?xml version="1.0" encoding="utf-8"?>
+<file path=ppt/slides/slide19.xml><?xml version="1.0" encoding="utf-8"?>
 <p:sld xmlns:a="http://schemas.openxmlformats.org/drawingml/2006/main" xmlns:r="http://schemas.openxmlformats.org/officeDocument/2006/relationships" xmlns:p="http://schemas.openxmlformats.org/presentationml/2006/main">
   <p:cSld>
     <p:spTree>
@@ -9446,726 +11411,6 @@
           </a:prstGeom>
         </p:spPr>
       </p:pic>
-    </p:spTree>
-  </p:cSld>
-  <p:clrMapOvr>
-    <a:masterClrMapping/>
-  </p:clrMapOvr>
-</p:sld>
-</file>
-
-<file path=ppt/slides/slide19.xml><?xml version="1.0" encoding="utf-8"?>
-<p:sld xmlns:a="http://schemas.openxmlformats.org/drawingml/2006/main" xmlns:r="http://schemas.openxmlformats.org/officeDocument/2006/relationships" xmlns:p="http://schemas.openxmlformats.org/presentationml/2006/main">
-  <p:cSld>
-    <p:bg>
-      <p:bgPr>
-        <a:solidFill>
-          <a:srgbClr val="FFFFFF"/>
-        </a:solidFill>
-        <a:effectLst/>
-      </p:bgPr>
-    </p:bg>
-    <p:spTree>
-      <p:nvGrpSpPr>
-        <p:cNvPr id="1" name=""/>
-        <p:cNvGrpSpPr/>
-        <p:nvPr/>
-      </p:nvGrpSpPr>
-      <p:grpSpPr>
-        <a:xfrm>
-          <a:off x="0" y="0"/>
-          <a:ext cx="0" cy="0"/>
-          <a:chOff x="0" y="0"/>
-          <a:chExt cx="0" cy="0"/>
-        </a:xfrm>
-      </p:grpSpPr>
-      <p:sp>
-        <p:nvSpPr>
-          <p:cNvPr id="11" name="SlideNumber"/>
-          <p:cNvSpPr/>
-          <p:nvPr/>
-        </p:nvSpPr>
-        <p:spPr>
-          <a:xfrm>
-            <a:off x="11274552" y="6492240"/>
-            <a:ext cx="457200" cy="274320"/>
-          </a:xfrm>
-          <a:prstGeom prst="rect">
-            <a:avLst/>
-          </a:prstGeom>
-          <a:noFill/>
-          <a:ln/>
-        </p:spPr>
-        <p:txBody>
-          <a:bodyPr wrap="square" lIns="0" tIns="0" rIns="0" bIns="0" rtlCol="0" anchor="ctr"/>
-          <a:lstStyle/>
-          <a:p>
-            <a:pPr marL="0" indent="0" algn="r">
-              <a:buNone/>
-            </a:pPr>
-            <a:r>
-              <a:rPr lang="en-US" sz="1100" dirty="0">
-                <a:solidFill>
-                  <a:srgbClr val="5B6472"/>
-                </a:solidFill>
-                <a:latin typeface="Calibri" pitchFamily="34" charset="0"/>
-                <a:ea typeface="Calibri" pitchFamily="34" charset="-122"/>
-                <a:cs typeface="Calibri" pitchFamily="34" charset="-120"/>
-              </a:rPr>
-              <a:t>8</a:t>
-            </a:r>
-            <a:endParaRPr lang="en-US" sz="1100" dirty="0"/>
-          </a:p>
-        </p:txBody>
-      </p:sp>
-      <p:sp>
-        <p:nvSpPr>
-          <p:cNvPr id="12" name="Pill"/>
-          <p:cNvSpPr/>
-          <p:nvPr/>
-        </p:nvSpPr>
-        <p:spPr>
-          <a:xfrm>
-            <a:off x="457200" y="411480"/>
-            <a:ext cx="2011680" cy="329184"/>
-          </a:xfrm>
-          <a:prstGeom prst="roundRect">
-            <a:avLst>
-              <a:gd name="adj" fmla="val 50000"/>
-            </a:avLst>
-          </a:prstGeom>
-          <a:solidFill>
-            <a:srgbClr val="1E2761"/>
-          </a:solidFill>
-          <a:ln/>
-        </p:spPr>
-        <p:txBody>
-          <a:bodyPr/>
-          <a:lstStyle/>
-          <a:p/>
-        </p:txBody>
-      </p:sp>
-      <p:sp>
-        <p:nvSpPr>
-          <p:cNvPr id="13" name="PillText"/>
-          <p:cNvSpPr/>
-          <p:nvPr/>
-        </p:nvSpPr>
-        <p:spPr>
-          <a:xfrm>
-            <a:off x="457200" y="411480"/>
-            <a:ext cx="2011680" cy="329184"/>
-          </a:xfrm>
-          <a:prstGeom prst="rect">
-            <a:avLst/>
-          </a:prstGeom>
-          <a:noFill/>
-          <a:ln/>
-        </p:spPr>
-        <p:txBody>
-          <a:bodyPr wrap="square" lIns="0" tIns="0" rIns="0" bIns="0" rtlCol="0" anchor="ctr"/>
-          <a:lstStyle/>
-          <a:p>
-            <a:pPr marL="0" indent="0" algn="ctr">
-              <a:buNone/>
-            </a:pPr>
-            <a:r>
-              <a:rPr lang="en-US" sz="1100" b="1" kern="0" spc="100" dirty="0">
-                <a:solidFill>
-                  <a:srgbClr val="FFFFFF"/>
-                </a:solidFill>
-                <a:latin typeface="Calibri" pitchFamily="34" charset="0"/>
-                <a:ea typeface="Calibri" pitchFamily="34" charset="-122"/>
-                <a:cs typeface="Calibri" pitchFamily="34" charset="-120"/>
-              </a:rPr>
-              <a:t>CONCEPT</a:t>
-            </a:r>
-            <a:endParaRPr lang="en-US" sz="1100" dirty="0"/>
-          </a:p>
-        </p:txBody>
-      </p:sp>
-      <p:sp>
-        <p:nvSpPr>
-          <p:cNvPr id="14" name="Circle"/>
-          <p:cNvSpPr/>
-          <p:nvPr/>
-        </p:nvSpPr>
-        <p:spPr>
-          <a:xfrm>
-            <a:off x="10771632" y="384048"/>
-            <a:ext cx="822960" cy="822960"/>
-          </a:xfrm>
-          <a:prstGeom prst="ellipse">
-            <a:avLst/>
-          </a:prstGeom>
-          <a:solidFill>
-            <a:srgbClr val="2A3B8F"/>
-          </a:solidFill>
-          <a:ln/>
-        </p:spPr>
-        <p:txBody>
-          <a:bodyPr/>
-          <a:lstStyle/>
-          <a:p/>
-        </p:txBody>
-      </p:sp>
-      <p:pic>
-        <p:nvPicPr>
-          <p:cNvPr id="15" name="Image" descr="icons/terminal.png"/>
-          <p:cNvPicPr>
-            <a:picLocks noChangeAspect="1"/>
-          </p:cNvPicPr>
-          <p:nvPr/>
-        </p:nvPicPr>
-        <p:blipFill>
-          <a:blip r:embed="rId2"/>
-          <a:stretch>
-            <a:fillRect/>
-          </a:stretch>
-        </p:blipFill>
-        <p:spPr>
-          <a:xfrm>
-            <a:off x="10963656" y="576072"/>
-            <a:ext cx="438912" cy="438912"/>
-          </a:xfrm>
-          <a:prstGeom prst="rect">
-            <a:avLst/>
-          </a:prstGeom>
-        </p:spPr>
-      </p:pic>
-      <p:sp>
-        <p:nvSpPr>
-          <p:cNvPr id="16" name="Title"/>
-          <p:cNvSpPr/>
-          <p:nvPr/>
-        </p:nvSpPr>
-        <p:spPr>
-          <a:xfrm>
-            <a:off x="457200" y="896112"/>
-            <a:ext cx="11274552" cy="822960"/>
-          </a:xfrm>
-          <a:prstGeom prst="rect">
-            <a:avLst/>
-          </a:prstGeom>
-          <a:noFill/>
-          <a:ln/>
-        </p:spPr>
-        <p:txBody>
-          <a:bodyPr wrap="square" lIns="0" tIns="0" rIns="0" bIns="0" rtlCol="0" anchor="t"/>
-          <a:lstStyle/>
-          <a:p>
-            <a:pPr marL="0" indent="0" algn="l">
-              <a:buNone/>
-            </a:pPr>
-            <a:r>
-              <a:rPr lang="en-US" sz="3200" b="1" dirty="0">
-                <a:solidFill>
-                  <a:srgbClr val="1E2761"/>
-                </a:solidFill>
-                <a:latin typeface="Cambria" pitchFamily="34" charset="0"/>
-                <a:ea typeface="Cambria" pitchFamily="34" charset="-122"/>
-                <a:cs typeface="Cambria" pitchFamily="34" charset="-120"/>
-              </a:rPr>
-              <a:t>Tell Git Who You Are</a:t>
-            </a:r>
-            <a:endParaRPr lang="en-US" sz="3200" dirty="0"/>
-          </a:p>
-        </p:txBody>
-      </p:sp>
-      <p:sp>
-        <p:nvSpPr>
-          <p:cNvPr id="17" name="Badge"/>
-          <p:cNvSpPr/>
-          <p:nvPr/>
-        </p:nvSpPr>
-        <p:spPr>
-          <a:xfrm>
-            <a:off x="822960" y="2103120"/>
-            <a:ext cx="384048" cy="384048"/>
-          </a:xfrm>
-          <a:prstGeom prst="ellipse">
-            <a:avLst/>
-          </a:prstGeom>
-          <a:solidFill>
-            <a:srgbClr val="F96167"/>
-          </a:solidFill>
-          <a:ln/>
-        </p:spPr>
-        <p:txBody>
-          <a:bodyPr/>
-          <a:lstStyle/>
-          <a:p/>
-        </p:txBody>
-      </p:sp>
-      <p:sp>
-        <p:nvSpPr>
-          <p:cNvPr id="18" name="BadgeNum"/>
-          <p:cNvSpPr/>
-          <p:nvPr/>
-        </p:nvSpPr>
-        <p:spPr>
-          <a:xfrm>
-            <a:off x="822960" y="2103120"/>
-            <a:ext cx="384048" cy="384048"/>
-          </a:xfrm>
-          <a:prstGeom prst="rect">
-            <a:avLst/>
-          </a:prstGeom>
-          <a:noFill/>
-          <a:ln/>
-        </p:spPr>
-        <p:txBody>
-          <a:bodyPr wrap="square" lIns="0" tIns="0" rIns="0" bIns="0" rtlCol="0" anchor="ctr"/>
-          <a:lstStyle/>
-          <a:p>
-            <a:pPr marL="0" indent="0" algn="ctr">
-              <a:buNone/>
-            </a:pPr>
-            <a:r>
-              <a:rPr lang="en-US" sz="1400" dirty="0">
-                <a:solidFill>
-                  <a:srgbClr val="FFFFFF"/>
-                </a:solidFill>
-                <a:latin typeface="Calibri" pitchFamily="34" charset="0"/>
-                <a:ea typeface="Calibri" pitchFamily="34" charset="-122"/>
-                <a:cs typeface="Calibri" pitchFamily="34" charset="-120"/>
-              </a:rPr>
-              <a:t>1</a:t>
-            </a:r>
-            <a:endParaRPr lang="en-US" sz="1400" dirty="0"/>
-          </a:p>
-        </p:txBody>
-      </p:sp>
-      <p:sp>
-        <p:nvSpPr>
-          <p:cNvPr id="19" name="StepText"/>
-          <p:cNvSpPr/>
-          <p:nvPr/>
-        </p:nvSpPr>
-        <p:spPr>
-          <a:xfrm>
-            <a:off x="1371600" y="2075688"/>
-            <a:ext cx="9966960" cy="566928"/>
-          </a:xfrm>
-          <a:prstGeom prst="rect">
-            <a:avLst/>
-          </a:prstGeom>
-          <a:noFill/>
-          <a:ln/>
-        </p:spPr>
-        <p:txBody>
-          <a:bodyPr wrap="square" lIns="0" tIns="0" rIns="0" bIns="0" rtlCol="0" anchor="ctr"/>
-          <a:lstStyle/>
-          <a:p>
-            <a:pPr marL="0" indent="0" algn="l">
-              <a:buNone/>
-            </a:pPr>
-            <a:r>
-              <a:rPr lang="en-US" sz="1550" dirty="0">
-                <a:solidFill>
-                  <a:srgbClr val="1E2761"/>
-                </a:solidFill>
-                <a:latin typeface="Calibri" pitchFamily="34" charset="0"/>
-                <a:ea typeface="Calibri" pitchFamily="34" charset="-122"/>
-                <a:cs typeface="Calibri" pitchFamily="34" charset="-120"/>
-              </a:rPr>
-              <a:t>Git records who made each commit — so it needs your name and email before you can commit anything</a:t>
-            </a:r>
-            <a:endParaRPr lang="en-US" sz="1550" dirty="0"/>
-          </a:p>
-        </p:txBody>
-      </p:sp>
-      <p:sp>
-        <p:nvSpPr>
-          <p:cNvPr id="20" name="Badge"/>
-          <p:cNvSpPr/>
-          <p:nvPr/>
-        </p:nvSpPr>
-        <p:spPr>
-          <a:xfrm>
-            <a:off x="822960" y="2724912"/>
-            <a:ext cx="384048" cy="384048"/>
-          </a:xfrm>
-          <a:prstGeom prst="ellipse">
-            <a:avLst/>
-          </a:prstGeom>
-          <a:solidFill>
-            <a:srgbClr val="F96167"/>
-          </a:solidFill>
-          <a:ln/>
-        </p:spPr>
-        <p:txBody>
-          <a:bodyPr/>
-          <a:lstStyle/>
-          <a:p/>
-        </p:txBody>
-      </p:sp>
-      <p:sp>
-        <p:nvSpPr>
-          <p:cNvPr id="21" name="BadgeNum"/>
-          <p:cNvSpPr/>
-          <p:nvPr/>
-        </p:nvSpPr>
-        <p:spPr>
-          <a:xfrm>
-            <a:off x="822960" y="2724912"/>
-            <a:ext cx="384048" cy="384048"/>
-          </a:xfrm>
-          <a:prstGeom prst="rect">
-            <a:avLst/>
-          </a:prstGeom>
-          <a:noFill/>
-          <a:ln/>
-        </p:spPr>
-        <p:txBody>
-          <a:bodyPr wrap="square" lIns="0" tIns="0" rIns="0" bIns="0" rtlCol="0" anchor="ctr"/>
-          <a:lstStyle/>
-          <a:p>
-            <a:pPr marL="0" indent="0" algn="ctr">
-              <a:buNone/>
-            </a:pPr>
-            <a:r>
-              <a:rPr lang="en-US" sz="1400" dirty="0">
-                <a:solidFill>
-                  <a:srgbClr val="FFFFFF"/>
-                </a:solidFill>
-                <a:latin typeface="Calibri" pitchFamily="34" charset="0"/>
-                <a:ea typeface="Calibri" pitchFamily="34" charset="-122"/>
-                <a:cs typeface="Calibri" pitchFamily="34" charset="-120"/>
-              </a:rPr>
-              <a:t>2</a:t>
-            </a:r>
-            <a:endParaRPr lang="en-US" sz="1400" dirty="0"/>
-          </a:p>
-        </p:txBody>
-      </p:sp>
-      <p:sp>
-        <p:nvSpPr>
-          <p:cNvPr id="22" name="StepText"/>
-          <p:cNvSpPr/>
-          <p:nvPr/>
-        </p:nvSpPr>
-        <p:spPr>
-          <a:xfrm>
-            <a:off x="1371600" y="2697480"/>
-            <a:ext cx="9966960" cy="566928"/>
-          </a:xfrm>
-          <a:prstGeom prst="rect">
-            <a:avLst/>
-          </a:prstGeom>
-          <a:noFill/>
-          <a:ln/>
-        </p:spPr>
-        <p:txBody>
-          <a:bodyPr wrap="square" lIns="0" tIns="0" rIns="0" bIns="0" rtlCol="0" anchor="ctr"/>
-          <a:lstStyle/>
-          <a:p>
-            <a:pPr marL="0" indent="0" algn="l">
-              <a:buNone/>
-            </a:pPr>
-            <a:r>
-              <a:rPr lang="en-US" sz="1550" dirty="0">
-                <a:solidFill>
-                  <a:srgbClr val="1E2761"/>
-                </a:solidFill>
-                <a:latin typeface="Calibri" pitchFamily="34" charset="0"/>
-                <a:ea typeface="Calibri" pitchFamily="34" charset="-122"/>
-                <a:cs typeface="Calibri" pitchFamily="34" charset="-120"/>
-              </a:rPr>
-              <a:t>In Git Bash (Windows) or Terminal (Mac), run:   git config --global user.name "Your Name"</a:t>
-            </a:r>
-            <a:endParaRPr lang="en-US" sz="1550" dirty="0"/>
-          </a:p>
-        </p:txBody>
-      </p:sp>
-      <p:sp>
-        <p:nvSpPr>
-          <p:cNvPr id="23" name="Badge"/>
-          <p:cNvSpPr/>
-          <p:nvPr/>
-        </p:nvSpPr>
-        <p:spPr>
-          <a:xfrm>
-            <a:off x="822960" y="3346704"/>
-            <a:ext cx="384048" cy="384048"/>
-          </a:xfrm>
-          <a:prstGeom prst="ellipse">
-            <a:avLst/>
-          </a:prstGeom>
-          <a:solidFill>
-            <a:srgbClr val="F96167"/>
-          </a:solidFill>
-          <a:ln/>
-        </p:spPr>
-        <p:txBody>
-          <a:bodyPr/>
-          <a:lstStyle/>
-          <a:p/>
-        </p:txBody>
-      </p:sp>
-      <p:sp>
-        <p:nvSpPr>
-          <p:cNvPr id="24" name="BadgeNum"/>
-          <p:cNvSpPr/>
-          <p:nvPr/>
-        </p:nvSpPr>
-        <p:spPr>
-          <a:xfrm>
-            <a:off x="822960" y="3346704"/>
-            <a:ext cx="384048" cy="384048"/>
-          </a:xfrm>
-          <a:prstGeom prst="rect">
-            <a:avLst/>
-          </a:prstGeom>
-          <a:noFill/>
-          <a:ln/>
-        </p:spPr>
-        <p:txBody>
-          <a:bodyPr wrap="square" lIns="0" tIns="0" rIns="0" bIns="0" rtlCol="0" anchor="ctr"/>
-          <a:lstStyle/>
-          <a:p>
-            <a:pPr marL="0" indent="0" algn="ctr">
-              <a:buNone/>
-            </a:pPr>
-            <a:r>
-              <a:rPr lang="en-US" sz="1400" dirty="0">
-                <a:solidFill>
-                  <a:srgbClr val="FFFFFF"/>
-                </a:solidFill>
-                <a:latin typeface="Calibri" pitchFamily="34" charset="0"/>
-                <a:ea typeface="Calibri" pitchFamily="34" charset="-122"/>
-                <a:cs typeface="Calibri" pitchFamily="34" charset="-120"/>
-              </a:rPr>
-              <a:t>3</a:t>
-            </a:r>
-            <a:endParaRPr lang="en-US" sz="1400" dirty="0"/>
-          </a:p>
-        </p:txBody>
-      </p:sp>
-      <p:sp>
-        <p:nvSpPr>
-          <p:cNvPr id="25" name="StepText"/>
-          <p:cNvSpPr/>
-          <p:nvPr/>
-        </p:nvSpPr>
-        <p:spPr>
-          <a:xfrm>
-            <a:off x="1371600" y="3319272"/>
-            <a:ext cx="9966960" cy="566928"/>
-          </a:xfrm>
-          <a:prstGeom prst="rect">
-            <a:avLst/>
-          </a:prstGeom>
-          <a:noFill/>
-          <a:ln/>
-        </p:spPr>
-        <p:txBody>
-          <a:bodyPr wrap="square" lIns="0" tIns="0" rIns="0" bIns="0" rtlCol="0" anchor="ctr"/>
-          <a:lstStyle/>
-          <a:p>
-            <a:pPr marL="0" indent="0" algn="l">
-              <a:buNone/>
-            </a:pPr>
-            <a:r>
-              <a:rPr lang="en-US" sz="1550" dirty="0">
-                <a:solidFill>
-                  <a:srgbClr val="1E2761"/>
-                </a:solidFill>
-                <a:latin typeface="Calibri" pitchFamily="34" charset="0"/>
-                <a:ea typeface="Calibri" pitchFamily="34" charset="-122"/>
-                <a:cs typeface="Calibri" pitchFamily="34" charset="-120"/>
-              </a:rPr>
-              <a:t>Then run:   git config --global user.email "your.email@example.com"</a:t>
-            </a:r>
-            <a:endParaRPr lang="en-US" sz="1550" dirty="0"/>
-          </a:p>
-        </p:txBody>
-      </p:sp>
-      <p:sp>
-        <p:nvSpPr>
-          <p:cNvPr id="26" name="Badge"/>
-          <p:cNvSpPr/>
-          <p:nvPr/>
-        </p:nvSpPr>
-        <p:spPr>
-          <a:xfrm>
-            <a:off x="822960" y="3968496"/>
-            <a:ext cx="384048" cy="384048"/>
-          </a:xfrm>
-          <a:prstGeom prst="ellipse">
-            <a:avLst/>
-          </a:prstGeom>
-          <a:solidFill>
-            <a:srgbClr val="F96167"/>
-          </a:solidFill>
-          <a:ln/>
-        </p:spPr>
-        <p:txBody>
-          <a:bodyPr/>
-          <a:lstStyle/>
-          <a:p/>
-        </p:txBody>
-      </p:sp>
-      <p:sp>
-        <p:nvSpPr>
-          <p:cNvPr id="27" name="BadgeNum"/>
-          <p:cNvSpPr/>
-          <p:nvPr/>
-        </p:nvSpPr>
-        <p:spPr>
-          <a:xfrm>
-            <a:off x="822960" y="3968496"/>
-            <a:ext cx="384048" cy="384048"/>
-          </a:xfrm>
-          <a:prstGeom prst="rect">
-            <a:avLst/>
-          </a:prstGeom>
-          <a:noFill/>
-          <a:ln/>
-        </p:spPr>
-        <p:txBody>
-          <a:bodyPr wrap="square" lIns="0" tIns="0" rIns="0" bIns="0" rtlCol="0" anchor="ctr"/>
-          <a:lstStyle/>
-          <a:p>
-            <a:pPr marL="0" indent="0" algn="ctr">
-              <a:buNone/>
-            </a:pPr>
-            <a:r>
-              <a:rPr lang="en-US" sz="1400" dirty="0">
-                <a:solidFill>
-                  <a:srgbClr val="FFFFFF"/>
-                </a:solidFill>
-                <a:latin typeface="Calibri" pitchFamily="34" charset="0"/>
-                <a:ea typeface="Calibri" pitchFamily="34" charset="-122"/>
-                <a:cs typeface="Calibri" pitchFamily="34" charset="-120"/>
-              </a:rPr>
-              <a:t>4</a:t>
-            </a:r>
-            <a:endParaRPr lang="en-US" sz="1400" dirty="0"/>
-          </a:p>
-        </p:txBody>
-      </p:sp>
-      <p:sp>
-        <p:nvSpPr>
-          <p:cNvPr id="28" name="StepText"/>
-          <p:cNvSpPr/>
-          <p:nvPr/>
-        </p:nvSpPr>
-        <p:spPr>
-          <a:xfrm>
-            <a:off x="1371600" y="3941064"/>
-            <a:ext cx="9966960" cy="566928"/>
-          </a:xfrm>
-          <a:prstGeom prst="rect">
-            <a:avLst/>
-          </a:prstGeom>
-          <a:noFill/>
-          <a:ln/>
-        </p:spPr>
-        <p:txBody>
-          <a:bodyPr wrap="square" lIns="0" tIns="0" rIns="0" bIns="0" rtlCol="0" anchor="ctr"/>
-          <a:lstStyle/>
-          <a:p>
-            <a:pPr marL="0" indent="0" algn="l">
-              <a:buNone/>
-            </a:pPr>
-            <a:r>
-              <a:rPr lang="en-US" sz="1550" dirty="0">
-                <a:solidFill>
-                  <a:srgbClr val="1E2761"/>
-                </a:solidFill>
-                <a:latin typeface="Calibri" pitchFamily="34" charset="0"/>
-                <a:ea typeface="Calibri" pitchFamily="34" charset="-122"/>
-                <a:cs typeface="Calibri" pitchFamily="34" charset="-120"/>
-              </a:rPr>
-              <a:t>Check it worked:   git config --global --list</a:t>
-            </a:r>
-            <a:endParaRPr lang="en-US" sz="1550" dirty="0"/>
-          </a:p>
-        </p:txBody>
-      </p:sp>
-      <p:sp>
-        <p:nvSpPr>
-          <p:cNvPr id="29" name="TipBox"/>
-          <p:cNvSpPr/>
-          <p:nvPr/>
-        </p:nvSpPr>
-        <p:spPr>
-          <a:xfrm>
-            <a:off x="822960" y="5394960"/>
-            <a:ext cx="10543032" cy="640080"/>
-          </a:xfrm>
-          <a:prstGeom prst="roundRect">
-            <a:avLst>
-              <a:gd name="adj" fmla="val 11429"/>
-            </a:avLst>
-          </a:prstGeom>
-          <a:solidFill>
-            <a:srgbClr val="F1F4FB"/>
-          </a:solidFill>
-          <a:ln w="12700">
-            <a:solidFill>
-              <a:srgbClr val="F96167"/>
-            </a:solidFill>
-            <a:prstDash val="solid"/>
-          </a:ln>
-        </p:spPr>
-        <p:txBody>
-          <a:bodyPr/>
-          <a:lstStyle/>
-          <a:p/>
-        </p:txBody>
-      </p:sp>
-      <p:sp>
-        <p:nvSpPr>
-          <p:cNvPr id="30" name="TipText"/>
-          <p:cNvSpPr/>
-          <p:nvPr/>
-        </p:nvSpPr>
-        <p:spPr>
-          <a:xfrm>
-            <a:off x="1051560" y="5394960"/>
-            <a:ext cx="10085832" cy="640080"/>
-          </a:xfrm>
-          <a:prstGeom prst="rect">
-            <a:avLst/>
-          </a:prstGeom>
-          <a:noFill/>
-          <a:ln/>
-        </p:spPr>
-        <p:txBody>
-          <a:bodyPr wrap="square" lIns="0" tIns="0" rIns="0" bIns="0" rtlCol="0" anchor="ctr"/>
-          <a:lstStyle/>
-          <a:p>
-            <a:pPr marL="0" indent="0" algn="l">
-              <a:buNone/>
-            </a:pPr>
-            <a:r>
-              <a:rPr lang="en-US" sz="1350" b="1" i="1" dirty="0">
-                <a:solidFill>
-                  <a:srgbClr val="1E2761"/>
-                </a:solidFill>
-                <a:latin typeface="Calibri" pitchFamily="34" charset="0"/>
-                <a:ea typeface="Calibri" pitchFamily="34" charset="-122"/>
-                <a:cs typeface="Calibri" pitchFamily="34" charset="-120"/>
-              </a:rPr>
-              <a:t>Use the email you'll use for GitHub</a:t>
-            </a:r>
-            <a:r>
-              <a:rPr lang="en-US" sz="1350" i="1" dirty="0">
-                <a:solidFill>
-                  <a:srgbClr val="1E2761"/>
-                </a:solidFill>
-                <a:latin typeface="Calibri" pitchFamily="34" charset="0"/>
-                <a:ea typeface="Calibri" pitchFamily="34" charset="-122"/>
-                <a:cs typeface="Calibri" pitchFamily="34" charset="-120"/>
-              </a:rPr>
-              <a:t> — in part 2 it links your commits to your account. And --global means once per computer, not once per week.</a:t>
-            </a:r>
-            <a:endParaRPr lang="en-US" sz="1350" dirty="0"/>
-          </a:p>
-        </p:txBody>
-      </p:sp>
     </p:spTree>
   </p:cSld>
   <p:clrMapOvr>
@@ -11631,7 +12876,7 @@
               <a:buNone/>
             </a:pPr>
             <a:r>
-              <a:rPr lang="en-US" sz="1350" b="1" i="1" dirty="0">
+              <a:rPr lang="en-US" sz="1600" b="1" i="1" dirty="0">
                 <a:solidFill>
                   <a:srgbClr val="1E2761"/>
                 </a:solidFill>
@@ -11642,7 +12887,7 @@
               <a:t>Goal for today</a:t>
             </a:r>
             <a:r>
-              <a:rPr lang="en-US" sz="1350" i="1" dirty="0">
+              <a:rPr lang="en-US" sz="1600" i="1" dirty="0">
                 <a:solidFill>
                   <a:srgbClr val="1E2761"/>
                 </a:solidFill>
@@ -11652,7 +12897,7 @@
               </a:rPr>
               <a:t>: commit after every exercise becomes second nature — something you do without thinking, from week 3 onward.</a:t>
             </a:r>
-            <a:endParaRPr lang="en-US" sz="1350" dirty="0"/>
+            <a:endParaRPr lang="en-US" sz="1600" dirty="0"/>
           </a:p>
         </p:txBody>
       </p:sp>
@@ -11967,33 +13212,48 @@
             <a:endParaRPr lang="en-US" sz="1600" dirty="0"/>
           </a:p>
           <a:p>
+            <a:pPr marL="342900" indent="-342900">
+              <a:spcAft>
+                <a:spcPts val="1400"/>
+              </a:spcAft>
+              <a:buAutoNum type="arabicPeriod" startAt="4"/>
+            </a:pPr>
+            <a:r>
+              <a:rPr lang="en-US" sz="1600" dirty="0">
+                <a:solidFill>
+                  <a:srgbClr val="1E2761"/>
+                </a:solidFill>
+                <a:latin typeface="Calibri" pitchFamily="34" charset="0"/>
+                <a:ea typeface="Calibri" pitchFamily="34" charset="-122"/>
+                <a:cs typeface="Calibri" pitchFamily="34" charset="-120"/>
+              </a:rPr>
+              <a:t>Git is now watching this folder. It does this by creating a hidden .git folder inside week02 – you won’t see it by default, since it’s hidden</a:t>
+            </a:r>
+          </a:p>
+          <a:p>
+            <a:pPr marL="342900" indent="-342900">
+              <a:spcAft>
+                <a:spcPts val="1400"/>
+              </a:spcAft>
+              <a:buAutoNum type="arabicPeriod" startAt="4"/>
+            </a:pPr>
+            <a:endParaRPr lang="en-US" sz="400" dirty="0">
+              <a:solidFill>
+                <a:srgbClr val="1E2761"/>
+              </a:solidFill>
+              <a:latin typeface="Calibri" pitchFamily="34" charset="0"/>
+              <a:ea typeface="Calibri" pitchFamily="34" charset="-122"/>
+              <a:cs typeface="Calibri" pitchFamily="34" charset="-120"/>
+            </a:endParaRPr>
+          </a:p>
+          <a:p>
             <a:pPr>
               <a:spcAft>
                 <a:spcPts val="1400"/>
               </a:spcAft>
             </a:pPr>
             <a:r>
-              <a:rPr lang="en-US" sz="1600" dirty="0">
-                <a:solidFill>
-                  <a:srgbClr val="1E2761"/>
-                </a:solidFill>
-                <a:latin typeface="Calibri" pitchFamily="34" charset="0"/>
-                <a:ea typeface="Calibri" pitchFamily="34" charset="-122"/>
-                <a:cs typeface="Calibri" pitchFamily="34" charset="-120"/>
-              </a:rPr>
-              <a:t>4.  Git is now watching this folder. It does this by creating a hidden .git folder inside week02 – you won’t see it by default, since it’s hidden</a:t>
-            </a:r>
-          </a:p>
-          <a:p>
-            <a:pPr marL="285750" indent="-285750">
-              <a:spcAft>
-                <a:spcPts val="1400"/>
-              </a:spcAft>
-              <a:buFont typeface="Wingdings" panose="05000000000000000000" pitchFamily="2" charset="2"/>
-              <a:buChar char="Ø"/>
-            </a:pPr>
-            <a:r>
-              <a:rPr lang="en-US" sz="1600" dirty="0">
+              <a:rPr lang="en-US" sz="1600" b="1" dirty="0">
                 <a:solidFill>
                   <a:srgbClr val="1E2761"/>
                 </a:solidFill>
@@ -12017,7 +13277,7 @@
         </p:nvSpPr>
         <p:spPr>
           <a:xfrm>
-            <a:off x="822960" y="4256600"/>
+            <a:off x="822960" y="4425279"/>
             <a:ext cx="5088636" cy="1302150"/>
           </a:xfrm>
           <a:prstGeom prst="roundRect">
@@ -12052,7 +13312,7 @@
         </p:nvSpPr>
         <p:spPr>
           <a:xfrm>
-            <a:off x="1051560" y="4415750"/>
+            <a:off x="1051560" y="4584429"/>
             <a:ext cx="4631436" cy="930107"/>
           </a:xfrm>
           <a:prstGeom prst="rect">
@@ -12120,7 +13380,7 @@
         </p:nvSpPr>
         <p:spPr>
           <a:xfrm>
-            <a:off x="6277356" y="4256600"/>
+            <a:off x="6277356" y="4425279"/>
             <a:ext cx="5088636" cy="1302150"/>
           </a:xfrm>
           <a:prstGeom prst="roundRect">
@@ -12155,7 +13415,7 @@
         </p:nvSpPr>
         <p:spPr>
           <a:xfrm>
-            <a:off x="6505956" y="4415750"/>
+            <a:off x="6505956" y="4584429"/>
             <a:ext cx="4631436" cy="930107"/>
           </a:xfrm>
           <a:prstGeom prst="rect">
@@ -12240,6 +13500,1599 @@
 </file>
 
 <file path=ppt/slides/slide7.xml><?xml version="1.0" encoding="utf-8"?>
+<p:sld xmlns:a="http://schemas.openxmlformats.org/drawingml/2006/main" xmlns:r="http://schemas.openxmlformats.org/officeDocument/2006/relationships" xmlns:p="http://schemas.openxmlformats.org/presentationml/2006/main">
+  <p:cSld>
+    <p:bg>
+      <p:bgPr>
+        <a:solidFill>
+          <a:srgbClr val="FFFFFF"/>
+        </a:solidFill>
+        <a:effectLst/>
+      </p:bgPr>
+    </p:bg>
+    <p:spTree>
+      <p:nvGrpSpPr>
+        <p:cNvPr id="1" name=""/>
+        <p:cNvGrpSpPr/>
+        <p:nvPr/>
+      </p:nvGrpSpPr>
+      <p:grpSpPr>
+        <a:xfrm>
+          <a:off x="0" y="0"/>
+          <a:ext cx="0" cy="0"/>
+          <a:chOff x="0" y="0"/>
+          <a:chExt cx="0" cy="0"/>
+        </a:xfrm>
+      </p:grpSpPr>
+      <p:sp>
+        <p:nvSpPr>
+          <p:cNvPr id="11" name="SlideNumber"/>
+          <p:cNvSpPr/>
+          <p:nvPr/>
+        </p:nvSpPr>
+        <p:spPr>
+          <a:xfrm>
+            <a:off x="11274552" y="6492240"/>
+            <a:ext cx="457200" cy="274320"/>
+          </a:xfrm>
+          <a:prstGeom prst="rect">
+            <a:avLst/>
+          </a:prstGeom>
+          <a:noFill/>
+          <a:ln/>
+        </p:spPr>
+        <p:txBody>
+          <a:bodyPr wrap="square" lIns="0" tIns="0" rIns="0" bIns="0" rtlCol="0" anchor="ctr"/>
+          <a:lstStyle/>
+          <a:p>
+            <a:pPr marL="0" indent="0" algn="r">
+              <a:buNone/>
+            </a:pPr>
+            <a:r>
+              <a:rPr lang="en-US" sz="1100" dirty="0">
+                <a:solidFill>
+                  <a:srgbClr val="5B6472"/>
+                </a:solidFill>
+                <a:latin typeface="Calibri" pitchFamily="34" charset="0"/>
+                <a:ea typeface="Calibri" pitchFamily="34" charset="-122"/>
+                <a:cs typeface="Calibri" pitchFamily="34" charset="-120"/>
+              </a:rPr>
+              <a:t>7</a:t>
+            </a:r>
+            <a:endParaRPr lang="en-US" sz="1100" dirty="0"/>
+          </a:p>
+        </p:txBody>
+      </p:sp>
+      <p:sp>
+        <p:nvSpPr>
+          <p:cNvPr id="12" name="Pill"/>
+          <p:cNvSpPr/>
+          <p:nvPr/>
+        </p:nvSpPr>
+        <p:spPr>
+          <a:xfrm>
+            <a:off x="457200" y="411480"/>
+            <a:ext cx="2011680" cy="329184"/>
+          </a:xfrm>
+          <a:prstGeom prst="roundRect">
+            <a:avLst>
+              <a:gd name="adj" fmla="val 50000"/>
+            </a:avLst>
+          </a:prstGeom>
+          <a:solidFill>
+            <a:srgbClr val="1E2761"/>
+          </a:solidFill>
+          <a:ln/>
+        </p:spPr>
+        <p:txBody>
+          <a:bodyPr/>
+          <a:lstStyle/>
+          <a:p>
+            <a:endParaRPr/>
+          </a:p>
+        </p:txBody>
+      </p:sp>
+      <p:sp>
+        <p:nvSpPr>
+          <p:cNvPr id="13" name="PillText"/>
+          <p:cNvSpPr/>
+          <p:nvPr/>
+        </p:nvSpPr>
+        <p:spPr>
+          <a:xfrm>
+            <a:off x="457200" y="411480"/>
+            <a:ext cx="2011680" cy="329184"/>
+          </a:xfrm>
+          <a:prstGeom prst="rect">
+            <a:avLst/>
+          </a:prstGeom>
+          <a:noFill/>
+          <a:ln/>
+        </p:spPr>
+        <p:txBody>
+          <a:bodyPr wrap="square" lIns="0" tIns="0" rIns="0" bIns="0" rtlCol="0" anchor="ctr"/>
+          <a:lstStyle/>
+          <a:p>
+            <a:pPr marL="0" indent="0" algn="ctr">
+              <a:buNone/>
+            </a:pPr>
+            <a:r>
+              <a:rPr lang="en-US" sz="1100" b="1" kern="0" spc="100" dirty="0">
+                <a:solidFill>
+                  <a:srgbClr val="FFFFFF"/>
+                </a:solidFill>
+                <a:latin typeface="Calibri" pitchFamily="34" charset="0"/>
+                <a:ea typeface="Calibri" pitchFamily="34" charset="-122"/>
+                <a:cs typeface="Calibri" pitchFamily="34" charset="-120"/>
+              </a:rPr>
+              <a:t>CONCEPT</a:t>
+            </a:r>
+            <a:endParaRPr lang="en-US" sz="1100" dirty="0"/>
+          </a:p>
+        </p:txBody>
+      </p:sp>
+      <p:sp>
+        <p:nvSpPr>
+          <p:cNvPr id="14" name="Circle"/>
+          <p:cNvSpPr/>
+          <p:nvPr/>
+        </p:nvSpPr>
+        <p:spPr>
+          <a:xfrm>
+            <a:off x="10771632" y="384048"/>
+            <a:ext cx="822960" cy="822960"/>
+          </a:xfrm>
+          <a:prstGeom prst="ellipse">
+            <a:avLst/>
+          </a:prstGeom>
+          <a:solidFill>
+            <a:srgbClr val="2A3B8F"/>
+          </a:solidFill>
+          <a:ln/>
+        </p:spPr>
+        <p:txBody>
+          <a:bodyPr/>
+          <a:lstStyle/>
+          <a:p>
+            <a:endParaRPr/>
+          </a:p>
+        </p:txBody>
+      </p:sp>
+      <p:pic>
+        <p:nvPicPr>
+          <p:cNvPr id="15" name="Image" descr="icons/terminal.png"/>
+          <p:cNvPicPr>
+            <a:picLocks noChangeAspect="1"/>
+          </p:cNvPicPr>
+          <p:nvPr/>
+        </p:nvPicPr>
+        <p:blipFill>
+          <a:blip r:embed="rId2"/>
+          <a:stretch>
+            <a:fillRect/>
+          </a:stretch>
+        </p:blipFill>
+        <p:spPr>
+          <a:xfrm>
+            <a:off x="10963656" y="576072"/>
+            <a:ext cx="438912" cy="438912"/>
+          </a:xfrm>
+          <a:prstGeom prst="rect">
+            <a:avLst/>
+          </a:prstGeom>
+        </p:spPr>
+      </p:pic>
+      <p:sp>
+        <p:nvSpPr>
+          <p:cNvPr id="16" name="Title"/>
+          <p:cNvSpPr/>
+          <p:nvPr/>
+        </p:nvSpPr>
+        <p:spPr>
+          <a:xfrm>
+            <a:off x="457200" y="896112"/>
+            <a:ext cx="11274552" cy="822960"/>
+          </a:xfrm>
+          <a:prstGeom prst="rect">
+            <a:avLst/>
+          </a:prstGeom>
+          <a:noFill/>
+          <a:ln/>
+        </p:spPr>
+        <p:txBody>
+          <a:bodyPr wrap="square" lIns="0" tIns="0" rIns="0" bIns="0" rtlCol="0" anchor="t"/>
+          <a:lstStyle/>
+          <a:p>
+            <a:pPr marL="0" indent="0" algn="l">
+              <a:buNone/>
+            </a:pPr>
+            <a:r>
+              <a:rPr lang="en-US" sz="3200" b="1" dirty="0">
+                <a:solidFill>
+                  <a:srgbClr val="1E2761"/>
+                </a:solidFill>
+                <a:latin typeface="Cambria" pitchFamily="34" charset="0"/>
+                <a:ea typeface="Cambria" pitchFamily="34" charset="-122"/>
+                <a:cs typeface="Cambria" pitchFamily="34" charset="-120"/>
+              </a:rPr>
+              <a:t>Tell Git Who You Are</a:t>
+            </a:r>
+            <a:endParaRPr lang="en-US" sz="3200" dirty="0"/>
+          </a:p>
+        </p:txBody>
+      </p:sp>
+      <p:sp>
+        <p:nvSpPr>
+          <p:cNvPr id="17" name="Badge"/>
+          <p:cNvSpPr/>
+          <p:nvPr/>
+        </p:nvSpPr>
+        <p:spPr>
+          <a:xfrm>
+            <a:off x="822960" y="2103120"/>
+            <a:ext cx="384048" cy="384048"/>
+          </a:xfrm>
+          <a:prstGeom prst="ellipse">
+            <a:avLst/>
+          </a:prstGeom>
+          <a:solidFill>
+            <a:srgbClr val="F96167"/>
+          </a:solidFill>
+          <a:ln/>
+        </p:spPr>
+        <p:txBody>
+          <a:bodyPr/>
+          <a:lstStyle/>
+          <a:p>
+            <a:endParaRPr/>
+          </a:p>
+        </p:txBody>
+      </p:sp>
+      <p:sp>
+        <p:nvSpPr>
+          <p:cNvPr id="18" name="BadgeNum"/>
+          <p:cNvSpPr/>
+          <p:nvPr/>
+        </p:nvSpPr>
+        <p:spPr>
+          <a:xfrm>
+            <a:off x="822960" y="2103120"/>
+            <a:ext cx="384048" cy="384048"/>
+          </a:xfrm>
+          <a:prstGeom prst="rect">
+            <a:avLst/>
+          </a:prstGeom>
+          <a:noFill/>
+          <a:ln/>
+        </p:spPr>
+        <p:txBody>
+          <a:bodyPr wrap="square" lIns="0" tIns="0" rIns="0" bIns="0" rtlCol="0" anchor="ctr"/>
+          <a:lstStyle/>
+          <a:p>
+            <a:pPr marL="0" indent="0" algn="ctr">
+              <a:buNone/>
+            </a:pPr>
+            <a:r>
+              <a:rPr lang="en-US" sz="1400" dirty="0">
+                <a:solidFill>
+                  <a:srgbClr val="FFFFFF"/>
+                </a:solidFill>
+                <a:latin typeface="Calibri" pitchFamily="34" charset="0"/>
+                <a:ea typeface="Calibri" pitchFamily="34" charset="-122"/>
+                <a:cs typeface="Calibri" pitchFamily="34" charset="-120"/>
+              </a:rPr>
+              <a:t>1</a:t>
+            </a:r>
+            <a:endParaRPr lang="en-US" sz="1400" dirty="0"/>
+          </a:p>
+        </p:txBody>
+      </p:sp>
+      <p:sp>
+        <p:nvSpPr>
+          <p:cNvPr id="19" name="StepText"/>
+          <p:cNvSpPr/>
+          <p:nvPr/>
+        </p:nvSpPr>
+        <p:spPr>
+          <a:xfrm>
+            <a:off x="1371600" y="2075688"/>
+            <a:ext cx="9966960" cy="566928"/>
+          </a:xfrm>
+          <a:prstGeom prst="rect">
+            <a:avLst/>
+          </a:prstGeom>
+          <a:noFill/>
+          <a:ln/>
+        </p:spPr>
+        <p:txBody>
+          <a:bodyPr wrap="square" lIns="0" tIns="0" rIns="0" bIns="0" rtlCol="0" anchor="ctr"/>
+          <a:lstStyle/>
+          <a:p>
+            <a:pPr marL="0" indent="0" algn="l">
+              <a:buNone/>
+            </a:pPr>
+            <a:r>
+              <a:rPr lang="en-US" sz="1600" dirty="0">
+                <a:solidFill>
+                  <a:srgbClr val="1E2761"/>
+                </a:solidFill>
+                <a:latin typeface="Calibri" pitchFamily="34" charset="0"/>
+                <a:ea typeface="Calibri" pitchFamily="34" charset="-122"/>
+                <a:cs typeface="Calibri" pitchFamily="34" charset="-120"/>
+              </a:rPr>
+              <a:t>Git records who made each commit — so it needs your name and email before you can commit anything</a:t>
+            </a:r>
+            <a:endParaRPr lang="en-US" sz="1600" dirty="0"/>
+          </a:p>
+        </p:txBody>
+      </p:sp>
+      <p:sp>
+        <p:nvSpPr>
+          <p:cNvPr id="20" name="Badge"/>
+          <p:cNvSpPr/>
+          <p:nvPr/>
+        </p:nvSpPr>
+        <p:spPr>
+          <a:xfrm>
+            <a:off x="822960" y="2724912"/>
+            <a:ext cx="384048" cy="384048"/>
+          </a:xfrm>
+          <a:prstGeom prst="ellipse">
+            <a:avLst/>
+          </a:prstGeom>
+          <a:solidFill>
+            <a:srgbClr val="F96167"/>
+          </a:solidFill>
+          <a:ln/>
+        </p:spPr>
+        <p:txBody>
+          <a:bodyPr/>
+          <a:lstStyle/>
+          <a:p>
+            <a:endParaRPr/>
+          </a:p>
+        </p:txBody>
+      </p:sp>
+      <p:sp>
+        <p:nvSpPr>
+          <p:cNvPr id="21" name="BadgeNum"/>
+          <p:cNvSpPr/>
+          <p:nvPr/>
+        </p:nvSpPr>
+        <p:spPr>
+          <a:xfrm>
+            <a:off x="822960" y="2724912"/>
+            <a:ext cx="384048" cy="384048"/>
+          </a:xfrm>
+          <a:prstGeom prst="rect">
+            <a:avLst/>
+          </a:prstGeom>
+          <a:noFill/>
+          <a:ln/>
+        </p:spPr>
+        <p:txBody>
+          <a:bodyPr wrap="square" lIns="0" tIns="0" rIns="0" bIns="0" rtlCol="0" anchor="ctr"/>
+          <a:lstStyle/>
+          <a:p>
+            <a:pPr marL="0" indent="0" algn="ctr">
+              <a:buNone/>
+            </a:pPr>
+            <a:r>
+              <a:rPr lang="en-US" sz="1400" dirty="0">
+                <a:solidFill>
+                  <a:srgbClr val="FFFFFF"/>
+                </a:solidFill>
+                <a:latin typeface="Calibri" pitchFamily="34" charset="0"/>
+                <a:ea typeface="Calibri" pitchFamily="34" charset="-122"/>
+                <a:cs typeface="Calibri" pitchFamily="34" charset="-120"/>
+              </a:rPr>
+              <a:t>2</a:t>
+            </a:r>
+            <a:endParaRPr lang="en-US" sz="1400" dirty="0"/>
+          </a:p>
+        </p:txBody>
+      </p:sp>
+      <p:sp>
+        <p:nvSpPr>
+          <p:cNvPr id="22" name="StepText"/>
+          <p:cNvSpPr/>
+          <p:nvPr/>
+        </p:nvSpPr>
+        <p:spPr>
+          <a:xfrm>
+            <a:off x="1371600" y="2697480"/>
+            <a:ext cx="9966960" cy="566928"/>
+          </a:xfrm>
+          <a:prstGeom prst="rect">
+            <a:avLst/>
+          </a:prstGeom>
+          <a:noFill/>
+          <a:ln/>
+        </p:spPr>
+        <p:txBody>
+          <a:bodyPr wrap="square" lIns="0" tIns="0" rIns="0" bIns="0" rtlCol="0" anchor="ctr"/>
+          <a:lstStyle/>
+          <a:p>
+            <a:pPr marL="0" indent="0" algn="l">
+              <a:buNone/>
+            </a:pPr>
+            <a:r>
+              <a:rPr lang="en-US" sz="1600" dirty="0">
+                <a:solidFill>
+                  <a:srgbClr val="1E2761"/>
+                </a:solidFill>
+                <a:latin typeface="Calibri" pitchFamily="34" charset="0"/>
+                <a:ea typeface="Calibri" pitchFamily="34" charset="-122"/>
+                <a:cs typeface="Calibri" pitchFamily="34" charset="-120"/>
+              </a:rPr>
+              <a:t>In Git Bash (Windows) or Terminal (Mac), run:   </a:t>
+            </a:r>
+            <a:r>
+              <a:rPr lang="en-US" sz="1600" dirty="0">
+                <a:solidFill>
+                  <a:srgbClr val="C00000"/>
+                </a:solidFill>
+                <a:latin typeface="Calibri" pitchFamily="34" charset="0"/>
+                <a:ea typeface="Calibri" pitchFamily="34" charset="-122"/>
+                <a:cs typeface="Calibri" pitchFamily="34" charset="-120"/>
+              </a:rPr>
+              <a:t>git config --global user.name "Your Name"</a:t>
+            </a:r>
+            <a:endParaRPr lang="en-US" sz="1600" dirty="0">
+              <a:solidFill>
+                <a:srgbClr val="C00000"/>
+              </a:solidFill>
+            </a:endParaRPr>
+          </a:p>
+        </p:txBody>
+      </p:sp>
+      <p:sp>
+        <p:nvSpPr>
+          <p:cNvPr id="23" name="Badge"/>
+          <p:cNvSpPr/>
+          <p:nvPr/>
+        </p:nvSpPr>
+        <p:spPr>
+          <a:xfrm>
+            <a:off x="822960" y="3346704"/>
+            <a:ext cx="384048" cy="384048"/>
+          </a:xfrm>
+          <a:prstGeom prst="ellipse">
+            <a:avLst/>
+          </a:prstGeom>
+          <a:solidFill>
+            <a:srgbClr val="F96167"/>
+          </a:solidFill>
+          <a:ln/>
+        </p:spPr>
+        <p:txBody>
+          <a:bodyPr/>
+          <a:lstStyle/>
+          <a:p>
+            <a:endParaRPr/>
+          </a:p>
+        </p:txBody>
+      </p:sp>
+      <p:sp>
+        <p:nvSpPr>
+          <p:cNvPr id="24" name="BadgeNum"/>
+          <p:cNvSpPr/>
+          <p:nvPr/>
+        </p:nvSpPr>
+        <p:spPr>
+          <a:xfrm>
+            <a:off x="822960" y="3346704"/>
+            <a:ext cx="384048" cy="384048"/>
+          </a:xfrm>
+          <a:prstGeom prst="rect">
+            <a:avLst/>
+          </a:prstGeom>
+          <a:noFill/>
+          <a:ln/>
+        </p:spPr>
+        <p:txBody>
+          <a:bodyPr wrap="square" lIns="0" tIns="0" rIns="0" bIns="0" rtlCol="0" anchor="ctr"/>
+          <a:lstStyle/>
+          <a:p>
+            <a:pPr marL="0" indent="0" algn="ctr">
+              <a:buNone/>
+            </a:pPr>
+            <a:r>
+              <a:rPr lang="en-US" sz="1400" dirty="0">
+                <a:solidFill>
+                  <a:srgbClr val="FFFFFF"/>
+                </a:solidFill>
+                <a:latin typeface="Calibri" pitchFamily="34" charset="0"/>
+                <a:ea typeface="Calibri" pitchFamily="34" charset="-122"/>
+                <a:cs typeface="Calibri" pitchFamily="34" charset="-120"/>
+              </a:rPr>
+              <a:t>3</a:t>
+            </a:r>
+            <a:endParaRPr lang="en-US" sz="1400" dirty="0"/>
+          </a:p>
+        </p:txBody>
+      </p:sp>
+      <p:sp>
+        <p:nvSpPr>
+          <p:cNvPr id="25" name="StepText"/>
+          <p:cNvSpPr/>
+          <p:nvPr/>
+        </p:nvSpPr>
+        <p:spPr>
+          <a:xfrm>
+            <a:off x="1371600" y="3319272"/>
+            <a:ext cx="9966960" cy="566928"/>
+          </a:xfrm>
+          <a:prstGeom prst="rect">
+            <a:avLst/>
+          </a:prstGeom>
+          <a:noFill/>
+          <a:ln/>
+        </p:spPr>
+        <p:txBody>
+          <a:bodyPr wrap="square" lIns="0" tIns="0" rIns="0" bIns="0" rtlCol="0" anchor="ctr"/>
+          <a:lstStyle/>
+          <a:p>
+            <a:pPr marL="0" indent="0" algn="l">
+              <a:buNone/>
+            </a:pPr>
+            <a:r>
+              <a:rPr lang="en-US" sz="1600" dirty="0">
+                <a:solidFill>
+                  <a:srgbClr val="1E2761"/>
+                </a:solidFill>
+                <a:latin typeface="Calibri" pitchFamily="34" charset="0"/>
+                <a:ea typeface="Calibri" pitchFamily="34" charset="-122"/>
+                <a:cs typeface="Calibri" pitchFamily="34" charset="-120"/>
+              </a:rPr>
+              <a:t>Then run:   git config </a:t>
+            </a:r>
+            <a:r>
+              <a:rPr lang="en-US" sz="1600" dirty="0">
+                <a:solidFill>
+                  <a:srgbClr val="C00000"/>
+                </a:solidFill>
+                <a:latin typeface="Calibri" pitchFamily="34" charset="0"/>
+                <a:ea typeface="Calibri" pitchFamily="34" charset="-122"/>
+                <a:cs typeface="Calibri" pitchFamily="34" charset="-120"/>
+              </a:rPr>
+              <a:t>--global user.email "your.email@example.com"</a:t>
+            </a:r>
+            <a:endParaRPr lang="en-US" sz="1600" dirty="0">
+              <a:solidFill>
+                <a:srgbClr val="C00000"/>
+              </a:solidFill>
+            </a:endParaRPr>
+          </a:p>
+        </p:txBody>
+      </p:sp>
+      <p:sp>
+        <p:nvSpPr>
+          <p:cNvPr id="26" name="Badge"/>
+          <p:cNvSpPr/>
+          <p:nvPr/>
+        </p:nvSpPr>
+        <p:spPr>
+          <a:xfrm>
+            <a:off x="822960" y="3968496"/>
+            <a:ext cx="384048" cy="384048"/>
+          </a:xfrm>
+          <a:prstGeom prst="ellipse">
+            <a:avLst/>
+          </a:prstGeom>
+          <a:solidFill>
+            <a:srgbClr val="F96167"/>
+          </a:solidFill>
+          <a:ln/>
+        </p:spPr>
+        <p:txBody>
+          <a:bodyPr/>
+          <a:lstStyle/>
+          <a:p>
+            <a:endParaRPr/>
+          </a:p>
+        </p:txBody>
+      </p:sp>
+      <p:sp>
+        <p:nvSpPr>
+          <p:cNvPr id="27" name="BadgeNum"/>
+          <p:cNvSpPr/>
+          <p:nvPr/>
+        </p:nvSpPr>
+        <p:spPr>
+          <a:xfrm>
+            <a:off x="822960" y="3968496"/>
+            <a:ext cx="384048" cy="384048"/>
+          </a:xfrm>
+          <a:prstGeom prst="rect">
+            <a:avLst/>
+          </a:prstGeom>
+          <a:noFill/>
+          <a:ln/>
+        </p:spPr>
+        <p:txBody>
+          <a:bodyPr wrap="square" lIns="0" tIns="0" rIns="0" bIns="0" rtlCol="0" anchor="ctr"/>
+          <a:lstStyle/>
+          <a:p>
+            <a:pPr marL="0" indent="0" algn="ctr">
+              <a:buNone/>
+            </a:pPr>
+            <a:r>
+              <a:rPr lang="en-US" sz="1400" dirty="0">
+                <a:solidFill>
+                  <a:srgbClr val="FFFFFF"/>
+                </a:solidFill>
+                <a:latin typeface="Calibri" pitchFamily="34" charset="0"/>
+                <a:ea typeface="Calibri" pitchFamily="34" charset="-122"/>
+                <a:cs typeface="Calibri" pitchFamily="34" charset="-120"/>
+              </a:rPr>
+              <a:t>4</a:t>
+            </a:r>
+            <a:endParaRPr lang="en-US" sz="1400" dirty="0"/>
+          </a:p>
+        </p:txBody>
+      </p:sp>
+      <p:sp>
+        <p:nvSpPr>
+          <p:cNvPr id="28" name="StepText"/>
+          <p:cNvSpPr/>
+          <p:nvPr/>
+        </p:nvSpPr>
+        <p:spPr>
+          <a:xfrm>
+            <a:off x="1371600" y="3941064"/>
+            <a:ext cx="9966960" cy="566928"/>
+          </a:xfrm>
+          <a:prstGeom prst="rect">
+            <a:avLst/>
+          </a:prstGeom>
+          <a:noFill/>
+          <a:ln/>
+        </p:spPr>
+        <p:txBody>
+          <a:bodyPr wrap="square" lIns="0" tIns="0" rIns="0" bIns="0" rtlCol="0" anchor="ctr"/>
+          <a:lstStyle/>
+          <a:p>
+            <a:pPr marL="0" indent="0" algn="l">
+              <a:buNone/>
+            </a:pPr>
+            <a:r>
+              <a:rPr lang="en-US" sz="1600" dirty="0">
+                <a:solidFill>
+                  <a:srgbClr val="1E2761"/>
+                </a:solidFill>
+                <a:latin typeface="Calibri" pitchFamily="34" charset="0"/>
+                <a:ea typeface="Calibri" pitchFamily="34" charset="-122"/>
+                <a:cs typeface="Calibri" pitchFamily="34" charset="-120"/>
+              </a:rPr>
+              <a:t>Check it worked:   </a:t>
+            </a:r>
+            <a:r>
+              <a:rPr lang="en-US" sz="1600" dirty="0">
+                <a:solidFill>
+                  <a:srgbClr val="C00000"/>
+                </a:solidFill>
+                <a:latin typeface="Calibri" pitchFamily="34" charset="0"/>
+                <a:ea typeface="Calibri" pitchFamily="34" charset="-122"/>
+                <a:cs typeface="Calibri" pitchFamily="34" charset="-120"/>
+              </a:rPr>
+              <a:t>git config --global --list</a:t>
+            </a:r>
+            <a:endParaRPr lang="en-US" sz="1600" dirty="0">
+              <a:solidFill>
+                <a:srgbClr val="C00000"/>
+              </a:solidFill>
+            </a:endParaRPr>
+          </a:p>
+        </p:txBody>
+      </p:sp>
+      <p:sp>
+        <p:nvSpPr>
+          <p:cNvPr id="29" name="TipBox"/>
+          <p:cNvSpPr/>
+          <p:nvPr/>
+        </p:nvSpPr>
+        <p:spPr>
+          <a:xfrm>
+            <a:off x="822960" y="5394960"/>
+            <a:ext cx="10543032" cy="640080"/>
+          </a:xfrm>
+          <a:prstGeom prst="roundRect">
+            <a:avLst>
+              <a:gd name="adj" fmla="val 11429"/>
+            </a:avLst>
+          </a:prstGeom>
+          <a:solidFill>
+            <a:srgbClr val="F1F4FB"/>
+          </a:solidFill>
+          <a:ln w="12700">
+            <a:solidFill>
+              <a:srgbClr val="F96167"/>
+            </a:solidFill>
+            <a:prstDash val="solid"/>
+          </a:ln>
+        </p:spPr>
+        <p:txBody>
+          <a:bodyPr/>
+          <a:lstStyle/>
+          <a:p>
+            <a:endParaRPr/>
+          </a:p>
+        </p:txBody>
+      </p:sp>
+      <p:sp>
+        <p:nvSpPr>
+          <p:cNvPr id="30" name="TipText"/>
+          <p:cNvSpPr/>
+          <p:nvPr/>
+        </p:nvSpPr>
+        <p:spPr>
+          <a:xfrm>
+            <a:off x="1051560" y="5394960"/>
+            <a:ext cx="10085832" cy="640080"/>
+          </a:xfrm>
+          <a:prstGeom prst="rect">
+            <a:avLst/>
+          </a:prstGeom>
+          <a:noFill/>
+          <a:ln/>
+        </p:spPr>
+        <p:txBody>
+          <a:bodyPr wrap="square" lIns="0" tIns="0" rIns="0" bIns="0" rtlCol="0" anchor="ctr"/>
+          <a:lstStyle/>
+          <a:p>
+            <a:pPr marL="0" indent="0" algn="l">
+              <a:buNone/>
+            </a:pPr>
+            <a:r>
+              <a:rPr lang="en-US" sz="1600" b="1" i="1" dirty="0">
+                <a:solidFill>
+                  <a:srgbClr val="1E2761"/>
+                </a:solidFill>
+                <a:latin typeface="Calibri" pitchFamily="34" charset="0"/>
+                <a:ea typeface="Calibri" pitchFamily="34" charset="-122"/>
+                <a:cs typeface="Calibri" pitchFamily="34" charset="-120"/>
+              </a:rPr>
+              <a:t>Use the email you'll use for GitHub</a:t>
+            </a:r>
+            <a:r>
+              <a:rPr lang="en-US" sz="1600" i="1" dirty="0">
+                <a:solidFill>
+                  <a:srgbClr val="1E2761"/>
+                </a:solidFill>
+                <a:latin typeface="Calibri" pitchFamily="34" charset="0"/>
+                <a:ea typeface="Calibri" pitchFamily="34" charset="-122"/>
+                <a:cs typeface="Calibri" pitchFamily="34" charset="-120"/>
+              </a:rPr>
+              <a:t> — in part 2 it links your commits to your account. And --global means once per computer, not once per week.</a:t>
+            </a:r>
+            <a:endParaRPr lang="en-US" sz="1600" dirty="0"/>
+          </a:p>
+        </p:txBody>
+      </p:sp>
+    </p:spTree>
+  </p:cSld>
+  <p:clrMapOvr>
+    <a:masterClrMapping/>
+  </p:clrMapOvr>
+</p:sld>
+</file>
+
+<file path=ppt/slides/slide8.xml><?xml version="1.0" encoding="utf-8"?>
+<p:sld xmlns:a="http://schemas.openxmlformats.org/drawingml/2006/main" xmlns:r="http://schemas.openxmlformats.org/officeDocument/2006/relationships" xmlns:p="http://schemas.openxmlformats.org/presentationml/2006/main">
+  <p:cSld name="Slide 8">
+    <p:bg>
+      <p:bgPr>
+        <a:solidFill>
+          <a:srgbClr val="FFFFFF"/>
+        </a:solidFill>
+        <a:effectLst/>
+      </p:bgPr>
+    </p:bg>
+    <p:spTree>
+      <p:nvGrpSpPr>
+        <p:cNvPr id="1" name=""/>
+        <p:cNvGrpSpPr/>
+        <p:nvPr/>
+      </p:nvGrpSpPr>
+      <p:grpSpPr>
+        <a:xfrm>
+          <a:off x="0" y="0"/>
+          <a:ext cx="0" cy="0"/>
+          <a:chOff x="0" y="0"/>
+          <a:chExt cx="0" cy="0"/>
+        </a:xfrm>
+      </p:grpSpPr>
+      <p:sp>
+        <p:nvSpPr>
+          <p:cNvPr id="2" name="Text 0"/>
+          <p:cNvSpPr/>
+          <p:nvPr/>
+        </p:nvSpPr>
+        <p:spPr>
+          <a:xfrm>
+            <a:off x="11274552" y="6492240"/>
+            <a:ext cx="457200" cy="274320"/>
+          </a:xfrm>
+          <a:prstGeom prst="rect">
+            <a:avLst/>
+          </a:prstGeom>
+          <a:noFill/>
+          <a:ln/>
+        </p:spPr>
+        <p:txBody>
+          <a:bodyPr wrap="square" lIns="0" tIns="0" rIns="0" bIns="0" rtlCol="0" anchor="ctr"/>
+          <a:lstStyle/>
+          <a:p>
+            <a:pPr marL="0" indent="0" algn="r">
+              <a:buNone/>
+            </a:pPr>
+            <a:r>
+              <a:rPr lang="en-US" sz="1100" dirty="0"/>
+              <a:t>8</a:t>
+            </a:r>
+          </a:p>
+        </p:txBody>
+      </p:sp>
+      <p:sp>
+        <p:nvSpPr>
+          <p:cNvPr id="3" name="Shape 1"/>
+          <p:cNvSpPr/>
+          <p:nvPr/>
+        </p:nvSpPr>
+        <p:spPr>
+          <a:xfrm>
+            <a:off x="457200" y="411480"/>
+            <a:ext cx="2011680" cy="329184"/>
+          </a:xfrm>
+          <a:prstGeom prst="roundRect">
+            <a:avLst>
+              <a:gd name="adj" fmla="val 50000"/>
+            </a:avLst>
+          </a:prstGeom>
+          <a:solidFill>
+            <a:srgbClr val="1E2761"/>
+          </a:solidFill>
+          <a:ln/>
+        </p:spPr>
+        <p:txBody>
+          <a:bodyPr/>
+          <a:lstStyle/>
+          <a:p>
+            <a:endParaRPr lang="nb-NO"/>
+          </a:p>
+        </p:txBody>
+      </p:sp>
+      <p:sp>
+        <p:nvSpPr>
+          <p:cNvPr id="4" name="Text 2"/>
+          <p:cNvSpPr/>
+          <p:nvPr/>
+        </p:nvSpPr>
+        <p:spPr>
+          <a:xfrm>
+            <a:off x="457200" y="411480"/>
+            <a:ext cx="2011680" cy="329184"/>
+          </a:xfrm>
+          <a:prstGeom prst="rect">
+            <a:avLst/>
+          </a:prstGeom>
+          <a:noFill/>
+          <a:ln/>
+        </p:spPr>
+        <p:txBody>
+          <a:bodyPr wrap="square" lIns="0" tIns="0" rIns="0" bIns="0" rtlCol="0" anchor="ctr"/>
+          <a:lstStyle/>
+          <a:p>
+            <a:pPr marL="0" indent="0" algn="ctr">
+              <a:buNone/>
+            </a:pPr>
+            <a:r>
+              <a:rPr lang="en-US" sz="1100" b="1" kern="0" spc="100" dirty="0">
+                <a:solidFill>
+                  <a:srgbClr val="FFFFFF"/>
+                </a:solidFill>
+                <a:latin typeface="Calibri" pitchFamily="34" charset="0"/>
+                <a:ea typeface="Calibri" pitchFamily="34" charset="-122"/>
+                <a:cs typeface="Calibri" pitchFamily="34" charset="-120"/>
+              </a:rPr>
+              <a:t>CONCEPT</a:t>
+            </a:r>
+            <a:endParaRPr lang="en-US" sz="1100" dirty="0"/>
+          </a:p>
+        </p:txBody>
+      </p:sp>
+      <p:sp>
+        <p:nvSpPr>
+          <p:cNvPr id="5" name="Shape 3"/>
+          <p:cNvSpPr/>
+          <p:nvPr/>
+        </p:nvSpPr>
+        <p:spPr>
+          <a:xfrm>
+            <a:off x="10771632" y="384048"/>
+            <a:ext cx="822960" cy="822960"/>
+          </a:xfrm>
+          <a:prstGeom prst="ellipse">
+            <a:avLst/>
+          </a:prstGeom>
+          <a:solidFill>
+            <a:srgbClr val="2A3B8F"/>
+          </a:solidFill>
+          <a:ln/>
+        </p:spPr>
+        <p:txBody>
+          <a:bodyPr/>
+          <a:lstStyle/>
+          <a:p>
+            <a:endParaRPr lang="nb-NO"/>
+          </a:p>
+        </p:txBody>
+      </p:sp>
+      <p:pic>
+        <p:nvPicPr>
+          <p:cNvPr id="6" name="Image 0" descr="icons/layers.png"/>
+          <p:cNvPicPr>
+            <a:picLocks noChangeAspect="1"/>
+          </p:cNvPicPr>
+          <p:nvPr/>
+        </p:nvPicPr>
+        <p:blipFill>
+          <a:blip r:embed="rId3"/>
+          <a:stretch>
+            <a:fillRect/>
+          </a:stretch>
+        </p:blipFill>
+        <p:spPr>
+          <a:xfrm>
+            <a:off x="10963656" y="576072"/>
+            <a:ext cx="438912" cy="438912"/>
+          </a:xfrm>
+          <a:prstGeom prst="rect">
+            <a:avLst/>
+          </a:prstGeom>
+        </p:spPr>
+      </p:pic>
+      <p:sp>
+        <p:nvSpPr>
+          <p:cNvPr id="7" name="Text 4"/>
+          <p:cNvSpPr/>
+          <p:nvPr/>
+        </p:nvSpPr>
+        <p:spPr>
+          <a:xfrm>
+            <a:off x="457200" y="896112"/>
+            <a:ext cx="11274552" cy="822960"/>
+          </a:xfrm>
+          <a:prstGeom prst="rect">
+            <a:avLst/>
+          </a:prstGeom>
+          <a:noFill/>
+          <a:ln/>
+        </p:spPr>
+        <p:txBody>
+          <a:bodyPr wrap="square" lIns="0" tIns="0" rIns="0" bIns="0" rtlCol="0" anchor="t"/>
+          <a:lstStyle/>
+          <a:p>
+            <a:pPr marL="0" indent="0" algn="l">
+              <a:buNone/>
+            </a:pPr>
+            <a:r>
+              <a:rPr lang="en-US" sz="3200" b="1" dirty="0">
+                <a:solidFill>
+                  <a:srgbClr val="1E2761"/>
+                </a:solidFill>
+                <a:latin typeface="Cambria" pitchFamily="34" charset="0"/>
+                <a:ea typeface="Cambria" pitchFamily="34" charset="-122"/>
+                <a:cs typeface="Cambria" pitchFamily="34" charset="-120"/>
+              </a:rPr>
+              <a:t>The Three States</a:t>
+            </a:r>
+            <a:endParaRPr lang="en-US" sz="3200" dirty="0"/>
+          </a:p>
+        </p:txBody>
+      </p:sp>
+      <p:sp>
+        <p:nvSpPr>
+          <p:cNvPr id="8" name="Shape 5"/>
+          <p:cNvSpPr/>
+          <p:nvPr/>
+        </p:nvSpPr>
+        <p:spPr>
+          <a:xfrm>
+            <a:off x="822960" y="2103120"/>
+            <a:ext cx="2788920" cy="1051560"/>
+          </a:xfrm>
+          <a:prstGeom prst="roundRect">
+            <a:avLst>
+              <a:gd name="adj" fmla="val 5217"/>
+            </a:avLst>
+          </a:prstGeom>
+          <a:solidFill>
+            <a:srgbClr val="CADCFC"/>
+          </a:solidFill>
+          <a:ln/>
+        </p:spPr>
+        <p:txBody>
+          <a:bodyPr/>
+          <a:lstStyle/>
+          <a:p>
+            <a:endParaRPr lang="nb-NO"/>
+          </a:p>
+        </p:txBody>
+      </p:sp>
+      <p:sp>
+        <p:nvSpPr>
+          <p:cNvPr id="9" name="Text 6"/>
+          <p:cNvSpPr/>
+          <p:nvPr/>
+        </p:nvSpPr>
+        <p:spPr>
+          <a:xfrm>
+            <a:off x="822960" y="2212848"/>
+            <a:ext cx="2788920" cy="457200"/>
+          </a:xfrm>
+          <a:prstGeom prst="rect">
+            <a:avLst/>
+          </a:prstGeom>
+          <a:noFill/>
+          <a:ln/>
+        </p:spPr>
+        <p:txBody>
+          <a:bodyPr wrap="square" lIns="0" tIns="0" rIns="0" bIns="0" rtlCol="0" anchor="ctr"/>
+          <a:lstStyle/>
+          <a:p>
+            <a:pPr marL="0" indent="0" algn="ctr">
+              <a:buNone/>
+            </a:pPr>
+            <a:r>
+              <a:rPr lang="en-US" b="1" dirty="0">
+                <a:solidFill>
+                  <a:srgbClr val="1E2761"/>
+                </a:solidFill>
+                <a:latin typeface="Calibri" pitchFamily="34" charset="0"/>
+                <a:ea typeface="Calibri" pitchFamily="34" charset="-122"/>
+                <a:cs typeface="Calibri" pitchFamily="34" charset="-120"/>
+              </a:rPr>
+              <a:t>Changes</a:t>
+            </a:r>
+            <a:endParaRPr lang="en-US" dirty="0"/>
+          </a:p>
+        </p:txBody>
+      </p:sp>
+      <p:sp>
+        <p:nvSpPr>
+          <p:cNvPr id="10" name="Text 7"/>
+          <p:cNvSpPr/>
+          <p:nvPr/>
+        </p:nvSpPr>
+        <p:spPr>
+          <a:xfrm>
+            <a:off x="822960" y="2670048"/>
+            <a:ext cx="2788920" cy="411480"/>
+          </a:xfrm>
+          <a:prstGeom prst="rect">
+            <a:avLst/>
+          </a:prstGeom>
+          <a:noFill/>
+          <a:ln/>
+        </p:spPr>
+        <p:txBody>
+          <a:bodyPr wrap="square" lIns="0" tIns="0" rIns="0" bIns="0" rtlCol="0" anchor="ctr"/>
+          <a:lstStyle/>
+          <a:p>
+            <a:pPr marL="0" indent="0" algn="ctr">
+              <a:buNone/>
+            </a:pPr>
+            <a:r>
+              <a:rPr lang="en-US" sz="1400" dirty="0">
+                <a:solidFill>
+                  <a:srgbClr val="5B6472"/>
+                </a:solidFill>
+                <a:latin typeface="Calibri" pitchFamily="34" charset="0"/>
+                <a:ea typeface="Calibri" pitchFamily="34" charset="-122"/>
+                <a:cs typeface="Calibri" pitchFamily="34" charset="-120"/>
+              </a:rPr>
+              <a:t>files you've edited</a:t>
+            </a:r>
+            <a:endParaRPr lang="en-US" sz="1400" dirty="0"/>
+          </a:p>
+        </p:txBody>
+      </p:sp>
+      <p:sp>
+        <p:nvSpPr>
+          <p:cNvPr id="11" name="Shape 8"/>
+          <p:cNvSpPr/>
+          <p:nvPr/>
+        </p:nvSpPr>
+        <p:spPr>
+          <a:xfrm>
+            <a:off x="4663440" y="2103120"/>
+            <a:ext cx="2788920" cy="1051560"/>
+          </a:xfrm>
+          <a:prstGeom prst="roundRect">
+            <a:avLst>
+              <a:gd name="adj" fmla="val 5217"/>
+            </a:avLst>
+          </a:prstGeom>
+          <a:solidFill>
+            <a:srgbClr val="CADCFC"/>
+          </a:solidFill>
+          <a:ln/>
+        </p:spPr>
+        <p:txBody>
+          <a:bodyPr/>
+          <a:lstStyle/>
+          <a:p>
+            <a:endParaRPr lang="nb-NO"/>
+          </a:p>
+        </p:txBody>
+      </p:sp>
+      <p:sp>
+        <p:nvSpPr>
+          <p:cNvPr id="12" name="Text 9"/>
+          <p:cNvSpPr/>
+          <p:nvPr/>
+        </p:nvSpPr>
+        <p:spPr>
+          <a:xfrm>
+            <a:off x="4663440" y="2212848"/>
+            <a:ext cx="2788920" cy="457200"/>
+          </a:xfrm>
+          <a:prstGeom prst="rect">
+            <a:avLst/>
+          </a:prstGeom>
+          <a:noFill/>
+          <a:ln/>
+        </p:spPr>
+        <p:txBody>
+          <a:bodyPr wrap="square" lIns="0" tIns="0" rIns="0" bIns="0" rtlCol="0" anchor="ctr"/>
+          <a:lstStyle/>
+          <a:p>
+            <a:pPr marL="0" indent="0" algn="ctr">
+              <a:buNone/>
+            </a:pPr>
+            <a:r>
+              <a:rPr lang="en-US" b="1" dirty="0">
+                <a:solidFill>
+                  <a:srgbClr val="1E2761"/>
+                </a:solidFill>
+                <a:latin typeface="Calibri" pitchFamily="34" charset="0"/>
+                <a:ea typeface="Calibri" pitchFamily="34" charset="-122"/>
+                <a:cs typeface="Calibri" pitchFamily="34" charset="-120"/>
+              </a:rPr>
+              <a:t>Staged Changes</a:t>
+            </a:r>
+            <a:endParaRPr lang="en-US" dirty="0"/>
+          </a:p>
+        </p:txBody>
+      </p:sp>
+      <p:sp>
+        <p:nvSpPr>
+          <p:cNvPr id="13" name="Text 10"/>
+          <p:cNvSpPr/>
+          <p:nvPr/>
+        </p:nvSpPr>
+        <p:spPr>
+          <a:xfrm>
+            <a:off x="4663440" y="2670048"/>
+            <a:ext cx="2788920" cy="411480"/>
+          </a:xfrm>
+          <a:prstGeom prst="rect">
+            <a:avLst/>
+          </a:prstGeom>
+          <a:noFill/>
+          <a:ln/>
+        </p:spPr>
+        <p:txBody>
+          <a:bodyPr wrap="square" lIns="0" tIns="0" rIns="0" bIns="0" rtlCol="0" anchor="ctr"/>
+          <a:lstStyle/>
+          <a:p>
+            <a:pPr marL="0" indent="0" algn="ctr">
+              <a:buNone/>
+            </a:pPr>
+            <a:r>
+              <a:rPr lang="en-US" sz="1400" dirty="0">
+                <a:solidFill>
+                  <a:srgbClr val="5B6472"/>
+                </a:solidFill>
+                <a:latin typeface="Calibri" pitchFamily="34" charset="0"/>
+                <a:ea typeface="Calibri" pitchFamily="34" charset="-122"/>
+                <a:cs typeface="Calibri" pitchFamily="34" charset="-120"/>
+              </a:rPr>
+              <a:t>marked “ready to save”</a:t>
+            </a:r>
+            <a:endParaRPr lang="en-US" sz="1400" dirty="0"/>
+          </a:p>
+        </p:txBody>
+      </p:sp>
+      <p:sp>
+        <p:nvSpPr>
+          <p:cNvPr id="14" name="Shape 11"/>
+          <p:cNvSpPr/>
+          <p:nvPr/>
+        </p:nvSpPr>
+        <p:spPr>
+          <a:xfrm>
+            <a:off x="8503920" y="2103120"/>
+            <a:ext cx="2788920" cy="1051560"/>
+          </a:xfrm>
+          <a:prstGeom prst="roundRect">
+            <a:avLst>
+              <a:gd name="adj" fmla="val 5217"/>
+            </a:avLst>
+          </a:prstGeom>
+          <a:solidFill>
+            <a:srgbClr val="CADCFC"/>
+          </a:solidFill>
+          <a:ln/>
+        </p:spPr>
+        <p:txBody>
+          <a:bodyPr/>
+          <a:lstStyle/>
+          <a:p>
+            <a:endParaRPr lang="nb-NO"/>
+          </a:p>
+        </p:txBody>
+      </p:sp>
+      <p:sp>
+        <p:nvSpPr>
+          <p:cNvPr id="15" name="Text 12"/>
+          <p:cNvSpPr/>
+          <p:nvPr/>
+        </p:nvSpPr>
+        <p:spPr>
+          <a:xfrm>
+            <a:off x="8503920" y="2212848"/>
+            <a:ext cx="2788920" cy="457200"/>
+          </a:xfrm>
+          <a:prstGeom prst="rect">
+            <a:avLst/>
+          </a:prstGeom>
+          <a:noFill/>
+          <a:ln/>
+        </p:spPr>
+        <p:txBody>
+          <a:bodyPr wrap="square" lIns="0" tIns="0" rIns="0" bIns="0" rtlCol="0" anchor="ctr"/>
+          <a:lstStyle/>
+          <a:p>
+            <a:pPr marL="0" indent="0" algn="ctr">
+              <a:buNone/>
+            </a:pPr>
+            <a:r>
+              <a:rPr lang="en-US" b="1" dirty="0">
+                <a:solidFill>
+                  <a:srgbClr val="1E2761"/>
+                </a:solidFill>
+                <a:latin typeface="Calibri" pitchFamily="34" charset="0"/>
+                <a:ea typeface="Calibri" pitchFamily="34" charset="-122"/>
+                <a:cs typeface="Calibri" pitchFamily="34" charset="-120"/>
+              </a:rPr>
+              <a:t>Commit History</a:t>
+            </a:r>
+            <a:endParaRPr lang="en-US" dirty="0"/>
+          </a:p>
+        </p:txBody>
+      </p:sp>
+      <p:sp>
+        <p:nvSpPr>
+          <p:cNvPr id="16" name="Text 13"/>
+          <p:cNvSpPr/>
+          <p:nvPr/>
+        </p:nvSpPr>
+        <p:spPr>
+          <a:xfrm>
+            <a:off x="8503920" y="2670048"/>
+            <a:ext cx="2788920" cy="411480"/>
+          </a:xfrm>
+          <a:prstGeom prst="rect">
+            <a:avLst/>
+          </a:prstGeom>
+          <a:noFill/>
+          <a:ln/>
+        </p:spPr>
+        <p:txBody>
+          <a:bodyPr wrap="square" lIns="0" tIns="0" rIns="0" bIns="0" rtlCol="0" anchor="ctr"/>
+          <a:lstStyle/>
+          <a:p>
+            <a:pPr marL="0" indent="0" algn="ctr">
+              <a:buNone/>
+            </a:pPr>
+            <a:r>
+              <a:rPr lang="en-US" sz="1400" dirty="0">
+                <a:solidFill>
+                  <a:srgbClr val="5B6472"/>
+                </a:solidFill>
+                <a:latin typeface="Calibri" pitchFamily="34" charset="0"/>
+                <a:ea typeface="Calibri" pitchFamily="34" charset="-122"/>
+                <a:cs typeface="Calibri" pitchFamily="34" charset="-120"/>
+              </a:rPr>
+              <a:t>the saved snapshot</a:t>
+            </a:r>
+            <a:endParaRPr lang="en-US" sz="1400" dirty="0"/>
+          </a:p>
+        </p:txBody>
+      </p:sp>
+      <p:sp>
+        <p:nvSpPr>
+          <p:cNvPr id="17" name="Shape 14"/>
+          <p:cNvSpPr/>
+          <p:nvPr/>
+        </p:nvSpPr>
+        <p:spPr>
+          <a:xfrm>
+            <a:off x="3639312" y="2519172"/>
+            <a:ext cx="1005840" cy="219456"/>
+          </a:xfrm>
+          <a:prstGeom prst="rightArrow">
+            <a:avLst/>
+          </a:prstGeom>
+          <a:solidFill>
+            <a:srgbClr val="F96167"/>
+          </a:solidFill>
+          <a:ln/>
+        </p:spPr>
+        <p:txBody>
+          <a:bodyPr/>
+          <a:lstStyle/>
+          <a:p>
+            <a:endParaRPr lang="nb-NO"/>
+          </a:p>
+        </p:txBody>
+      </p:sp>
+      <p:sp>
+        <p:nvSpPr>
+          <p:cNvPr id="18" name="Shape 15"/>
+          <p:cNvSpPr/>
+          <p:nvPr/>
+        </p:nvSpPr>
+        <p:spPr>
+          <a:xfrm>
+            <a:off x="7479792" y="2519172"/>
+            <a:ext cx="1005840" cy="219456"/>
+          </a:xfrm>
+          <a:prstGeom prst="rightArrow">
+            <a:avLst/>
+          </a:prstGeom>
+          <a:solidFill>
+            <a:srgbClr val="F96167"/>
+          </a:solidFill>
+          <a:ln/>
+        </p:spPr>
+        <p:txBody>
+          <a:bodyPr/>
+          <a:lstStyle/>
+          <a:p>
+            <a:endParaRPr lang="nb-NO"/>
+          </a:p>
+        </p:txBody>
+      </p:sp>
+      <p:sp>
+        <p:nvSpPr>
+          <p:cNvPr id="19" name="Text 16"/>
+          <p:cNvSpPr/>
+          <p:nvPr/>
+        </p:nvSpPr>
+        <p:spPr>
+          <a:xfrm>
+            <a:off x="3639312" y="1536192"/>
+            <a:ext cx="1005840" cy="502920"/>
+          </a:xfrm>
+          <a:prstGeom prst="rect">
+            <a:avLst/>
+          </a:prstGeom>
+          <a:noFill/>
+          <a:ln/>
+        </p:spPr>
+        <p:txBody>
+          <a:bodyPr wrap="square" lIns="0" tIns="0" rIns="0" bIns="0" rtlCol="0" anchor="ctr"/>
+          <a:lstStyle/>
+          <a:p>
+            <a:pPr marL="0" indent="0" algn="ctr">
+              <a:buNone/>
+            </a:pPr>
+            <a:r>
+              <a:rPr lang="en-US" sz="1400" dirty="0">
+                <a:solidFill>
+                  <a:srgbClr val="1E2761"/>
+                </a:solidFill>
+                <a:latin typeface="Calibri" pitchFamily="34" charset="0"/>
+                <a:ea typeface="Calibri" pitchFamily="34" charset="-122"/>
+                <a:cs typeface="Calibri" pitchFamily="34" charset="-120"/>
+              </a:rPr>
+              <a:t>click +</a:t>
+            </a:r>
+            <a:endParaRPr lang="en-US" sz="1400" dirty="0"/>
+          </a:p>
+          <a:p>
+            <a:pPr marL="0" indent="0" algn="ctr">
+              <a:buNone/>
+            </a:pPr>
+            <a:r>
+              <a:rPr lang="en-US" sz="1400" dirty="0">
+                <a:solidFill>
+                  <a:srgbClr val="1E2761"/>
+                </a:solidFill>
+                <a:latin typeface="Calibri" pitchFamily="34" charset="0"/>
+                <a:ea typeface="Calibri" pitchFamily="34" charset="-122"/>
+                <a:cs typeface="Calibri" pitchFamily="34" charset="-120"/>
+              </a:rPr>
+              <a:t>(stage</a:t>
+            </a:r>
+            <a:r>
+              <a:rPr lang="en-US" sz="1100" dirty="0">
+                <a:solidFill>
+                  <a:srgbClr val="1E2761"/>
+                </a:solidFill>
+                <a:latin typeface="Calibri" pitchFamily="34" charset="0"/>
+                <a:ea typeface="Calibri" pitchFamily="34" charset="-122"/>
+                <a:cs typeface="Calibri" pitchFamily="34" charset="-120"/>
+              </a:rPr>
+              <a:t>)</a:t>
+            </a:r>
+            <a:endParaRPr lang="en-US" sz="1100" dirty="0"/>
+          </a:p>
+        </p:txBody>
+      </p:sp>
+      <p:sp>
+        <p:nvSpPr>
+          <p:cNvPr id="20" name="Text 17"/>
+          <p:cNvSpPr/>
+          <p:nvPr/>
+        </p:nvSpPr>
+        <p:spPr>
+          <a:xfrm>
+            <a:off x="7479792" y="1536192"/>
+            <a:ext cx="1005840" cy="502920"/>
+          </a:xfrm>
+          <a:prstGeom prst="rect">
+            <a:avLst/>
+          </a:prstGeom>
+          <a:noFill/>
+          <a:ln/>
+        </p:spPr>
+        <p:txBody>
+          <a:bodyPr wrap="square" lIns="0" tIns="0" rIns="0" bIns="0" rtlCol="0" anchor="ctr"/>
+          <a:lstStyle/>
+          <a:p>
+            <a:pPr marL="0" indent="0" algn="ctr">
+              <a:buNone/>
+            </a:pPr>
+            <a:r>
+              <a:rPr lang="en-US" sz="1400" dirty="0">
+                <a:solidFill>
+                  <a:srgbClr val="1E2761"/>
+                </a:solidFill>
+                <a:latin typeface="Calibri" pitchFamily="34" charset="0"/>
+                <a:ea typeface="Calibri" pitchFamily="34" charset="-122"/>
+                <a:cs typeface="Calibri" pitchFamily="34" charset="-120"/>
+              </a:rPr>
+              <a:t>click ✓</a:t>
+            </a:r>
+            <a:endParaRPr lang="en-US" sz="1400" dirty="0"/>
+          </a:p>
+          <a:p>
+            <a:pPr marL="0" indent="0" algn="ctr">
+              <a:buNone/>
+            </a:pPr>
+            <a:r>
+              <a:rPr lang="en-US" sz="1400" dirty="0">
+                <a:solidFill>
+                  <a:srgbClr val="1E2761"/>
+                </a:solidFill>
+                <a:latin typeface="Calibri" pitchFamily="34" charset="0"/>
+                <a:ea typeface="Calibri" pitchFamily="34" charset="-122"/>
+                <a:cs typeface="Calibri" pitchFamily="34" charset="-120"/>
+              </a:rPr>
+              <a:t>(commit)</a:t>
+            </a:r>
+            <a:endParaRPr lang="en-US" sz="1400" dirty="0"/>
+          </a:p>
+        </p:txBody>
+      </p:sp>
+      <p:sp>
+        <p:nvSpPr>
+          <p:cNvPr id="21" name="Text 18"/>
+          <p:cNvSpPr/>
+          <p:nvPr/>
+        </p:nvSpPr>
+        <p:spPr>
+          <a:xfrm>
+            <a:off x="822960" y="3703320"/>
+            <a:ext cx="10543032" cy="1554480"/>
+          </a:xfrm>
+          <a:prstGeom prst="rect">
+            <a:avLst/>
+          </a:prstGeom>
+          <a:noFill/>
+          <a:ln/>
+        </p:spPr>
+        <p:txBody>
+          <a:bodyPr wrap="square" lIns="0" tIns="0" rIns="0" bIns="0" rtlCol="0" anchor="t"/>
+          <a:lstStyle/>
+          <a:p>
+            <a:pPr marL="342900" indent="-342900" algn="l">
+              <a:spcAft>
+                <a:spcPts val="1200"/>
+              </a:spcAft>
+              <a:buSzPct val="100000"/>
+              <a:buChar char="•"/>
+            </a:pPr>
+            <a:r>
+              <a:rPr lang="en-US" sz="1600" dirty="0">
+                <a:solidFill>
+                  <a:srgbClr val="1E2761"/>
+                </a:solidFill>
+                <a:latin typeface="Calibri" pitchFamily="34" charset="0"/>
+                <a:ea typeface="Calibri" pitchFamily="34" charset="-122"/>
+                <a:cs typeface="Calibri" pitchFamily="34" charset="-120"/>
+              </a:rPr>
+              <a:t>Changes — files you've edited since the last commit, listed under “Changes” in Source Control</a:t>
+            </a:r>
+            <a:endParaRPr lang="en-US" sz="1600" dirty="0"/>
+          </a:p>
+          <a:p>
+            <a:pPr marL="342900" indent="-342900" algn="l">
+              <a:spcAft>
+                <a:spcPts val="1200"/>
+              </a:spcAft>
+              <a:buSzPct val="100000"/>
+              <a:buChar char="•"/>
+            </a:pPr>
+            <a:r>
+              <a:rPr lang="en-US" sz="1600" dirty="0">
+                <a:solidFill>
+                  <a:srgbClr val="1E2761"/>
+                </a:solidFill>
+                <a:latin typeface="Calibri" pitchFamily="34" charset="0"/>
+                <a:ea typeface="Calibri" pitchFamily="34" charset="-122"/>
+                <a:cs typeface="Calibri" pitchFamily="34" charset="-120"/>
+              </a:rPr>
+              <a:t>Staged Changes — files marked as ready to save, by clicking the + next to a file</a:t>
+            </a:r>
+            <a:endParaRPr lang="en-US" sz="1600" dirty="0"/>
+          </a:p>
+          <a:p>
+            <a:pPr marL="342900" indent="-342900" algn="l">
+              <a:spcAft>
+                <a:spcPts val="1200"/>
+              </a:spcAft>
+              <a:buSzPct val="100000"/>
+              <a:buChar char="•"/>
+            </a:pPr>
+            <a:r>
+              <a:rPr lang="en-US" sz="1600" dirty="0">
+                <a:solidFill>
+                  <a:srgbClr val="1E2761"/>
+                </a:solidFill>
+                <a:latin typeface="Calibri" pitchFamily="34" charset="0"/>
+                <a:ea typeface="Calibri" pitchFamily="34" charset="-122"/>
+                <a:cs typeface="Calibri" pitchFamily="34" charset="-120"/>
+              </a:rPr>
+              <a:t>Commit — the actual snapshot: write a message, click ✓ Commit</a:t>
+            </a:r>
+          </a:p>
+          <a:p>
+            <a:pPr marL="342900" indent="-342900" algn="l">
+              <a:spcAft>
+                <a:spcPts val="1200"/>
+              </a:spcAft>
+              <a:buSzPct val="100000"/>
+              <a:buChar char="•"/>
+            </a:pPr>
+            <a:endParaRPr lang="en-US" sz="1600" dirty="0"/>
+          </a:p>
+        </p:txBody>
+      </p:sp>
+    </p:spTree>
+  </p:cSld>
+  <p:clrMapOvr>
+    <a:masterClrMapping/>
+  </p:clrMapOvr>
+</p:sld>
+</file>
+
+<file path=ppt/slides/slide9.xml><?xml version="1.0" encoding="utf-8"?>
 <p:sld xmlns:a="http://schemas.openxmlformats.org/drawingml/2006/main" xmlns:r="http://schemas.openxmlformats.org/officeDocument/2006/relationships" xmlns:p="http://schemas.openxmlformats.org/presentationml/2006/main">
   <p:cSld name="Slide 7">
     <p:bg>
@@ -12289,17 +15142,9 @@
               <a:buNone/>
             </a:pPr>
             <a:r>
-              <a:rPr lang="en-US" sz="1100" dirty="0">
-                <a:solidFill>
-                  <a:srgbClr val="5B6472"/>
-                </a:solidFill>
-                <a:latin typeface="Calibri" pitchFamily="34" charset="0"/>
-                <a:ea typeface="Calibri" pitchFamily="34" charset="-122"/>
-                <a:cs typeface="Calibri" pitchFamily="34" charset="-120"/>
-              </a:rPr>
-              <a:t>7</a:t>
-            </a:r>
-            <a:endParaRPr lang="en-US" sz="1100" dirty="0"/>
+              <a:rPr lang="en-US" sz="1100" dirty="0"/>
+              <a:t>9</a:t>
+            </a:r>
           </a:p>
         </p:txBody>
       </p:sp>
@@ -12470,7 +15315,7 @@
         <p:spPr>
           <a:xfrm>
             <a:off x="822960" y="1828800"/>
-            <a:ext cx="10543032" cy="1188720"/>
+            <a:ext cx="10543032" cy="4151376"/>
           </a:xfrm>
           <a:prstGeom prst="rect">
             <a:avLst/>
@@ -12585,7 +15430,189 @@
               </a:rPr>
               <a:t>):</a:t>
             </a:r>
-            <a:endParaRPr lang="en-US" sz="1600" dirty="0"/>
+          </a:p>
+          <a:p>
+            <a:pPr marL="342900" indent="-342900" algn="l">
+              <a:spcAft>
+                <a:spcPts val="1200"/>
+              </a:spcAft>
+              <a:buSzPct val="100000"/>
+              <a:buChar char="•"/>
+            </a:pPr>
+            <a:endParaRPr lang="en-US" sz="1600" dirty="0">
+              <a:solidFill>
+                <a:srgbClr val="1E2761"/>
+              </a:solidFill>
+              <a:latin typeface="Calibri" pitchFamily="34" charset="0"/>
+              <a:ea typeface="Calibri" pitchFamily="34" charset="-122"/>
+              <a:cs typeface="Calibri" pitchFamily="34" charset="-120"/>
+            </a:endParaRPr>
+          </a:p>
+          <a:p>
+            <a:pPr marL="342900" indent="-342900" algn="l">
+              <a:spcAft>
+                <a:spcPts val="1200"/>
+              </a:spcAft>
+              <a:buSzPct val="100000"/>
+              <a:buChar char="•"/>
+            </a:pPr>
+            <a:endParaRPr lang="en-US" sz="1600" dirty="0">
+              <a:solidFill>
+                <a:srgbClr val="1E2761"/>
+              </a:solidFill>
+              <a:latin typeface="Calibri" pitchFamily="34" charset="0"/>
+              <a:ea typeface="Calibri" pitchFamily="34" charset="-122"/>
+              <a:cs typeface="Calibri" pitchFamily="34" charset="-120"/>
+            </a:endParaRPr>
+          </a:p>
+          <a:p>
+            <a:pPr marL="342900" indent="-342900" algn="l">
+              <a:spcAft>
+                <a:spcPts val="1200"/>
+              </a:spcAft>
+              <a:buSzPct val="100000"/>
+              <a:buChar char="•"/>
+            </a:pPr>
+            <a:endParaRPr lang="en-US" sz="1600" dirty="0">
+              <a:solidFill>
+                <a:srgbClr val="1E2761"/>
+              </a:solidFill>
+              <a:latin typeface="Calibri" pitchFamily="34" charset="0"/>
+              <a:ea typeface="Calibri" pitchFamily="34" charset="-122"/>
+              <a:cs typeface="Calibri" pitchFamily="34" charset="-120"/>
+            </a:endParaRPr>
+          </a:p>
+          <a:p>
+            <a:pPr marL="342900" indent="-342900" algn="l">
+              <a:spcAft>
+                <a:spcPts val="1200"/>
+              </a:spcAft>
+              <a:buSzPct val="100000"/>
+              <a:buChar char="•"/>
+            </a:pPr>
+            <a:endParaRPr lang="en-US" sz="1600" dirty="0">
+              <a:solidFill>
+                <a:srgbClr val="1E2761"/>
+              </a:solidFill>
+              <a:latin typeface="Calibri" pitchFamily="34" charset="0"/>
+              <a:ea typeface="Calibri" pitchFamily="34" charset="-122"/>
+              <a:cs typeface="Calibri" pitchFamily="34" charset="-120"/>
+            </a:endParaRPr>
+          </a:p>
+          <a:p>
+            <a:pPr marL="342900" indent="-342900" algn="l">
+              <a:spcAft>
+                <a:spcPts val="1200"/>
+              </a:spcAft>
+              <a:buSzPct val="100000"/>
+              <a:buChar char="•"/>
+            </a:pPr>
+            <a:endParaRPr lang="en-US" sz="1600" dirty="0">
+              <a:solidFill>
+                <a:srgbClr val="1E2761"/>
+              </a:solidFill>
+              <a:latin typeface="Calibri" pitchFamily="34" charset="0"/>
+              <a:ea typeface="Calibri" pitchFamily="34" charset="-122"/>
+              <a:cs typeface="Calibri" pitchFamily="34" charset="-120"/>
+            </a:endParaRPr>
+          </a:p>
+          <a:p>
+            <a:pPr marL="342900" indent="-342900" algn="l">
+              <a:spcAft>
+                <a:spcPts val="1200"/>
+              </a:spcAft>
+              <a:buSzPct val="100000"/>
+              <a:buChar char="•"/>
+            </a:pPr>
+            <a:endParaRPr lang="en-US" sz="1600" dirty="0">
+              <a:solidFill>
+                <a:srgbClr val="1E2761"/>
+              </a:solidFill>
+              <a:latin typeface="Calibri" pitchFamily="34" charset="0"/>
+              <a:ea typeface="Calibri" pitchFamily="34" charset="-122"/>
+              <a:cs typeface="Calibri" pitchFamily="34" charset="-120"/>
+            </a:endParaRPr>
+          </a:p>
+          <a:p>
+            <a:pPr marL="342900" indent="-342900">
+              <a:spcAft>
+                <a:spcPts val="1200"/>
+              </a:spcAft>
+              <a:buSzPct val="100000"/>
+              <a:buChar char="•"/>
+            </a:pPr>
+            <a:r>
+              <a:rPr lang="en-US" sz="1600" dirty="0">
+                <a:solidFill>
+                  <a:srgbClr val="1E2761"/>
+                </a:solidFill>
+                <a:latin typeface="Calibri" pitchFamily="34" charset="0"/>
+                <a:ea typeface="Calibri" pitchFamily="34" charset="-122"/>
+                <a:cs typeface="Calibri" pitchFamily="34" charset="-120"/>
+              </a:rPr>
+              <a:t>Stage it (+) and commit it </a:t>
+            </a:r>
+            <a:r>
+              <a:rPr lang="nb-NO" sz="1600" dirty="0">
+                <a:solidFill>
+                  <a:srgbClr val="1E2761"/>
+                </a:solidFill>
+              </a:rPr>
+              <a:t>(✓) — e.g. </a:t>
+            </a:r>
+            <a:r>
+              <a:rPr lang="nb-NO" sz="1600" dirty="0" err="1">
+                <a:solidFill>
+                  <a:srgbClr val="1E2761"/>
+                </a:solidFill>
+              </a:rPr>
+              <a:t>message</a:t>
+            </a:r>
+            <a:r>
+              <a:rPr lang="nb-NO" sz="1600" dirty="0">
+                <a:solidFill>
+                  <a:srgbClr val="1E2761"/>
+                </a:solidFill>
+              </a:rPr>
+              <a:t> "</a:t>
+            </a:r>
+            <a:r>
+              <a:rPr lang="nb-NO" sz="1600" dirty="0" err="1">
+                <a:solidFill>
+                  <a:srgbClr val="1E2761"/>
+                </a:solidFill>
+              </a:rPr>
+              <a:t>Add</a:t>
+            </a:r>
+            <a:r>
+              <a:rPr lang="nb-NO" sz="1600" dirty="0">
+                <a:solidFill>
+                  <a:srgbClr val="1E2761"/>
+                </a:solidFill>
+              </a:rPr>
+              <a:t> .</a:t>
+            </a:r>
+            <a:r>
+              <a:rPr lang="nb-NO" sz="1600" dirty="0" err="1">
+                <a:solidFill>
+                  <a:srgbClr val="1E2761"/>
+                </a:solidFill>
+              </a:rPr>
+              <a:t>gitignore</a:t>
+            </a:r>
+            <a:r>
+              <a:rPr lang="nb-NO" sz="1600" dirty="0">
+                <a:solidFill>
+                  <a:srgbClr val="1E2761"/>
+                </a:solidFill>
+              </a:rPr>
+              <a:t>"</a:t>
+            </a:r>
+            <a:endParaRPr lang="en-US" sz="1600" dirty="0">
+              <a:solidFill>
+                <a:srgbClr val="1E2761"/>
+              </a:solidFill>
+            </a:endParaRPr>
           </a:p>
         </p:txBody>
       </p:sp>
@@ -12605,7 +15632,7 @@
         </p:nvGraphicFramePr>
         <p:xfrm>
           <a:off x="822960" y="3063240"/>
-          <a:ext cx="10543032" cy="2514600"/>
+          <a:ext cx="10543032" cy="2156460"/>
         </p:xfrm>
         <a:graphic>
           <a:graphicData uri="http://schemas.openxmlformats.org/drawingml/2006/table">
@@ -13548,7 +16575,7 @@
               <a:buNone/>
             </a:pPr>
             <a:r>
-              <a:rPr lang="en-US" sz="1350" b="1" i="1" dirty="0">
+              <a:rPr lang="en-US" sz="1600" b="1" i="1" dirty="0">
                 <a:solidFill>
                   <a:srgbClr val="1E2761"/>
                 </a:solidFill>
@@ -13559,7 +16586,7 @@
               <a:t>Note</a:t>
             </a:r>
             <a:r>
-              <a:rPr lang="en-US" sz="1350" i="1" dirty="0">
+              <a:rPr lang="en-US" sz="1600" i="1" dirty="0">
                 <a:solidFill>
                   <a:srgbClr val="1E2761"/>
                 </a:solidFill>
@@ -13569,1759 +16596,7 @@
               </a:rPr>
               <a:t>: Like git init, this is a one-time setup step — do it once for each git repo.</a:t>
             </a:r>
-            <a:endParaRPr lang="en-US" sz="1350" dirty="0"/>
-          </a:p>
-        </p:txBody>
-      </p:sp>
-    </p:spTree>
-  </p:cSld>
-  <p:clrMapOvr>
-    <a:masterClrMapping/>
-  </p:clrMapOvr>
-</p:sld>
-</file>
-
-<file path=ppt/slides/slide8.xml><?xml version="1.0" encoding="utf-8"?>
-<p:sld xmlns:a="http://schemas.openxmlformats.org/drawingml/2006/main" xmlns:r="http://schemas.openxmlformats.org/officeDocument/2006/relationships" xmlns:p="http://schemas.openxmlformats.org/presentationml/2006/main">
-  <p:cSld name="Slide 8">
-    <p:bg>
-      <p:bgPr>
-        <a:solidFill>
-          <a:srgbClr val="FFFFFF"/>
-        </a:solidFill>
-        <a:effectLst/>
-      </p:bgPr>
-    </p:bg>
-    <p:spTree>
-      <p:nvGrpSpPr>
-        <p:cNvPr id="1" name=""/>
-        <p:cNvGrpSpPr/>
-        <p:nvPr/>
-      </p:nvGrpSpPr>
-      <p:grpSpPr>
-        <a:xfrm>
-          <a:off x="0" y="0"/>
-          <a:ext cx="0" cy="0"/>
-          <a:chOff x="0" y="0"/>
-          <a:chExt cx="0" cy="0"/>
-        </a:xfrm>
-      </p:grpSpPr>
-      <p:sp>
-        <p:nvSpPr>
-          <p:cNvPr id="2" name="Text 0"/>
-          <p:cNvSpPr/>
-          <p:nvPr/>
-        </p:nvSpPr>
-        <p:spPr>
-          <a:xfrm>
-            <a:off x="11274552" y="6492240"/>
-            <a:ext cx="457200" cy="274320"/>
-          </a:xfrm>
-          <a:prstGeom prst="rect">
-            <a:avLst/>
-          </a:prstGeom>
-          <a:noFill/>
-          <a:ln/>
-        </p:spPr>
-        <p:txBody>
-          <a:bodyPr wrap="square" lIns="0" tIns="0" rIns="0" bIns="0" rtlCol="0" anchor="ctr"/>
-          <a:lstStyle/>
-          <a:p>
-            <a:pPr marL="0" indent="0" algn="r">
-              <a:buNone/>
-            </a:pPr>
-            <a:r>
-              <a:rPr lang="en-US" sz="1100" dirty="0">
-                <a:solidFill>
-                  <a:srgbClr val="5B6472"/>
-                </a:solidFill>
-                <a:latin typeface="Calibri" pitchFamily="34" charset="0"/>
-                <a:ea typeface="Calibri" pitchFamily="34" charset="-122"/>
-                <a:cs typeface="Calibri" pitchFamily="34" charset="-120"/>
-              </a:rPr>
-              <a:t>9</a:t>
-            </a:r>
-            <a:endParaRPr lang="en-US" sz="1100" dirty="0"/>
-          </a:p>
-        </p:txBody>
-      </p:sp>
-      <p:sp>
-        <p:nvSpPr>
-          <p:cNvPr id="3" name="Shape 1"/>
-          <p:cNvSpPr/>
-          <p:nvPr/>
-        </p:nvSpPr>
-        <p:spPr>
-          <a:xfrm>
-            <a:off x="457200" y="411480"/>
-            <a:ext cx="2011680" cy="329184"/>
-          </a:xfrm>
-          <a:prstGeom prst="roundRect">
-            <a:avLst>
-              <a:gd name="adj" fmla="val 50000"/>
-            </a:avLst>
-          </a:prstGeom>
-          <a:solidFill>
-            <a:srgbClr val="1E2761"/>
-          </a:solidFill>
-          <a:ln/>
-        </p:spPr>
-        <p:txBody>
-          <a:bodyPr/>
-          <a:lstStyle/>
-          <a:p>
-            <a:endParaRPr lang="nb-NO"/>
-          </a:p>
-        </p:txBody>
-      </p:sp>
-      <p:sp>
-        <p:nvSpPr>
-          <p:cNvPr id="4" name="Text 2"/>
-          <p:cNvSpPr/>
-          <p:nvPr/>
-        </p:nvSpPr>
-        <p:spPr>
-          <a:xfrm>
-            <a:off x="457200" y="411480"/>
-            <a:ext cx="2011680" cy="329184"/>
-          </a:xfrm>
-          <a:prstGeom prst="rect">
-            <a:avLst/>
-          </a:prstGeom>
-          <a:noFill/>
-          <a:ln/>
-        </p:spPr>
-        <p:txBody>
-          <a:bodyPr wrap="square" lIns="0" tIns="0" rIns="0" bIns="0" rtlCol="0" anchor="ctr"/>
-          <a:lstStyle/>
-          <a:p>
-            <a:pPr marL="0" indent="0" algn="ctr">
-              <a:buNone/>
-            </a:pPr>
-            <a:r>
-              <a:rPr lang="en-US" sz="1100" b="1" kern="0" spc="100" dirty="0">
-                <a:solidFill>
-                  <a:srgbClr val="FFFFFF"/>
-                </a:solidFill>
-                <a:latin typeface="Calibri" pitchFamily="34" charset="0"/>
-                <a:ea typeface="Calibri" pitchFamily="34" charset="-122"/>
-                <a:cs typeface="Calibri" pitchFamily="34" charset="-120"/>
-              </a:rPr>
-              <a:t>CONCEPT</a:t>
-            </a:r>
-            <a:endParaRPr lang="en-US" sz="1100" dirty="0"/>
-          </a:p>
-        </p:txBody>
-      </p:sp>
-      <p:sp>
-        <p:nvSpPr>
-          <p:cNvPr id="5" name="Shape 3"/>
-          <p:cNvSpPr/>
-          <p:nvPr/>
-        </p:nvSpPr>
-        <p:spPr>
-          <a:xfrm>
-            <a:off x="10771632" y="384048"/>
-            <a:ext cx="822960" cy="822960"/>
-          </a:xfrm>
-          <a:prstGeom prst="ellipse">
-            <a:avLst/>
-          </a:prstGeom>
-          <a:solidFill>
-            <a:srgbClr val="2A3B8F"/>
-          </a:solidFill>
-          <a:ln/>
-        </p:spPr>
-        <p:txBody>
-          <a:bodyPr/>
-          <a:lstStyle/>
-          <a:p>
-            <a:endParaRPr lang="nb-NO"/>
-          </a:p>
-        </p:txBody>
-      </p:sp>
-      <p:pic>
-        <p:nvPicPr>
-          <p:cNvPr id="6" name="Image 0" descr="icons/layers.png"/>
-          <p:cNvPicPr>
-            <a:picLocks noChangeAspect="1"/>
-          </p:cNvPicPr>
-          <p:nvPr/>
-        </p:nvPicPr>
-        <p:blipFill>
-          <a:blip r:embed="rId3"/>
-          <a:stretch>
-            <a:fillRect/>
-          </a:stretch>
-        </p:blipFill>
-        <p:spPr>
-          <a:xfrm>
-            <a:off x="10963656" y="576072"/>
-            <a:ext cx="438912" cy="438912"/>
-          </a:xfrm>
-          <a:prstGeom prst="rect">
-            <a:avLst/>
-          </a:prstGeom>
-        </p:spPr>
-      </p:pic>
-      <p:sp>
-        <p:nvSpPr>
-          <p:cNvPr id="7" name="Text 4"/>
-          <p:cNvSpPr/>
-          <p:nvPr/>
-        </p:nvSpPr>
-        <p:spPr>
-          <a:xfrm>
-            <a:off x="457200" y="896112"/>
-            <a:ext cx="11274552" cy="822960"/>
-          </a:xfrm>
-          <a:prstGeom prst="rect">
-            <a:avLst/>
-          </a:prstGeom>
-          <a:noFill/>
-          <a:ln/>
-        </p:spPr>
-        <p:txBody>
-          <a:bodyPr wrap="square" lIns="0" tIns="0" rIns="0" bIns="0" rtlCol="0" anchor="t"/>
-          <a:lstStyle/>
-          <a:p>
-            <a:pPr marL="0" indent="0" algn="l">
-              <a:buNone/>
-            </a:pPr>
-            <a:r>
-              <a:rPr lang="en-US" sz="3200" b="1" dirty="0">
-                <a:solidFill>
-                  <a:srgbClr val="1E2761"/>
-                </a:solidFill>
-                <a:latin typeface="Cambria" pitchFamily="34" charset="0"/>
-                <a:ea typeface="Cambria" pitchFamily="34" charset="-122"/>
-                <a:cs typeface="Cambria" pitchFamily="34" charset="-120"/>
-              </a:rPr>
-              <a:t>The Three States</a:t>
-            </a:r>
-            <a:endParaRPr lang="en-US" sz="3200" dirty="0"/>
-          </a:p>
-        </p:txBody>
-      </p:sp>
-      <p:sp>
-        <p:nvSpPr>
-          <p:cNvPr id="8" name="Shape 5"/>
-          <p:cNvSpPr/>
-          <p:nvPr/>
-        </p:nvSpPr>
-        <p:spPr>
-          <a:xfrm>
-            <a:off x="822960" y="2103120"/>
-            <a:ext cx="2788920" cy="1051560"/>
-          </a:xfrm>
-          <a:prstGeom prst="roundRect">
-            <a:avLst>
-              <a:gd name="adj" fmla="val 5217"/>
-            </a:avLst>
-          </a:prstGeom>
-          <a:solidFill>
-            <a:srgbClr val="CADCFC"/>
-          </a:solidFill>
-          <a:ln/>
-        </p:spPr>
-        <p:txBody>
-          <a:bodyPr/>
-          <a:lstStyle/>
-          <a:p>
-            <a:endParaRPr lang="nb-NO"/>
-          </a:p>
-        </p:txBody>
-      </p:sp>
-      <p:sp>
-        <p:nvSpPr>
-          <p:cNvPr id="9" name="Text 6"/>
-          <p:cNvSpPr/>
-          <p:nvPr/>
-        </p:nvSpPr>
-        <p:spPr>
-          <a:xfrm>
-            <a:off x="822960" y="2212848"/>
-            <a:ext cx="2788920" cy="457200"/>
-          </a:xfrm>
-          <a:prstGeom prst="rect">
-            <a:avLst/>
-          </a:prstGeom>
-          <a:noFill/>
-          <a:ln/>
-        </p:spPr>
-        <p:txBody>
-          <a:bodyPr wrap="square" lIns="0" tIns="0" rIns="0" bIns="0" rtlCol="0" anchor="ctr"/>
-          <a:lstStyle/>
-          <a:p>
-            <a:pPr marL="0" indent="0" algn="ctr">
-              <a:buNone/>
-            </a:pPr>
-            <a:r>
-              <a:rPr lang="en-US" sz="1600" b="1" dirty="0">
-                <a:solidFill>
-                  <a:srgbClr val="1E2761"/>
-                </a:solidFill>
-                <a:latin typeface="Calibri" pitchFamily="34" charset="0"/>
-                <a:ea typeface="Calibri" pitchFamily="34" charset="-122"/>
-                <a:cs typeface="Calibri" pitchFamily="34" charset="-120"/>
-              </a:rPr>
-              <a:t>Changes</a:t>
-            </a:r>
             <a:endParaRPr lang="en-US" sz="1600" dirty="0"/>
-          </a:p>
-        </p:txBody>
-      </p:sp>
-      <p:sp>
-        <p:nvSpPr>
-          <p:cNvPr id="10" name="Text 7"/>
-          <p:cNvSpPr/>
-          <p:nvPr/>
-        </p:nvSpPr>
-        <p:spPr>
-          <a:xfrm>
-            <a:off x="822960" y="2670048"/>
-            <a:ext cx="2788920" cy="411480"/>
-          </a:xfrm>
-          <a:prstGeom prst="rect">
-            <a:avLst/>
-          </a:prstGeom>
-          <a:noFill/>
-          <a:ln/>
-        </p:spPr>
-        <p:txBody>
-          <a:bodyPr wrap="square" lIns="0" tIns="0" rIns="0" bIns="0" rtlCol="0" anchor="ctr"/>
-          <a:lstStyle/>
-          <a:p>
-            <a:pPr marL="0" indent="0" algn="ctr">
-              <a:buNone/>
-            </a:pPr>
-            <a:r>
-              <a:rPr lang="en-US" sz="1150" dirty="0">
-                <a:solidFill>
-                  <a:srgbClr val="5B6472"/>
-                </a:solidFill>
-                <a:latin typeface="Calibri" pitchFamily="34" charset="0"/>
-                <a:ea typeface="Calibri" pitchFamily="34" charset="-122"/>
-                <a:cs typeface="Calibri" pitchFamily="34" charset="-120"/>
-              </a:rPr>
-              <a:t>files you've edited</a:t>
-            </a:r>
-            <a:endParaRPr lang="en-US" sz="1150" dirty="0"/>
-          </a:p>
-        </p:txBody>
-      </p:sp>
-      <p:sp>
-        <p:nvSpPr>
-          <p:cNvPr id="11" name="Shape 8"/>
-          <p:cNvSpPr/>
-          <p:nvPr/>
-        </p:nvSpPr>
-        <p:spPr>
-          <a:xfrm>
-            <a:off x="4663440" y="2103120"/>
-            <a:ext cx="2788920" cy="1051560"/>
-          </a:xfrm>
-          <a:prstGeom prst="roundRect">
-            <a:avLst>
-              <a:gd name="adj" fmla="val 5217"/>
-            </a:avLst>
-          </a:prstGeom>
-          <a:solidFill>
-            <a:srgbClr val="CADCFC"/>
-          </a:solidFill>
-          <a:ln/>
-        </p:spPr>
-        <p:txBody>
-          <a:bodyPr/>
-          <a:lstStyle/>
-          <a:p>
-            <a:endParaRPr lang="nb-NO"/>
-          </a:p>
-        </p:txBody>
-      </p:sp>
-      <p:sp>
-        <p:nvSpPr>
-          <p:cNvPr id="12" name="Text 9"/>
-          <p:cNvSpPr/>
-          <p:nvPr/>
-        </p:nvSpPr>
-        <p:spPr>
-          <a:xfrm>
-            <a:off x="4663440" y="2212848"/>
-            <a:ext cx="2788920" cy="457200"/>
-          </a:xfrm>
-          <a:prstGeom prst="rect">
-            <a:avLst/>
-          </a:prstGeom>
-          <a:noFill/>
-          <a:ln/>
-        </p:spPr>
-        <p:txBody>
-          <a:bodyPr wrap="square" lIns="0" tIns="0" rIns="0" bIns="0" rtlCol="0" anchor="ctr"/>
-          <a:lstStyle/>
-          <a:p>
-            <a:pPr marL="0" indent="0" algn="ctr">
-              <a:buNone/>
-            </a:pPr>
-            <a:r>
-              <a:rPr lang="en-US" sz="1600" b="1" dirty="0">
-                <a:solidFill>
-                  <a:srgbClr val="1E2761"/>
-                </a:solidFill>
-                <a:latin typeface="Calibri" pitchFamily="34" charset="0"/>
-                <a:ea typeface="Calibri" pitchFamily="34" charset="-122"/>
-                <a:cs typeface="Calibri" pitchFamily="34" charset="-120"/>
-              </a:rPr>
-              <a:t>Staged Changes</a:t>
-            </a:r>
-            <a:endParaRPr lang="en-US" sz="1600" dirty="0"/>
-          </a:p>
-        </p:txBody>
-      </p:sp>
-      <p:sp>
-        <p:nvSpPr>
-          <p:cNvPr id="13" name="Text 10"/>
-          <p:cNvSpPr/>
-          <p:nvPr/>
-        </p:nvSpPr>
-        <p:spPr>
-          <a:xfrm>
-            <a:off x="4663440" y="2670048"/>
-            <a:ext cx="2788920" cy="411480"/>
-          </a:xfrm>
-          <a:prstGeom prst="rect">
-            <a:avLst/>
-          </a:prstGeom>
-          <a:noFill/>
-          <a:ln/>
-        </p:spPr>
-        <p:txBody>
-          <a:bodyPr wrap="square" lIns="0" tIns="0" rIns="0" bIns="0" rtlCol="0" anchor="ctr"/>
-          <a:lstStyle/>
-          <a:p>
-            <a:pPr marL="0" indent="0" algn="ctr">
-              <a:buNone/>
-            </a:pPr>
-            <a:r>
-              <a:rPr lang="en-US" sz="1150" dirty="0">
-                <a:solidFill>
-                  <a:srgbClr val="5B6472"/>
-                </a:solidFill>
-                <a:latin typeface="Calibri" pitchFamily="34" charset="0"/>
-                <a:ea typeface="Calibri" pitchFamily="34" charset="-122"/>
-                <a:cs typeface="Calibri" pitchFamily="34" charset="-120"/>
-              </a:rPr>
-              <a:t>marked “ready to save”</a:t>
-            </a:r>
-            <a:endParaRPr lang="en-US" sz="1150" dirty="0"/>
-          </a:p>
-        </p:txBody>
-      </p:sp>
-      <p:sp>
-        <p:nvSpPr>
-          <p:cNvPr id="14" name="Shape 11"/>
-          <p:cNvSpPr/>
-          <p:nvPr/>
-        </p:nvSpPr>
-        <p:spPr>
-          <a:xfrm>
-            <a:off x="8503920" y="2103120"/>
-            <a:ext cx="2788920" cy="1051560"/>
-          </a:xfrm>
-          <a:prstGeom prst="roundRect">
-            <a:avLst>
-              <a:gd name="adj" fmla="val 5217"/>
-            </a:avLst>
-          </a:prstGeom>
-          <a:solidFill>
-            <a:srgbClr val="CADCFC"/>
-          </a:solidFill>
-          <a:ln/>
-        </p:spPr>
-        <p:txBody>
-          <a:bodyPr/>
-          <a:lstStyle/>
-          <a:p>
-            <a:endParaRPr lang="nb-NO"/>
-          </a:p>
-        </p:txBody>
-      </p:sp>
-      <p:sp>
-        <p:nvSpPr>
-          <p:cNvPr id="15" name="Text 12"/>
-          <p:cNvSpPr/>
-          <p:nvPr/>
-        </p:nvSpPr>
-        <p:spPr>
-          <a:xfrm>
-            <a:off x="8503920" y="2212848"/>
-            <a:ext cx="2788920" cy="457200"/>
-          </a:xfrm>
-          <a:prstGeom prst="rect">
-            <a:avLst/>
-          </a:prstGeom>
-          <a:noFill/>
-          <a:ln/>
-        </p:spPr>
-        <p:txBody>
-          <a:bodyPr wrap="square" lIns="0" tIns="0" rIns="0" bIns="0" rtlCol="0" anchor="ctr"/>
-          <a:lstStyle/>
-          <a:p>
-            <a:pPr marL="0" indent="0" algn="ctr">
-              <a:buNone/>
-            </a:pPr>
-            <a:r>
-              <a:rPr lang="en-US" sz="1600" b="1" dirty="0">
-                <a:solidFill>
-                  <a:srgbClr val="1E2761"/>
-                </a:solidFill>
-                <a:latin typeface="Calibri" pitchFamily="34" charset="0"/>
-                <a:ea typeface="Calibri" pitchFamily="34" charset="-122"/>
-                <a:cs typeface="Calibri" pitchFamily="34" charset="-120"/>
-              </a:rPr>
-              <a:t>Commit History</a:t>
-            </a:r>
-            <a:endParaRPr lang="en-US" sz="1600" dirty="0"/>
-          </a:p>
-        </p:txBody>
-      </p:sp>
-      <p:sp>
-        <p:nvSpPr>
-          <p:cNvPr id="16" name="Text 13"/>
-          <p:cNvSpPr/>
-          <p:nvPr/>
-        </p:nvSpPr>
-        <p:spPr>
-          <a:xfrm>
-            <a:off x="8503920" y="2670048"/>
-            <a:ext cx="2788920" cy="411480"/>
-          </a:xfrm>
-          <a:prstGeom prst="rect">
-            <a:avLst/>
-          </a:prstGeom>
-          <a:noFill/>
-          <a:ln/>
-        </p:spPr>
-        <p:txBody>
-          <a:bodyPr wrap="square" lIns="0" tIns="0" rIns="0" bIns="0" rtlCol="0" anchor="ctr"/>
-          <a:lstStyle/>
-          <a:p>
-            <a:pPr marL="0" indent="0" algn="ctr">
-              <a:buNone/>
-            </a:pPr>
-            <a:r>
-              <a:rPr lang="en-US" sz="1150" dirty="0">
-                <a:solidFill>
-                  <a:srgbClr val="5B6472"/>
-                </a:solidFill>
-                <a:latin typeface="Calibri" pitchFamily="34" charset="0"/>
-                <a:ea typeface="Calibri" pitchFamily="34" charset="-122"/>
-                <a:cs typeface="Calibri" pitchFamily="34" charset="-120"/>
-              </a:rPr>
-              <a:t>the saved snapshot</a:t>
-            </a:r>
-            <a:endParaRPr lang="en-US" sz="1150" dirty="0"/>
-          </a:p>
-        </p:txBody>
-      </p:sp>
-      <p:sp>
-        <p:nvSpPr>
-          <p:cNvPr id="17" name="Shape 14"/>
-          <p:cNvSpPr/>
-          <p:nvPr/>
-        </p:nvSpPr>
-        <p:spPr>
-          <a:xfrm>
-            <a:off x="3639312" y="2519172"/>
-            <a:ext cx="1005840" cy="219456"/>
-          </a:xfrm>
-          <a:prstGeom prst="rightArrow">
-            <a:avLst/>
-          </a:prstGeom>
-          <a:solidFill>
-            <a:srgbClr val="F96167"/>
-          </a:solidFill>
-          <a:ln/>
-        </p:spPr>
-        <p:txBody>
-          <a:bodyPr/>
-          <a:lstStyle/>
-          <a:p>
-            <a:endParaRPr lang="nb-NO"/>
-          </a:p>
-        </p:txBody>
-      </p:sp>
-      <p:sp>
-        <p:nvSpPr>
-          <p:cNvPr id="18" name="Shape 15"/>
-          <p:cNvSpPr/>
-          <p:nvPr/>
-        </p:nvSpPr>
-        <p:spPr>
-          <a:xfrm>
-            <a:off x="7479792" y="2519172"/>
-            <a:ext cx="1005840" cy="219456"/>
-          </a:xfrm>
-          <a:prstGeom prst="rightArrow">
-            <a:avLst/>
-          </a:prstGeom>
-          <a:solidFill>
-            <a:srgbClr val="F96167"/>
-          </a:solidFill>
-          <a:ln/>
-        </p:spPr>
-        <p:txBody>
-          <a:bodyPr/>
-          <a:lstStyle/>
-          <a:p>
-            <a:endParaRPr lang="nb-NO"/>
-          </a:p>
-        </p:txBody>
-      </p:sp>
-      <p:sp>
-        <p:nvSpPr>
-          <p:cNvPr id="19" name="Text 16"/>
-          <p:cNvSpPr/>
-          <p:nvPr/>
-        </p:nvSpPr>
-        <p:spPr>
-          <a:xfrm>
-            <a:off x="3639312" y="1536192"/>
-            <a:ext cx="1005840" cy="502920"/>
-          </a:xfrm>
-          <a:prstGeom prst="rect">
-            <a:avLst/>
-          </a:prstGeom>
-          <a:noFill/>
-          <a:ln/>
-        </p:spPr>
-        <p:txBody>
-          <a:bodyPr wrap="square" lIns="0" tIns="0" rIns="0" bIns="0" rtlCol="0" anchor="ctr"/>
-          <a:lstStyle/>
-          <a:p>
-            <a:pPr marL="0" indent="0" algn="ctr">
-              <a:buNone/>
-            </a:pPr>
-            <a:r>
-              <a:rPr lang="en-US" sz="1100" dirty="0">
-                <a:solidFill>
-                  <a:srgbClr val="1E2761"/>
-                </a:solidFill>
-                <a:latin typeface="Calibri" pitchFamily="34" charset="0"/>
-                <a:ea typeface="Calibri" pitchFamily="34" charset="-122"/>
-                <a:cs typeface="Calibri" pitchFamily="34" charset="-120"/>
-              </a:rPr>
-              <a:t>click +</a:t>
-            </a:r>
-            <a:endParaRPr lang="en-US" sz="1100" dirty="0"/>
-          </a:p>
-          <a:p>
-            <a:pPr marL="0" indent="0" algn="ctr">
-              <a:buNone/>
-            </a:pPr>
-            <a:r>
-              <a:rPr lang="en-US" sz="1100" dirty="0">
-                <a:solidFill>
-                  <a:srgbClr val="1E2761"/>
-                </a:solidFill>
-                <a:latin typeface="Calibri" pitchFamily="34" charset="0"/>
-                <a:ea typeface="Calibri" pitchFamily="34" charset="-122"/>
-                <a:cs typeface="Calibri" pitchFamily="34" charset="-120"/>
-              </a:rPr>
-              <a:t>(stage)</a:t>
-            </a:r>
-            <a:endParaRPr lang="en-US" sz="1100" dirty="0"/>
-          </a:p>
-        </p:txBody>
-      </p:sp>
-      <p:sp>
-        <p:nvSpPr>
-          <p:cNvPr id="20" name="Text 17"/>
-          <p:cNvSpPr/>
-          <p:nvPr/>
-        </p:nvSpPr>
-        <p:spPr>
-          <a:xfrm>
-            <a:off x="7479792" y="1536192"/>
-            <a:ext cx="1005840" cy="502920"/>
-          </a:xfrm>
-          <a:prstGeom prst="rect">
-            <a:avLst/>
-          </a:prstGeom>
-          <a:noFill/>
-          <a:ln/>
-        </p:spPr>
-        <p:txBody>
-          <a:bodyPr wrap="square" lIns="0" tIns="0" rIns="0" bIns="0" rtlCol="0" anchor="ctr"/>
-          <a:lstStyle/>
-          <a:p>
-            <a:pPr marL="0" indent="0" algn="ctr">
-              <a:buNone/>
-            </a:pPr>
-            <a:r>
-              <a:rPr lang="en-US" sz="1100" dirty="0">
-                <a:solidFill>
-                  <a:srgbClr val="1E2761"/>
-                </a:solidFill>
-                <a:latin typeface="Calibri" pitchFamily="34" charset="0"/>
-                <a:ea typeface="Calibri" pitchFamily="34" charset="-122"/>
-                <a:cs typeface="Calibri" pitchFamily="34" charset="-120"/>
-              </a:rPr>
-              <a:t>click ✓</a:t>
-            </a:r>
-            <a:endParaRPr lang="en-US" sz="1100" dirty="0"/>
-          </a:p>
-          <a:p>
-            <a:pPr marL="0" indent="0" algn="ctr">
-              <a:buNone/>
-            </a:pPr>
-            <a:r>
-              <a:rPr lang="en-US" sz="1100" dirty="0">
-                <a:solidFill>
-                  <a:srgbClr val="1E2761"/>
-                </a:solidFill>
-                <a:latin typeface="Calibri" pitchFamily="34" charset="0"/>
-                <a:ea typeface="Calibri" pitchFamily="34" charset="-122"/>
-                <a:cs typeface="Calibri" pitchFamily="34" charset="-120"/>
-              </a:rPr>
-              <a:t>(commit)</a:t>
-            </a:r>
-            <a:endParaRPr lang="en-US" sz="1100" dirty="0"/>
-          </a:p>
-        </p:txBody>
-      </p:sp>
-      <p:sp>
-        <p:nvSpPr>
-          <p:cNvPr id="21" name="Text 18"/>
-          <p:cNvSpPr/>
-          <p:nvPr/>
-        </p:nvSpPr>
-        <p:spPr>
-          <a:xfrm>
-            <a:off x="822960" y="3703320"/>
-            <a:ext cx="10543032" cy="1554480"/>
-          </a:xfrm>
-          <a:prstGeom prst="rect">
-            <a:avLst/>
-          </a:prstGeom>
-          <a:noFill/>
-          <a:ln/>
-        </p:spPr>
-        <p:txBody>
-          <a:bodyPr wrap="square" lIns="0" tIns="0" rIns="0" bIns="0" rtlCol="0" anchor="t"/>
-          <a:lstStyle/>
-          <a:p>
-            <a:pPr marL="342900" indent="-342900" algn="l">
-              <a:spcAft>
-                <a:spcPts val="1200"/>
-              </a:spcAft>
-              <a:buSzPct val="100000"/>
-              <a:buChar char="•"/>
-            </a:pPr>
-            <a:r>
-              <a:rPr lang="en-US" sz="1600" dirty="0">
-                <a:solidFill>
-                  <a:srgbClr val="1E2761"/>
-                </a:solidFill>
-                <a:latin typeface="Calibri" pitchFamily="34" charset="0"/>
-                <a:ea typeface="Calibri" pitchFamily="34" charset="-122"/>
-                <a:cs typeface="Calibri" pitchFamily="34" charset="-120"/>
-              </a:rPr>
-              <a:t>Changes — files you've edited since the last commit, listed under “Changes” in Source Control</a:t>
-            </a:r>
-            <a:endParaRPr lang="en-US" sz="1600" dirty="0"/>
-          </a:p>
-          <a:p>
-            <a:pPr marL="342900" indent="-342900" algn="l">
-              <a:spcAft>
-                <a:spcPts val="1200"/>
-              </a:spcAft>
-              <a:buSzPct val="100000"/>
-              <a:buChar char="•"/>
-            </a:pPr>
-            <a:r>
-              <a:rPr lang="en-US" sz="1600" dirty="0">
-                <a:solidFill>
-                  <a:srgbClr val="1E2761"/>
-                </a:solidFill>
-                <a:latin typeface="Calibri" pitchFamily="34" charset="0"/>
-                <a:ea typeface="Calibri" pitchFamily="34" charset="-122"/>
-                <a:cs typeface="Calibri" pitchFamily="34" charset="-120"/>
-              </a:rPr>
-              <a:t>Staged Changes — files marked as ready to save, by clicking the + next to a file</a:t>
-            </a:r>
-            <a:endParaRPr lang="en-US" sz="1600" dirty="0"/>
-          </a:p>
-          <a:p>
-            <a:pPr marL="342900" indent="-342900" algn="l">
-              <a:spcAft>
-                <a:spcPts val="1200"/>
-              </a:spcAft>
-              <a:buSzPct val="100000"/>
-              <a:buChar char="•"/>
-            </a:pPr>
-            <a:r>
-              <a:rPr lang="en-US" sz="1600" dirty="0">
-                <a:solidFill>
-                  <a:srgbClr val="1E2761"/>
-                </a:solidFill>
-                <a:latin typeface="Calibri" pitchFamily="34" charset="0"/>
-                <a:ea typeface="Calibri" pitchFamily="34" charset="-122"/>
-                <a:cs typeface="Calibri" pitchFamily="34" charset="-120"/>
-              </a:rPr>
-              <a:t>Commit — the actual snapshot: write a message, click ✓ Commit</a:t>
-            </a:r>
-          </a:p>
-          <a:p>
-            <a:pPr marL="342900" indent="-342900" algn="l">
-              <a:spcAft>
-                <a:spcPts val="1200"/>
-              </a:spcAft>
-              <a:buSzPct val="100000"/>
-              <a:buChar char="•"/>
-            </a:pPr>
-            <a:endParaRPr lang="en-US" sz="1600" dirty="0"/>
-          </a:p>
-        </p:txBody>
-      </p:sp>
-    </p:spTree>
-  </p:cSld>
-  <p:clrMapOvr>
-    <a:masterClrMapping/>
-  </p:clrMapOvr>
-</p:sld>
-</file>
-
-<file path=ppt/slides/slide9.xml><?xml version="1.0" encoding="utf-8"?>
-<p:sld xmlns:a="http://schemas.openxmlformats.org/drawingml/2006/main" xmlns:r="http://schemas.openxmlformats.org/officeDocument/2006/relationships" xmlns:p="http://schemas.openxmlformats.org/presentationml/2006/main">
-  <p:cSld name="Slide 9">
-    <p:bg>
-      <p:bgPr>
-        <a:solidFill>
-          <a:srgbClr val="FFFFFF"/>
-        </a:solidFill>
-        <a:effectLst/>
-      </p:bgPr>
-    </p:bg>
-    <p:spTree>
-      <p:nvGrpSpPr>
-        <p:cNvPr id="1" name=""/>
-        <p:cNvGrpSpPr/>
-        <p:nvPr/>
-      </p:nvGrpSpPr>
-      <p:grpSpPr>
-        <a:xfrm>
-          <a:off x="0" y="0"/>
-          <a:ext cx="0" cy="0"/>
-          <a:chOff x="0" y="0"/>
-          <a:chExt cx="0" cy="0"/>
-        </a:xfrm>
-      </p:grpSpPr>
-      <p:sp>
-        <p:nvSpPr>
-          <p:cNvPr id="2" name="Text 0"/>
-          <p:cNvSpPr/>
-          <p:nvPr/>
-        </p:nvSpPr>
-        <p:spPr>
-          <a:xfrm>
-            <a:off x="11274552" y="6492240"/>
-            <a:ext cx="457200" cy="274320"/>
-          </a:xfrm>
-          <a:prstGeom prst="rect">
-            <a:avLst/>
-          </a:prstGeom>
-          <a:noFill/>
-          <a:ln/>
-        </p:spPr>
-        <p:txBody>
-          <a:bodyPr wrap="square" lIns="0" tIns="0" rIns="0" bIns="0" rtlCol="0" anchor="ctr"/>
-          <a:lstStyle/>
-          <a:p>
-            <a:pPr marL="0" indent="0" algn="r">
-              <a:buNone/>
-            </a:pPr>
-            <a:r>
-              <a:rPr lang="en-US" sz="1100" dirty="0">
-                <a:solidFill>
-                  <a:srgbClr val="5B6472"/>
-                </a:solidFill>
-                <a:latin typeface="Calibri" pitchFamily="34" charset="0"/>
-                <a:ea typeface="Calibri" pitchFamily="34" charset="-122"/>
-                <a:cs typeface="Calibri" pitchFamily="34" charset="-120"/>
-              </a:rPr>
-              <a:t>10</a:t>
-            </a:r>
-            <a:endParaRPr lang="en-US" sz="1100" dirty="0"/>
-          </a:p>
-        </p:txBody>
-      </p:sp>
-      <p:sp>
-        <p:nvSpPr>
-          <p:cNvPr id="3" name="Shape 1"/>
-          <p:cNvSpPr/>
-          <p:nvPr/>
-        </p:nvSpPr>
-        <p:spPr>
-          <a:xfrm>
-            <a:off x="457200" y="411480"/>
-            <a:ext cx="2011680" cy="329184"/>
-          </a:xfrm>
-          <a:prstGeom prst="roundRect">
-            <a:avLst>
-              <a:gd name="adj" fmla="val 50000"/>
-            </a:avLst>
-          </a:prstGeom>
-          <a:solidFill>
-            <a:srgbClr val="1E2761"/>
-          </a:solidFill>
-          <a:ln/>
-        </p:spPr>
-        <p:txBody>
-          <a:bodyPr/>
-          <a:lstStyle/>
-          <a:p>
-            <a:endParaRPr lang="nb-NO"/>
-          </a:p>
-        </p:txBody>
-      </p:sp>
-      <p:sp>
-        <p:nvSpPr>
-          <p:cNvPr id="4" name="Text 2"/>
-          <p:cNvSpPr/>
-          <p:nvPr/>
-        </p:nvSpPr>
-        <p:spPr>
-          <a:xfrm>
-            <a:off x="457200" y="411480"/>
-            <a:ext cx="2011680" cy="329184"/>
-          </a:xfrm>
-          <a:prstGeom prst="rect">
-            <a:avLst/>
-          </a:prstGeom>
-          <a:noFill/>
-          <a:ln/>
-        </p:spPr>
-        <p:txBody>
-          <a:bodyPr wrap="square" lIns="0" tIns="0" rIns="0" bIns="0" rtlCol="0" anchor="ctr"/>
-          <a:lstStyle/>
-          <a:p>
-            <a:pPr marL="0" indent="0" algn="ctr">
-              <a:buNone/>
-            </a:pPr>
-            <a:r>
-              <a:rPr lang="en-US" sz="1100" b="1" kern="0" spc="100" dirty="0">
-                <a:solidFill>
-                  <a:srgbClr val="FFFFFF"/>
-                </a:solidFill>
-                <a:latin typeface="Calibri" pitchFamily="34" charset="0"/>
-                <a:ea typeface="Calibri" pitchFamily="34" charset="-122"/>
-                <a:cs typeface="Calibri" pitchFamily="34" charset="-120"/>
-              </a:rPr>
-              <a:t>EXERCISE</a:t>
-            </a:r>
-            <a:endParaRPr lang="en-US" sz="1100" dirty="0"/>
-          </a:p>
-        </p:txBody>
-      </p:sp>
-      <p:sp>
-        <p:nvSpPr>
-          <p:cNvPr id="7" name="Shape 5"/>
-          <p:cNvSpPr/>
-          <p:nvPr/>
-        </p:nvSpPr>
-        <p:spPr>
-          <a:xfrm>
-            <a:off x="10771632" y="384048"/>
-            <a:ext cx="822960" cy="822960"/>
-          </a:xfrm>
-          <a:prstGeom prst="ellipse">
-            <a:avLst/>
-          </a:prstGeom>
-          <a:solidFill>
-            <a:srgbClr val="2A3B8F"/>
-          </a:solidFill>
-          <a:ln/>
-        </p:spPr>
-        <p:txBody>
-          <a:bodyPr/>
-          <a:lstStyle/>
-          <a:p>
-            <a:endParaRPr lang="nb-NO"/>
-          </a:p>
-        </p:txBody>
-      </p:sp>
-      <p:pic>
-        <p:nvPicPr>
-          <p:cNvPr id="8" name="Image 0" descr="icons/play.png"/>
-          <p:cNvPicPr>
-            <a:picLocks noChangeAspect="1"/>
-          </p:cNvPicPr>
-          <p:nvPr/>
-        </p:nvPicPr>
-        <p:blipFill>
-          <a:blip r:embed="rId3"/>
-          <a:stretch>
-            <a:fillRect/>
-          </a:stretch>
-        </p:blipFill>
-        <p:spPr>
-          <a:xfrm>
-            <a:off x="10963656" y="576072"/>
-            <a:ext cx="438912" cy="438912"/>
-          </a:xfrm>
-          <a:prstGeom prst="rect">
-            <a:avLst/>
-          </a:prstGeom>
-        </p:spPr>
-      </p:pic>
-      <p:sp>
-        <p:nvSpPr>
-          <p:cNvPr id="9" name="Text 6"/>
-          <p:cNvSpPr/>
-          <p:nvPr/>
-        </p:nvSpPr>
-        <p:spPr>
-          <a:xfrm>
-            <a:off x="457200" y="896112"/>
-            <a:ext cx="11274552" cy="822960"/>
-          </a:xfrm>
-          <a:prstGeom prst="rect">
-            <a:avLst/>
-          </a:prstGeom>
-          <a:noFill/>
-          <a:ln/>
-        </p:spPr>
-        <p:txBody>
-          <a:bodyPr wrap="square" lIns="0" tIns="0" rIns="0" bIns="0" rtlCol="0" anchor="t"/>
-          <a:lstStyle/>
-          <a:p>
-            <a:pPr marL="0" indent="0" algn="l">
-              <a:buNone/>
-            </a:pPr>
-            <a:r>
-              <a:rPr lang="en-US" sz="3200" b="1" dirty="0">
-                <a:solidFill>
-                  <a:srgbClr val="1E2761"/>
-                </a:solidFill>
-                <a:latin typeface="Cambria" pitchFamily="34" charset="0"/>
-                <a:ea typeface="Cambria" pitchFamily="34" charset="-122"/>
-                <a:cs typeface="Cambria" pitchFamily="34" charset="-120"/>
-              </a:rPr>
-              <a:t>Exercise 1 — Divide Two Integers</a:t>
-            </a:r>
-            <a:endParaRPr lang="en-US" sz="3200" dirty="0"/>
-          </a:p>
-        </p:txBody>
-      </p:sp>
-      <p:sp>
-        <p:nvSpPr>
-          <p:cNvPr id="10" name="Shape 7"/>
-          <p:cNvSpPr/>
-          <p:nvPr/>
-        </p:nvSpPr>
-        <p:spPr>
-          <a:xfrm>
-            <a:off x="822960" y="1828800"/>
-            <a:ext cx="384048" cy="384048"/>
-          </a:xfrm>
-          <a:prstGeom prst="ellipse">
-            <a:avLst/>
-          </a:prstGeom>
-          <a:solidFill>
-            <a:srgbClr val="F96167"/>
-          </a:solidFill>
-          <a:ln/>
-        </p:spPr>
-        <p:txBody>
-          <a:bodyPr/>
-          <a:lstStyle/>
-          <a:p>
-            <a:endParaRPr lang="nb-NO"/>
-          </a:p>
-        </p:txBody>
-      </p:sp>
-      <p:sp>
-        <p:nvSpPr>
-          <p:cNvPr id="11" name="Text 8"/>
-          <p:cNvSpPr/>
-          <p:nvPr/>
-        </p:nvSpPr>
-        <p:spPr>
-          <a:xfrm>
-            <a:off x="822960" y="1828800"/>
-            <a:ext cx="384048" cy="384048"/>
-          </a:xfrm>
-          <a:prstGeom prst="rect">
-            <a:avLst/>
-          </a:prstGeom>
-          <a:noFill/>
-          <a:ln/>
-        </p:spPr>
-        <p:txBody>
-          <a:bodyPr wrap="square" lIns="0" tIns="0" rIns="0" bIns="0" rtlCol="0" anchor="ctr"/>
-          <a:lstStyle/>
-          <a:p>
-            <a:pPr marL="0" indent="0" algn="ctr">
-              <a:buNone/>
-            </a:pPr>
-            <a:r>
-              <a:rPr lang="en-US" sz="1400" b="1" dirty="0">
-                <a:solidFill>
-                  <a:srgbClr val="FFFFFF"/>
-                </a:solidFill>
-                <a:latin typeface="Calibri" pitchFamily="34" charset="0"/>
-                <a:ea typeface="Calibri" pitchFamily="34" charset="-122"/>
-                <a:cs typeface="Calibri" pitchFamily="34" charset="-120"/>
-              </a:rPr>
-              <a:t>1</a:t>
-            </a:r>
-            <a:endParaRPr lang="en-US" sz="1400" dirty="0"/>
-          </a:p>
-        </p:txBody>
-      </p:sp>
-      <p:sp>
-        <p:nvSpPr>
-          <p:cNvPr id="12" name="Text 9"/>
-          <p:cNvSpPr/>
-          <p:nvPr/>
-        </p:nvSpPr>
-        <p:spPr>
-          <a:xfrm>
-            <a:off x="1371600" y="1801368"/>
-            <a:ext cx="9966960" cy="566928"/>
-          </a:xfrm>
-          <a:prstGeom prst="rect">
-            <a:avLst/>
-          </a:prstGeom>
-          <a:noFill/>
-          <a:ln/>
-        </p:spPr>
-        <p:txBody>
-          <a:bodyPr wrap="square" lIns="0" tIns="0" rIns="0" bIns="0" rtlCol="0" anchor="ctr"/>
-          <a:lstStyle/>
-          <a:p>
-            <a:pPr marL="0" indent="0" algn="l">
-              <a:buNone/>
-            </a:pPr>
-            <a:r>
-              <a:rPr lang="en-US" sz="1550" dirty="0">
-                <a:solidFill>
-                  <a:srgbClr val="1E2761"/>
-                </a:solidFill>
-                <a:latin typeface="Calibri" pitchFamily="34" charset="0"/>
-                <a:ea typeface="Calibri" pitchFamily="34" charset="-122"/>
-                <a:cs typeface="Calibri" pitchFamily="34" charset="-120"/>
-              </a:rPr>
-              <a:t>In week02, create a new file: ex1.py</a:t>
-            </a:r>
-            <a:endParaRPr lang="en-US" sz="1550" dirty="0"/>
-          </a:p>
-        </p:txBody>
-      </p:sp>
-      <p:sp>
-        <p:nvSpPr>
-          <p:cNvPr id="13" name="Shape 10"/>
-          <p:cNvSpPr/>
-          <p:nvPr/>
-        </p:nvSpPr>
-        <p:spPr>
-          <a:xfrm>
-            <a:off x="822960" y="2395728"/>
-            <a:ext cx="384048" cy="384048"/>
-          </a:xfrm>
-          <a:prstGeom prst="ellipse">
-            <a:avLst/>
-          </a:prstGeom>
-          <a:solidFill>
-            <a:srgbClr val="F96167"/>
-          </a:solidFill>
-          <a:ln/>
-        </p:spPr>
-        <p:txBody>
-          <a:bodyPr/>
-          <a:lstStyle/>
-          <a:p>
-            <a:endParaRPr lang="nb-NO"/>
-          </a:p>
-        </p:txBody>
-      </p:sp>
-      <p:sp>
-        <p:nvSpPr>
-          <p:cNvPr id="14" name="Text 11"/>
-          <p:cNvSpPr/>
-          <p:nvPr/>
-        </p:nvSpPr>
-        <p:spPr>
-          <a:xfrm>
-            <a:off x="822960" y="2395728"/>
-            <a:ext cx="384048" cy="384048"/>
-          </a:xfrm>
-          <a:prstGeom prst="rect">
-            <a:avLst/>
-          </a:prstGeom>
-          <a:noFill/>
-          <a:ln/>
-        </p:spPr>
-        <p:txBody>
-          <a:bodyPr wrap="square" lIns="0" tIns="0" rIns="0" bIns="0" rtlCol="0" anchor="ctr"/>
-          <a:lstStyle/>
-          <a:p>
-            <a:pPr marL="0" indent="0" algn="ctr">
-              <a:buNone/>
-            </a:pPr>
-            <a:r>
-              <a:rPr lang="en-US" sz="1400" b="1" dirty="0">
-                <a:solidFill>
-                  <a:srgbClr val="FFFFFF"/>
-                </a:solidFill>
-                <a:latin typeface="Calibri" pitchFamily="34" charset="0"/>
-                <a:ea typeface="Calibri" pitchFamily="34" charset="-122"/>
-                <a:cs typeface="Calibri" pitchFamily="34" charset="-120"/>
-              </a:rPr>
-              <a:t>2</a:t>
-            </a:r>
-            <a:endParaRPr lang="en-US" sz="1400" dirty="0"/>
-          </a:p>
-        </p:txBody>
-      </p:sp>
-      <p:sp>
-        <p:nvSpPr>
-          <p:cNvPr id="15" name="Text 12"/>
-          <p:cNvSpPr/>
-          <p:nvPr/>
-        </p:nvSpPr>
-        <p:spPr>
-          <a:xfrm>
-            <a:off x="1371600" y="2368296"/>
-            <a:ext cx="9966960" cy="566928"/>
-          </a:xfrm>
-          <a:prstGeom prst="rect">
-            <a:avLst/>
-          </a:prstGeom>
-          <a:noFill/>
-          <a:ln/>
-        </p:spPr>
-        <p:txBody>
-          <a:bodyPr wrap="square" lIns="0" tIns="0" rIns="0" bIns="0" rtlCol="0" anchor="ctr"/>
-          <a:lstStyle/>
-          <a:p>
-            <a:pPr marL="0" indent="0" algn="l">
-              <a:buNone/>
-            </a:pPr>
-            <a:r>
-              <a:rPr lang="en-US" sz="1550" dirty="0">
-                <a:solidFill>
-                  <a:srgbClr val="1E2761"/>
-                </a:solidFill>
-                <a:latin typeface="Calibri" pitchFamily="34" charset="0"/>
-                <a:ea typeface="Calibri" pitchFamily="34" charset="-122"/>
-                <a:cs typeface="Calibri" pitchFamily="34" charset="-120"/>
-              </a:rPr>
-              <a:t>Write a program that prompts for two integers (input), divides the first by the second, and displays the result with one decimal</a:t>
-            </a:r>
-            <a:endParaRPr lang="en-US" sz="1550" dirty="0"/>
-          </a:p>
-        </p:txBody>
-      </p:sp>
-      <p:sp>
-        <p:nvSpPr>
-          <p:cNvPr id="16" name="Shape 13"/>
-          <p:cNvSpPr/>
-          <p:nvPr/>
-        </p:nvSpPr>
-        <p:spPr>
-          <a:xfrm>
-            <a:off x="822960" y="2962656"/>
-            <a:ext cx="384048" cy="384048"/>
-          </a:xfrm>
-          <a:prstGeom prst="ellipse">
-            <a:avLst/>
-          </a:prstGeom>
-          <a:solidFill>
-            <a:srgbClr val="F96167"/>
-          </a:solidFill>
-          <a:ln/>
-        </p:spPr>
-        <p:txBody>
-          <a:bodyPr/>
-          <a:lstStyle/>
-          <a:p>
-            <a:endParaRPr lang="nb-NO"/>
-          </a:p>
-        </p:txBody>
-      </p:sp>
-      <p:sp>
-        <p:nvSpPr>
-          <p:cNvPr id="17" name="Text 14"/>
-          <p:cNvSpPr/>
-          <p:nvPr/>
-        </p:nvSpPr>
-        <p:spPr>
-          <a:xfrm>
-            <a:off x="822960" y="2962656"/>
-            <a:ext cx="384048" cy="384048"/>
-          </a:xfrm>
-          <a:prstGeom prst="rect">
-            <a:avLst/>
-          </a:prstGeom>
-          <a:noFill/>
-          <a:ln/>
-        </p:spPr>
-        <p:txBody>
-          <a:bodyPr wrap="square" lIns="0" tIns="0" rIns="0" bIns="0" rtlCol="0" anchor="ctr"/>
-          <a:lstStyle/>
-          <a:p>
-            <a:pPr marL="0" indent="0" algn="ctr">
-              <a:buNone/>
-            </a:pPr>
-            <a:r>
-              <a:rPr lang="en-US" sz="1400" b="1" dirty="0">
-                <a:solidFill>
-                  <a:srgbClr val="FFFFFF"/>
-                </a:solidFill>
-                <a:latin typeface="Calibri" pitchFamily="34" charset="0"/>
-                <a:ea typeface="Calibri" pitchFamily="34" charset="-122"/>
-                <a:cs typeface="Calibri" pitchFamily="34" charset="-120"/>
-              </a:rPr>
-              <a:t>3</a:t>
-            </a:r>
-            <a:endParaRPr lang="en-US" sz="1400" dirty="0"/>
-          </a:p>
-        </p:txBody>
-      </p:sp>
-      <p:sp>
-        <p:nvSpPr>
-          <p:cNvPr id="18" name="Text 15"/>
-          <p:cNvSpPr/>
-          <p:nvPr/>
-        </p:nvSpPr>
-        <p:spPr>
-          <a:xfrm>
-            <a:off x="1371600" y="2935224"/>
-            <a:ext cx="9966960" cy="566928"/>
-          </a:xfrm>
-          <a:prstGeom prst="rect">
-            <a:avLst/>
-          </a:prstGeom>
-          <a:noFill/>
-          <a:ln/>
-        </p:spPr>
-        <p:txBody>
-          <a:bodyPr wrap="square" lIns="0" tIns="0" rIns="0" bIns="0" rtlCol="0" anchor="ctr"/>
-          <a:lstStyle/>
-          <a:p>
-            <a:pPr marL="0" indent="0" algn="l">
-              <a:buNone/>
-            </a:pPr>
-            <a:r>
-              <a:rPr lang="en-US" sz="1550" dirty="0">
-                <a:solidFill>
-                  <a:srgbClr val="1E2761"/>
-                </a:solidFill>
-                <a:latin typeface="Calibri" pitchFamily="34" charset="0"/>
-                <a:ea typeface="Calibri" pitchFamily="34" charset="-122"/>
-                <a:cs typeface="Calibri" pitchFamily="34" charset="-120"/>
-              </a:rPr>
-              <a:t>Run it (▶ Play button) and check the output</a:t>
-            </a:r>
-            <a:endParaRPr lang="en-US" sz="1550" dirty="0"/>
-          </a:p>
-        </p:txBody>
-      </p:sp>
-      <p:sp>
-        <p:nvSpPr>
-          <p:cNvPr id="19" name="Shape 16"/>
-          <p:cNvSpPr/>
-          <p:nvPr/>
-        </p:nvSpPr>
-        <p:spPr>
-          <a:xfrm>
-            <a:off x="822960" y="3529584"/>
-            <a:ext cx="384048" cy="384048"/>
-          </a:xfrm>
-          <a:prstGeom prst="ellipse">
-            <a:avLst/>
-          </a:prstGeom>
-          <a:solidFill>
-            <a:srgbClr val="F96167"/>
-          </a:solidFill>
-          <a:ln/>
-        </p:spPr>
-        <p:txBody>
-          <a:bodyPr/>
-          <a:lstStyle/>
-          <a:p>
-            <a:endParaRPr lang="nb-NO"/>
-          </a:p>
-        </p:txBody>
-      </p:sp>
-      <p:sp>
-        <p:nvSpPr>
-          <p:cNvPr id="20" name="Text 17"/>
-          <p:cNvSpPr/>
-          <p:nvPr/>
-        </p:nvSpPr>
-        <p:spPr>
-          <a:xfrm>
-            <a:off x="822960" y="3529584"/>
-            <a:ext cx="384048" cy="384048"/>
-          </a:xfrm>
-          <a:prstGeom prst="rect">
-            <a:avLst/>
-          </a:prstGeom>
-          <a:noFill/>
-          <a:ln/>
-        </p:spPr>
-        <p:txBody>
-          <a:bodyPr wrap="square" lIns="0" tIns="0" rIns="0" bIns="0" rtlCol="0" anchor="ctr"/>
-          <a:lstStyle/>
-          <a:p>
-            <a:pPr marL="0" indent="0" algn="ctr">
-              <a:buNone/>
-            </a:pPr>
-            <a:r>
-              <a:rPr lang="en-US" sz="1400" b="1" dirty="0">
-                <a:solidFill>
-                  <a:srgbClr val="FFFFFF"/>
-                </a:solidFill>
-                <a:latin typeface="Calibri" pitchFamily="34" charset="0"/>
-                <a:ea typeface="Calibri" pitchFamily="34" charset="-122"/>
-                <a:cs typeface="Calibri" pitchFamily="34" charset="-120"/>
-              </a:rPr>
-              <a:t>4</a:t>
-            </a:r>
-            <a:endParaRPr lang="en-US" sz="1400" dirty="0"/>
-          </a:p>
-        </p:txBody>
-      </p:sp>
-      <p:sp>
-        <p:nvSpPr>
-          <p:cNvPr id="21" name="Text 18"/>
-          <p:cNvSpPr/>
-          <p:nvPr/>
-        </p:nvSpPr>
-        <p:spPr>
-          <a:xfrm>
-            <a:off x="1371600" y="3502152"/>
-            <a:ext cx="9966960" cy="566928"/>
-          </a:xfrm>
-          <a:prstGeom prst="rect">
-            <a:avLst/>
-          </a:prstGeom>
-          <a:noFill/>
-          <a:ln/>
-        </p:spPr>
-        <p:txBody>
-          <a:bodyPr wrap="square" lIns="0" tIns="0" rIns="0" bIns="0" rtlCol="0" anchor="ctr"/>
-          <a:lstStyle/>
-          <a:p>
-            <a:pPr marL="0" indent="0" algn="l">
-              <a:buNone/>
-            </a:pPr>
-            <a:r>
-              <a:rPr lang="en-US" sz="1550" dirty="0">
-                <a:solidFill>
-                  <a:srgbClr val="1E2761"/>
-                </a:solidFill>
-                <a:latin typeface="Calibri" pitchFamily="34" charset="0"/>
-                <a:ea typeface="Calibri" pitchFamily="34" charset="-122"/>
-                <a:cs typeface="Calibri" pitchFamily="34" charset="-120"/>
-              </a:rPr>
-              <a:t>Open Source Control — see ex1.py listed under Changes</a:t>
-            </a:r>
-            <a:endParaRPr lang="en-US" sz="1550" dirty="0"/>
-          </a:p>
-        </p:txBody>
-      </p:sp>
-      <p:sp>
-        <p:nvSpPr>
-          <p:cNvPr id="22" name="Shape 19"/>
-          <p:cNvSpPr/>
-          <p:nvPr/>
-        </p:nvSpPr>
-        <p:spPr>
-          <a:xfrm>
-            <a:off x="822960" y="4096512"/>
-            <a:ext cx="384048" cy="384048"/>
-          </a:xfrm>
-          <a:prstGeom prst="ellipse">
-            <a:avLst/>
-          </a:prstGeom>
-          <a:solidFill>
-            <a:srgbClr val="F96167"/>
-          </a:solidFill>
-          <a:ln/>
-        </p:spPr>
-        <p:txBody>
-          <a:bodyPr/>
-          <a:lstStyle/>
-          <a:p>
-            <a:endParaRPr lang="nb-NO"/>
-          </a:p>
-        </p:txBody>
-      </p:sp>
-      <p:sp>
-        <p:nvSpPr>
-          <p:cNvPr id="23" name="Text 20"/>
-          <p:cNvSpPr/>
-          <p:nvPr/>
-        </p:nvSpPr>
-        <p:spPr>
-          <a:xfrm>
-            <a:off x="822960" y="4096512"/>
-            <a:ext cx="384048" cy="384048"/>
-          </a:xfrm>
-          <a:prstGeom prst="rect">
-            <a:avLst/>
-          </a:prstGeom>
-          <a:noFill/>
-          <a:ln/>
-        </p:spPr>
-        <p:txBody>
-          <a:bodyPr wrap="square" lIns="0" tIns="0" rIns="0" bIns="0" rtlCol="0" anchor="ctr"/>
-          <a:lstStyle/>
-          <a:p>
-            <a:pPr marL="0" indent="0" algn="ctr">
-              <a:buNone/>
-            </a:pPr>
-            <a:r>
-              <a:rPr lang="en-US" sz="1400" b="1" dirty="0">
-                <a:solidFill>
-                  <a:srgbClr val="FFFFFF"/>
-                </a:solidFill>
-                <a:latin typeface="Calibri" pitchFamily="34" charset="0"/>
-                <a:ea typeface="Calibri" pitchFamily="34" charset="-122"/>
-                <a:cs typeface="Calibri" pitchFamily="34" charset="-120"/>
-              </a:rPr>
-              <a:t>5</a:t>
-            </a:r>
-            <a:endParaRPr lang="en-US" sz="1400" dirty="0"/>
-          </a:p>
-        </p:txBody>
-      </p:sp>
-      <p:sp>
-        <p:nvSpPr>
-          <p:cNvPr id="24" name="Text 21"/>
-          <p:cNvSpPr/>
-          <p:nvPr/>
-        </p:nvSpPr>
-        <p:spPr>
-          <a:xfrm>
-            <a:off x="1371600" y="4069080"/>
-            <a:ext cx="9966960" cy="566928"/>
-          </a:xfrm>
-          <a:prstGeom prst="rect">
-            <a:avLst/>
-          </a:prstGeom>
-          <a:noFill/>
-          <a:ln/>
-        </p:spPr>
-        <p:txBody>
-          <a:bodyPr wrap="square" lIns="0" tIns="0" rIns="0" bIns="0" rtlCol="0" anchor="ctr"/>
-          <a:lstStyle/>
-          <a:p>
-            <a:pPr marL="0" indent="0" algn="l">
-              <a:buNone/>
-            </a:pPr>
-            <a:r>
-              <a:rPr lang="en-US" sz="1550" dirty="0">
-                <a:solidFill>
-                  <a:srgbClr val="1E2761"/>
-                </a:solidFill>
-                <a:latin typeface="Calibri" pitchFamily="34" charset="0"/>
-                <a:ea typeface="Calibri" pitchFamily="34" charset="-122"/>
-                <a:cs typeface="Calibri" pitchFamily="34" charset="-120"/>
-              </a:rPr>
-              <a:t>Click the + next to ex1.py to stage it</a:t>
-            </a:r>
-            <a:endParaRPr lang="en-US" sz="1550" dirty="0"/>
-          </a:p>
-        </p:txBody>
-      </p:sp>
-      <p:sp>
-        <p:nvSpPr>
-          <p:cNvPr id="25" name="Shape 22"/>
-          <p:cNvSpPr/>
-          <p:nvPr/>
-        </p:nvSpPr>
-        <p:spPr>
-          <a:xfrm>
-            <a:off x="822960" y="4663440"/>
-            <a:ext cx="384048" cy="384048"/>
-          </a:xfrm>
-          <a:prstGeom prst="ellipse">
-            <a:avLst/>
-          </a:prstGeom>
-          <a:solidFill>
-            <a:srgbClr val="F96167"/>
-          </a:solidFill>
-          <a:ln/>
-        </p:spPr>
-        <p:txBody>
-          <a:bodyPr/>
-          <a:lstStyle/>
-          <a:p>
-            <a:endParaRPr lang="nb-NO"/>
-          </a:p>
-        </p:txBody>
-      </p:sp>
-      <p:sp>
-        <p:nvSpPr>
-          <p:cNvPr id="26" name="Text 23"/>
-          <p:cNvSpPr/>
-          <p:nvPr/>
-        </p:nvSpPr>
-        <p:spPr>
-          <a:xfrm>
-            <a:off x="822960" y="4663440"/>
-            <a:ext cx="384048" cy="384048"/>
-          </a:xfrm>
-          <a:prstGeom prst="rect">
-            <a:avLst/>
-          </a:prstGeom>
-          <a:noFill/>
-          <a:ln/>
-        </p:spPr>
-        <p:txBody>
-          <a:bodyPr wrap="square" lIns="0" tIns="0" rIns="0" bIns="0" rtlCol="0" anchor="ctr"/>
-          <a:lstStyle/>
-          <a:p>
-            <a:pPr marL="0" indent="0" algn="ctr">
-              <a:buNone/>
-            </a:pPr>
-            <a:r>
-              <a:rPr lang="en-US" sz="1400" b="1" dirty="0">
-                <a:solidFill>
-                  <a:srgbClr val="FFFFFF"/>
-                </a:solidFill>
-                <a:latin typeface="Calibri" pitchFamily="34" charset="0"/>
-                <a:ea typeface="Calibri" pitchFamily="34" charset="-122"/>
-                <a:cs typeface="Calibri" pitchFamily="34" charset="-120"/>
-              </a:rPr>
-              <a:t>6</a:t>
-            </a:r>
-            <a:endParaRPr lang="en-US" sz="1400" dirty="0"/>
-          </a:p>
-        </p:txBody>
-      </p:sp>
-      <p:sp>
-        <p:nvSpPr>
-          <p:cNvPr id="27" name="Text 24"/>
-          <p:cNvSpPr/>
-          <p:nvPr/>
-        </p:nvSpPr>
-        <p:spPr>
-          <a:xfrm>
-            <a:off x="1371600" y="4636008"/>
-            <a:ext cx="9966960" cy="566928"/>
-          </a:xfrm>
-          <a:prstGeom prst="rect">
-            <a:avLst/>
-          </a:prstGeom>
-          <a:noFill/>
-          <a:ln/>
-        </p:spPr>
-        <p:txBody>
-          <a:bodyPr wrap="square" lIns="0" tIns="0" rIns="0" bIns="0" rtlCol="0" anchor="ctr"/>
-          <a:lstStyle/>
-          <a:p>
-            <a:pPr marL="0" indent="0" algn="l">
-              <a:buNone/>
-            </a:pPr>
-            <a:r>
-              <a:rPr lang="en-US" sz="1550" dirty="0">
-                <a:solidFill>
-                  <a:srgbClr val="1E2761"/>
-                </a:solidFill>
-                <a:latin typeface="Calibri" pitchFamily="34" charset="0"/>
-                <a:ea typeface="Calibri" pitchFamily="34" charset="-122"/>
-                <a:cs typeface="Calibri" pitchFamily="34" charset="-120"/>
-              </a:rPr>
-              <a:t>Type a commit message (e.g. “ex1: attempt”), then click ✓ Commit</a:t>
-            </a:r>
-            <a:endParaRPr lang="en-US" sz="1550" dirty="0"/>
-          </a:p>
-        </p:txBody>
-      </p:sp>
-      <p:sp>
-        <p:nvSpPr>
-          <p:cNvPr id="28" name="Shape 25"/>
-          <p:cNvSpPr/>
-          <p:nvPr/>
-        </p:nvSpPr>
-        <p:spPr>
-          <a:xfrm>
-            <a:off x="822960" y="5394960"/>
-            <a:ext cx="10543032" cy="640080"/>
-          </a:xfrm>
-          <a:prstGeom prst="roundRect">
-            <a:avLst>
-              <a:gd name="adj" fmla="val 11429"/>
-            </a:avLst>
-          </a:prstGeom>
-          <a:solidFill>
-            <a:srgbClr val="F1F4FB"/>
-          </a:solidFill>
-          <a:ln w="12700">
-            <a:solidFill>
-              <a:srgbClr val="F96167"/>
-            </a:solidFill>
-            <a:prstDash val="solid"/>
-          </a:ln>
-        </p:spPr>
-        <p:txBody>
-          <a:bodyPr/>
-          <a:lstStyle/>
-          <a:p>
-            <a:endParaRPr lang="nb-NO"/>
-          </a:p>
-        </p:txBody>
-      </p:sp>
-      <p:sp>
-        <p:nvSpPr>
-          <p:cNvPr id="29" name="Text 26"/>
-          <p:cNvSpPr/>
-          <p:nvPr/>
-        </p:nvSpPr>
-        <p:spPr>
-          <a:xfrm>
-            <a:off x="1051560" y="5394960"/>
-            <a:ext cx="10085832" cy="640080"/>
-          </a:xfrm>
-          <a:prstGeom prst="rect">
-            <a:avLst/>
-          </a:prstGeom>
-          <a:noFill/>
-          <a:ln/>
-        </p:spPr>
-        <p:txBody>
-          <a:bodyPr wrap="square" lIns="0" tIns="0" rIns="0" bIns="0" rtlCol="0" anchor="ctr"/>
-          <a:lstStyle/>
-          <a:p>
-            <a:r>
-              <a:rPr lang="en-US" sz="1350" b="1" i="1" dirty="0">
-                <a:solidFill>
-                  <a:srgbClr val="1E2761"/>
-                </a:solidFill>
-                <a:latin typeface="Calibri" pitchFamily="34" charset="0"/>
-                <a:ea typeface="Calibri" pitchFamily="34" charset="-122"/>
-                <a:cs typeface="Calibri" pitchFamily="34" charset="-120"/>
-              </a:rPr>
-              <a:t>Tip</a:t>
-            </a:r>
-            <a:r>
-              <a:rPr lang="en-US" sz="1350" i="1" dirty="0">
-                <a:solidFill>
-                  <a:srgbClr val="1E2761"/>
-                </a:solidFill>
-                <a:latin typeface="Calibri" pitchFamily="34" charset="0"/>
-                <a:ea typeface="Calibri" pitchFamily="34" charset="-122"/>
-                <a:cs typeface="Calibri" pitchFamily="34" charset="-120"/>
-              </a:rPr>
-              <a:t>: Before doing anything else in a project, glance at the Source Control panel — it always tells you exactly what's changed.</a:t>
-            </a:r>
-            <a:endParaRPr lang="en-US" sz="1350" dirty="0"/>
           </a:p>
         </p:txBody>
       </p:sp>
